--- a/solutions/g6_estrogen/slides/g6_estrogen.pptx
+++ b/solutions/g6_estrogen/slides/g6_estrogen.pptx
@@ -7,7 +7,7 @@
   <p:sldIdLst>
     <p:sldId id="256" r:id="rId7"/>
     <p:sldId id="257" r:id="rId8"/>
-    <p:sldId id="258" r:id="rId9"/>
+    <p:sldId id="258" r:id="rId10"/>
     <p:sldId id="259" r:id="rId11"/>
     <p:sldId id="260" r:id="rId12"/>
     <p:sldId id="261" r:id="rId13"/>
@@ -523,7 +523,7 @@
               <a:rPr b="1" sz="1300">
                 <a:latin typeface="Geist Mono"/>
               </a:rPr>
-              <a:t>A twenty-year detective story</a:t>
+              <a:t>Background</a:t>
             </a:r>
           </a:p>
           <a:p>
@@ -531,7 +531,7 @@
               <a:rPr b="0" sz="1100">
                 <a:latin typeface="Geist"/>
               </a:rPr>
-              <a:t>Open like a mystery, because it was one. For twenty years, observational studies -- just watching women, not assigning anything -- kept finding that estrogen users had sharper memory and less Alzheimer's [1, 2]. Doctors nearly started prescribing hormones for the brain. Then in 2003 the WHIMS randomized trial flipped a coin to decide who got hormones, and the benefit didn't just vanish, it reversed: dementia risk actually rose [3, 4]. Same drug, opposite answer. Set up the whole talk as: how can two honest studies disagree this badly? Transition: here it is in one picture.</a:t>
+              <a:t>This opens the Background section. Everything ahead sets up the central mystery: how could years of just watching women and a single coin-flip trial reach opposite conclusions about the very same hormones? For now keep the audience curious, not yet informed. Transition: start with the twenty-year detective story.</a:t>
             </a:r>
           </a:p>
         </p:txBody>
@@ -604,15 +604,7 @@
               <a:rPr b="1" sz="1300">
                 <a:latin typeface="Geist Mono"/>
               </a:rPr>
-              <a:t>The tests say “fine”; she says “not fine”</a:t>
-            </a:r>
-          </a:p>
-          <a:p>
-            <a:r>
-              <a:rPr b="0" sz="1100">
-                <a:latin typeface="Geist"/>
-              </a:rPr>
-              <a:t>Step outside the numbers. Our data is a test SCORE. But many women in menopause report real, daily 'brain fog' even when their objective test looks normal [7] -- the slope lines cross exactly there. And women's symptoms get waved off as stress far too often [8]. The grown-up data-scientist stance holds two true things at once: the confounding is real (the pill may not be the hero), AND the patient's lived report is real evidence, not noise. Transition: so what can this project honestly claim?</a:t>
+              <a:t>The tempting headline, exactly as anyone would first compute it. Average the memory score for users versus non-users: 51.8 versus 43.7, an 8-point head start for the estrogen group. If you stopped here, you'd write 'estrogen users think better' -- the same clue the 1990s studies chased. The whole point of the next slide is that we did NOT stop here. Transition: now adjust for who these women were.</a:t>
             </a:r>
           </a:p>
         </p:txBody>
@@ -685,7 +677,7 @@
               <a:rPr b="1" sz="1300">
                 <a:latin typeface="Geist Mono"/>
               </a:rPr>
-              <a:t>A survey can hint; only an experiment proves</a:t>
+              <a:t>Two-thirds of the effect was confounding</a:t>
             </a:r>
           </a:p>
           <a:p>
@@ -693,7 +685,7 @@
               <a:rPr b="0" sz="1100">
                 <a:latin typeface="Geist"/>
               </a:rPr>
-              <a:t>Be scrupulously honest about scope -- this is what earns trust. CAN DO: show a tempting headline is mostly a mirage and that adjusting shrinks it ~67%. CANNOT DO: prove cause -- we can only correct for confounders we measured and thought of; something unrecorded could still be doing the work. SETTLES IT: a randomized trial, where a coin flip (not the patient) assigns the drug, so the groups start identical. That's why WHIMS could do what twenty years of watching couldn't. Transition: the sources.</a:t>
+              <a:t>The punchline slide. Same data, honest test. Crude effect: about -0.33 (negative = looks protective). Adjusted for age, education, and income: it collapses to -0.11. That's a 67% shrink -- two-thirds of the 'benefit' was never the estrogen, it was that users were healthier and better-off to begin with. This is confounding caught in the act, a miniature of exactly why WHIMS overturned the observational headlines. If they remember one number from this talk, make it 67%. Transition: one more check any people-model needs.</a:t>
             </a:r>
           </a:p>
         </p:txBody>
@@ -766,7 +758,7 @@
               <a:rPr b="1" sz="1300">
                 <a:latin typeface="Geist Mono"/>
               </a:rPr>
-              <a:t>References</a:t>
+              <a:t>Does the model work for everyone?</a:t>
             </a:r>
           </a:p>
           <a:p>
@@ -774,7 +766,7 @@
               <a:rPr b="0" sz="1100">
                 <a:latin typeface="Geist"/>
               </a:rPr>
-              <a:t>The paper trail, in order of the story. Top-left: the two observational studies that raised the exciting clue [1, 2]. Bottom of the left column into the trial: the WHIMS randomized results that overturned it [3, 4]. Right column: the healthy-user-bias explanation [5, 6] and the brain-fog / symptom-dismissal pieces [7, 8]. All were checked against PubMed or the journal page. Transition: one habit to take with you.</a:t>
+              <a:t>A fairness audit, the habit from earlier this week. We trained one model to predict low cognition, then split its accuracy by group: 0.73 for estrogen-users, 0.65 for non-users. A model can look fine overall yet work unequally across groups -- and a clinic that trusts it equally could quietly do more harm to the group it's worse at. The mature move isn't to hide the gap; it's to name it. Transition: and there's something no score in this dataset can see at all.</a:t>
             </a:r>
           </a:p>
         </p:txBody>
@@ -847,6 +839,330 @@
               <a:rPr b="1" sz="1300">
                 <a:latin typeface="Geist Mono"/>
               </a:rPr>
+              <a:t>What the numbers can’t capture</a:t>
+            </a:r>
+          </a:p>
+          <a:p>
+            <a:r>
+              <a:rPr b="0" sz="1100">
+                <a:latin typeface="Geist"/>
+              </a:rPr>
+              <a:t>This opens the final section, the honest limits. We step outside the numbers: a test score can say 'fine' while a woman lives with real daily brain fog, and a survey can only hint at cause, never prove it. Framing: good science names what it cannot do. Transition: the tests say fine; she says not fine.</a:t>
+            </a:r>
+          </a:p>
+        </p:txBody>
+      </p:sp>
+      <p:sp>
+        <p:nvSpPr>
+          <p:cNvPr id="4" name="Slide Number Placeholder 3"/>
+          <p:cNvSpPr>
+            <a:spLocks noGrp="1"/>
+          </p:cNvSpPr>
+          <p:nvPr>
+            <p:ph type="sldNum" idx="5" sz="quarter"/>
+          </p:nvPr>
+        </p:nvSpPr>
+        <p:spPr/>
+      </p:sp>
+    </p:spTree>
+  </p:cSld>
+  <p:clrMapOvr>
+    <a:masterClrMapping/>
+  </p:clrMapOvr>
+</p:notes>
+</file>
+
+<file path=ppt/notesSlides/notesSlide14.xml><?xml version="1.0" encoding="utf-8"?>
+<p:notes xmlns:a="http://schemas.openxmlformats.org/drawingml/2006/main" xmlns:p="http://schemas.openxmlformats.org/presentationml/2006/main" xmlns:r="http://schemas.openxmlformats.org/officeDocument/2006/relationships">
+  <p:cSld>
+    <p:spTree>
+      <p:nvGrpSpPr>
+        <p:cNvPr id="1" name=""/>
+        <p:cNvGrpSpPr/>
+        <p:nvPr/>
+      </p:nvGrpSpPr>
+      <p:grpSpPr>
+        <a:xfrm>
+          <a:off x="0" y="0"/>
+          <a:ext cx="0" cy="0"/>
+          <a:chOff x="0" y="0"/>
+          <a:chExt cx="0" cy="0"/>
+        </a:xfrm>
+      </p:grpSpPr>
+      <p:sp>
+        <p:nvSpPr>
+          <p:cNvPr id="2" name="Slide Image Placeholder 1"/>
+          <p:cNvSpPr>
+            <a:spLocks noGrp="1"/>
+          </p:cNvSpPr>
+          <p:nvPr>
+            <p:ph type="sldImg" idx="2"/>
+          </p:nvPr>
+        </p:nvSpPr>
+        <p:spPr/>
+      </p:sp>
+      <p:sp>
+        <p:nvSpPr>
+          <p:cNvPr id="3" name="Notes Placeholder 2"/>
+          <p:cNvSpPr>
+            <a:spLocks noGrp="1"/>
+          </p:cNvSpPr>
+          <p:nvPr>
+            <p:ph type="body" idx="3" sz="quarter"/>
+          </p:nvPr>
+        </p:nvSpPr>
+        <p:spPr/>
+        <p:txBody>
+          <a:bodyPr/>
+          <a:lstStyle/>
+          <a:p>
+            <a:r>
+              <a:rPr b="1" sz="1300">
+                <a:latin typeface="Geist Mono"/>
+              </a:rPr>
+              <a:t>The tests say “fine”; she says “not fine”</a:t>
+            </a:r>
+          </a:p>
+          <a:p>
+            <a:r>
+              <a:rPr b="0" sz="1100">
+                <a:latin typeface="Geist"/>
+              </a:rPr>
+              <a:t>Step outside the numbers. Our data is a test SCORE. But many women in menopause report real, daily 'brain fog' even when their objective test looks normal [7] -- the slope lines cross exactly there. And women's symptoms get waved off as stress far too often [8]. The grown-up data-scientist stance holds two true things at once: the confounding is real (the pill may not be the hero), AND the patient's lived report is real evidence, not noise. Transition: so what can this project honestly claim?</a:t>
+            </a:r>
+          </a:p>
+        </p:txBody>
+      </p:sp>
+      <p:sp>
+        <p:nvSpPr>
+          <p:cNvPr id="4" name="Slide Number Placeholder 3"/>
+          <p:cNvSpPr>
+            <a:spLocks noGrp="1"/>
+          </p:cNvSpPr>
+          <p:nvPr>
+            <p:ph type="sldNum" idx="5" sz="quarter"/>
+          </p:nvPr>
+        </p:nvSpPr>
+        <p:spPr/>
+      </p:sp>
+    </p:spTree>
+  </p:cSld>
+  <p:clrMapOvr>
+    <a:masterClrMapping/>
+  </p:clrMapOvr>
+</p:notes>
+</file>
+
+<file path=ppt/notesSlides/notesSlide15.xml><?xml version="1.0" encoding="utf-8"?>
+<p:notes xmlns:a="http://schemas.openxmlformats.org/drawingml/2006/main" xmlns:p="http://schemas.openxmlformats.org/presentationml/2006/main" xmlns:r="http://schemas.openxmlformats.org/officeDocument/2006/relationships">
+  <p:cSld>
+    <p:spTree>
+      <p:nvGrpSpPr>
+        <p:cNvPr id="1" name=""/>
+        <p:cNvGrpSpPr/>
+        <p:nvPr/>
+      </p:nvGrpSpPr>
+      <p:grpSpPr>
+        <a:xfrm>
+          <a:off x="0" y="0"/>
+          <a:ext cx="0" cy="0"/>
+          <a:chOff x="0" y="0"/>
+          <a:chExt cx="0" cy="0"/>
+        </a:xfrm>
+      </p:grpSpPr>
+      <p:sp>
+        <p:nvSpPr>
+          <p:cNvPr id="2" name="Slide Image Placeholder 1"/>
+          <p:cNvSpPr>
+            <a:spLocks noGrp="1"/>
+          </p:cNvSpPr>
+          <p:nvPr>
+            <p:ph type="sldImg" idx="2"/>
+          </p:nvPr>
+        </p:nvSpPr>
+        <p:spPr/>
+      </p:sp>
+      <p:sp>
+        <p:nvSpPr>
+          <p:cNvPr id="3" name="Notes Placeholder 2"/>
+          <p:cNvSpPr>
+            <a:spLocks noGrp="1"/>
+          </p:cNvSpPr>
+          <p:nvPr>
+            <p:ph type="body" idx="3" sz="quarter"/>
+          </p:nvPr>
+        </p:nvSpPr>
+        <p:spPr/>
+        <p:txBody>
+          <a:bodyPr/>
+          <a:lstStyle/>
+          <a:p>
+            <a:r>
+              <a:rPr b="1" sz="1300">
+                <a:latin typeface="Geist Mono"/>
+              </a:rPr>
+              <a:t>A survey can hint; only an experiment proves</a:t>
+            </a:r>
+          </a:p>
+          <a:p>
+            <a:r>
+              <a:rPr b="0" sz="1100">
+                <a:latin typeface="Geist"/>
+              </a:rPr>
+              <a:t>Be scrupulously honest about scope -- this is what earns trust. CAN DO: show a tempting headline is mostly a mirage and that adjusting shrinks it ~67%. CANNOT DO: prove cause -- we can only correct for confounders we measured and thought of; something unrecorded could still be doing the work. SETTLES IT: a randomized trial, where a coin flip (not the patient) assigns the drug, so the groups start identical. That's why WHIMS could do what twenty years of watching couldn't. Transition: the sources.</a:t>
+            </a:r>
+          </a:p>
+        </p:txBody>
+      </p:sp>
+      <p:sp>
+        <p:nvSpPr>
+          <p:cNvPr id="4" name="Slide Number Placeholder 3"/>
+          <p:cNvSpPr>
+            <a:spLocks noGrp="1"/>
+          </p:cNvSpPr>
+          <p:nvPr>
+            <p:ph type="sldNum" idx="5" sz="quarter"/>
+          </p:nvPr>
+        </p:nvSpPr>
+        <p:spPr/>
+      </p:sp>
+    </p:spTree>
+  </p:cSld>
+  <p:clrMapOvr>
+    <a:masterClrMapping/>
+  </p:clrMapOvr>
+</p:notes>
+</file>
+
+<file path=ppt/notesSlides/notesSlide16.xml><?xml version="1.0" encoding="utf-8"?>
+<p:notes xmlns:a="http://schemas.openxmlformats.org/drawingml/2006/main" xmlns:p="http://schemas.openxmlformats.org/presentationml/2006/main" xmlns:r="http://schemas.openxmlformats.org/officeDocument/2006/relationships">
+  <p:cSld>
+    <p:spTree>
+      <p:nvGrpSpPr>
+        <p:cNvPr id="1" name=""/>
+        <p:cNvGrpSpPr/>
+        <p:nvPr/>
+      </p:nvGrpSpPr>
+      <p:grpSpPr>
+        <a:xfrm>
+          <a:off x="0" y="0"/>
+          <a:ext cx="0" cy="0"/>
+          <a:chOff x="0" y="0"/>
+          <a:chExt cx="0" cy="0"/>
+        </a:xfrm>
+      </p:grpSpPr>
+      <p:sp>
+        <p:nvSpPr>
+          <p:cNvPr id="2" name="Slide Image Placeholder 1"/>
+          <p:cNvSpPr>
+            <a:spLocks noGrp="1"/>
+          </p:cNvSpPr>
+          <p:nvPr>
+            <p:ph type="sldImg" idx="2"/>
+          </p:nvPr>
+        </p:nvSpPr>
+        <p:spPr/>
+      </p:sp>
+      <p:sp>
+        <p:nvSpPr>
+          <p:cNvPr id="3" name="Notes Placeholder 2"/>
+          <p:cNvSpPr>
+            <a:spLocks noGrp="1"/>
+          </p:cNvSpPr>
+          <p:nvPr>
+            <p:ph type="body" idx="3" sz="quarter"/>
+          </p:nvPr>
+        </p:nvSpPr>
+        <p:spPr/>
+        <p:txBody>
+          <a:bodyPr/>
+          <a:lstStyle/>
+          <a:p>
+            <a:r>
+              <a:rPr b="1" sz="1300">
+                <a:latin typeface="Geist Mono"/>
+              </a:rPr>
+              <a:t>References</a:t>
+            </a:r>
+          </a:p>
+          <a:p>
+            <a:r>
+              <a:rPr b="0" sz="1100">
+                <a:latin typeface="Geist"/>
+              </a:rPr>
+              <a:t>The paper trail, in order of the story. Top-left: the two observational studies that raised the exciting clue [1, 2]. Bottom of the left column into the trial: the WHIMS randomized results that overturned it [3, 4]. Right column: the healthy-user-bias explanation [5, 6] and the brain-fog / symptom-dismissal pieces [7, 8]. All were checked against PubMed or the journal page. Transition: one habit to take with you.</a:t>
+            </a:r>
+          </a:p>
+        </p:txBody>
+      </p:sp>
+      <p:sp>
+        <p:nvSpPr>
+          <p:cNvPr id="4" name="Slide Number Placeholder 3"/>
+          <p:cNvSpPr>
+            <a:spLocks noGrp="1"/>
+          </p:cNvSpPr>
+          <p:nvPr>
+            <p:ph type="sldNum" idx="5" sz="quarter"/>
+          </p:nvPr>
+        </p:nvSpPr>
+        <p:spPr/>
+      </p:sp>
+    </p:spTree>
+  </p:cSld>
+  <p:clrMapOvr>
+    <a:masterClrMapping/>
+  </p:clrMapOvr>
+</p:notes>
+</file>
+
+<file path=ppt/notesSlides/notesSlide17.xml><?xml version="1.0" encoding="utf-8"?>
+<p:notes xmlns:a="http://schemas.openxmlformats.org/drawingml/2006/main" xmlns:p="http://schemas.openxmlformats.org/presentationml/2006/main" xmlns:r="http://schemas.openxmlformats.org/officeDocument/2006/relationships">
+  <p:cSld>
+    <p:spTree>
+      <p:nvGrpSpPr>
+        <p:cNvPr id="1" name=""/>
+        <p:cNvGrpSpPr/>
+        <p:nvPr/>
+      </p:nvGrpSpPr>
+      <p:grpSpPr>
+        <a:xfrm>
+          <a:off x="0" y="0"/>
+          <a:ext cx="0" cy="0"/>
+          <a:chOff x="0" y="0"/>
+          <a:chExt cx="0" cy="0"/>
+        </a:xfrm>
+      </p:grpSpPr>
+      <p:sp>
+        <p:nvSpPr>
+          <p:cNvPr id="2" name="Slide Image Placeholder 1"/>
+          <p:cNvSpPr>
+            <a:spLocks noGrp="1"/>
+          </p:cNvSpPr>
+          <p:nvPr>
+            <p:ph type="sldImg" idx="2"/>
+          </p:nvPr>
+        </p:nvSpPr>
+        <p:spPr/>
+      </p:sp>
+      <p:sp>
+        <p:nvSpPr>
+          <p:cNvPr id="3" name="Notes Placeholder 2"/>
+          <p:cNvSpPr>
+            <a:spLocks noGrp="1"/>
+          </p:cNvSpPr>
+          <p:nvPr>
+            <p:ph type="body" idx="3" sz="quarter"/>
+          </p:nvPr>
+        </p:nvSpPr>
+        <p:spPr/>
+        <p:txBody>
+          <a:bodyPr/>
+          <a:lstStyle/>
+          <a:p>
+            <a:r>
+              <a:rPr b="1" sz="1300">
+                <a:latin typeface="Geist Mono"/>
+              </a:rPr>
               <a:t>The one habit to carry out the door</a:t>
             </a:r>
           </a:p>
@@ -928,7 +1244,7 @@
               <a:rPr b="1" sz="1300">
                 <a:latin typeface="Geist Mono"/>
               </a:rPr>
-              <a:t>When they flipped a coin, the benefit vanished</a:t>
+              <a:t>A twenty-year detective story</a:t>
             </a:r>
           </a:p>
           <a:p>
@@ -936,7 +1252,7 @@
               <a:rPr b="0" sz="1100">
                 <a:latin typeface="Geist"/>
               </a:rPr>
-              <a:t>This is our most important slide -- read it slowly. Left bar, 'just watching': hormone users looked protected, risk about two-thirds of non-users. Right bar, the coin-flip trial: risk more than doubled. The amber arrow is the sign flip. The dashed line is 'no effect.' The point for a 15-year-old: the STUDY DESIGN, not the drug, decided the answer. Watching can lie; a coin flip cannot. Transition: so why does watching lie here?</a:t>
+              <a:t>Open like a mystery, because it was one. For twenty years, observational studies -- just watching women, not assigning anything -- kept finding that estrogen users had sharper memory and less Alzheimer's [1, 2]. Doctors nearly started prescribing hormones for the brain. Then in 2003 the WHIMS randomized trial flipped a coin to decide who got hormones, and the benefit didn't just vanish, it reversed: dementia risk actually rose [3, 4]. Same drug, opposite answer. Set up the whole talk as: how can two honest studies disagree this badly? Transition: here it is in one picture.</a:t>
             </a:r>
           </a:p>
         </p:txBody>
@@ -1009,7 +1325,7 @@
               <a:rPr b="1" sz="1300">
                 <a:latin typeface="Geist Mono"/>
               </a:rPr>
-              <a:t>Healthy-user bias: a hidden third factor</a:t>
+              <a:t>When they flipped a coin, the benefit vanished</a:t>
             </a:r>
           </a:p>
           <a:p>
@@ -1017,7 +1333,7 @@
               <a:rPr b="0" sz="1100">
                 <a:latin typeface="Geist"/>
               </a:rPr>
-              <a:t>Now name the villain: confounding, or 'healthy-user bias.' The women who chose hormone therapy were, on average, richer, more active, and saw doctors more [5]. That hidden head start -- the pink box at the top -- pushes down on BOTH boxes: it makes them more likely to take the pill AND more likely to have good memory. So the dashed bottom arrow, 'takes pill -&gt; better memory,' only LOOKS like cause. It's a mirage created by the third factor [6]. This one diagram is the whole statistical idea of the talk. Transition: you already know this trap from summer.</a:t>
+              <a:t>This is our most important slide -- read it slowly. Left bar, 'just watching': hormone users looked protected, risk about two-thirds of non-users. Right bar, the coin-flip trial: risk more than doubled. The amber arrow is the sign flip. The dashed line is 'no effect.' The point for a 15-year-old: the STUDY DESIGN, not the drug, decided the answer. Watching can lie; a coin flip cannot. Transition: so why does watching lie here?</a:t>
             </a:r>
           </a:p>
         </p:txBody>
@@ -1090,7 +1406,7 @@
               <a:rPr b="1" sz="1300">
                 <a:latin typeface="Geist Mono"/>
               </a:rPr>
-              <a:t>Ice cream and shark attacks</a:t>
+              <a:t>Healthy-user bias: a hidden third factor</a:t>
             </a:r>
           </a:p>
           <a:p>
@@ -1098,7 +1414,7 @@
               <a:rPr b="0" sz="1100">
                 <a:latin typeface="Geist"/>
               </a:rPr>
-              <a:t>Make it click with the classic. Ice-cream sales and shark attacks rise together every summer -- but ice cream doesn't summon sharks; hot weather drives both. Map it: estrogen use is the ice cream, good memory is the shark attacks, and 'being healthier to start with' is the summer heat. The takeaway line is the transferable habit: when two things move together, hunt for the hidden third factor before you believe one caused the other. Transition: now to our own toy data.</a:t>
+              <a:t>Now name the villain: confounding, or 'healthy-user bias.' The women who chose hormone therapy were, on average, richer, more active, and saw doctors more [5]. That hidden head start -- the pink box at the top -- pushes down on BOTH boxes: it makes them more likely to take the pill AND more likely to have good memory. So the dashed bottom arrow, 'takes pill -&gt; better memory,' only LOOKS like cause. It's a mirage created by the third factor [6]. This one diagram is the whole statistical idea of the talk. Transition: you already know this trap from summer.</a:t>
             </a:r>
           </a:p>
         </p:txBody>
@@ -1171,7 +1487,7 @@
               <a:rPr b="1" sz="1300">
                 <a:latin typeface="Geist Mono"/>
               </a:rPr>
-              <a:t>Our data: NHANES women 60 and older</a:t>
+              <a:t>Ice cream and shark attacks</a:t>
             </a:r>
           </a:p>
           <a:p>
@@ -1179,7 +1495,7 @@
               <a:rPr b="0" sz="1100">
                 <a:latin typeface="Geist"/>
               </a:rPr>
-              <a:t>Quick tour of the dataset so the results land. 739 women, all 60+, from NHANES -- a real US government health survey, not something we made up. For each woman we know: did she ever use estrogen; her age, education, and income (the possible confounders); and a memory/attention test score, where higher is sharper. Our model tries to predict who lands in the weaker-scoring half. Keep it light -- they don't need every column, just the shape. Transition: what can we actually ask of survey data?</a:t>
+              <a:t>Make it click with the classic. Ice-cream sales and shark attacks rise together every summer -- but ice cream doesn't summon sharks; hot weather drives both. Map it: estrogen use is the ice cream, good memory is the shark attacks, and 'being healthier to start with' is the summer heat. The takeaway line is the transferable habit: when two things move together, hunt for the hidden third factor before you believe one caused the other. Transition: now to our own toy data.</a:t>
             </a:r>
           </a:p>
         </p:txBody>
@@ -1252,7 +1568,7 @@
               <a:rPr b="1" sz="1300">
                 <a:latin typeface="Geist Mono"/>
               </a:rPr>
-              <a:t>The one question we can actually ask</a:t>
+              <a:t>Methods</a:t>
             </a:r>
           </a:p>
           <a:p>
@@ -1260,7 +1576,7 @@
               <a:rPr b="0" sz="1100">
                 <a:latin typeface="Geist"/>
               </a:rPr>
-              <a:t>Set expectations honestly. We can't randomly assign estrogen in a survey -- so we can't prove cause. But we CAN ask the narrower question in the box: does the estrogen effect survive once we account for age, education, and income? We'll measure estrogen's effect two ways -- crude (alone) and adjusted (after the confounders). If it shrinks, the crude headline was mostly confounding. That crude-vs-adjusted move is the entire method. Transition: start with the naive, tempting look.</a:t>
+              <a:t>This opens the Methods section. We move from the big idea -- confounding -- to the concrete: the actual survey data we used and the one honest question a survey can answer. Plain-language framing: here is exactly what we looked at, and what we can fairly ask of it. Transition: meet the dataset.</a:t>
             </a:r>
           </a:p>
         </p:txBody>
@@ -1333,7 +1649,15 @@
               <a:rPr b="1" sz="1300">
                 <a:latin typeface="Geist Mono"/>
               </a:rPr>
-              <a:t>The tempting headline, exactly as anyone would first compute it. Average the memory score for users versus non-users: 51.8 versus 43.7, an 8-point head start for the estrogen group. If you stopped here, you'd write 'estrogen users think better' -- the same clue the 1990s studies chased. The whole point of the next slide is that we did NOT stop here. Transition: now adjust for who these women were.</a:t>
+              <a:t>Our data: NHANES women 60 and older</a:t>
+            </a:r>
+          </a:p>
+          <a:p>
+            <a:r>
+              <a:rPr b="0" sz="1100">
+                <a:latin typeface="Geist"/>
+              </a:rPr>
+              <a:t>Quick tour of the dataset so the results land. 739 women, all 60+, from NHANES -- a real US government health survey, not something we made up. For each woman we know: did she ever use estrogen; her age, education, and income (the possible confounders); and a memory/attention test score, where higher is sharper. Our model tries to predict who lands in the weaker-scoring half. Keep it light -- they don't need every column, just the shape. Transition: what can we actually ask of survey data?</a:t>
             </a:r>
           </a:p>
         </p:txBody>
@@ -1406,7 +1730,7 @@
               <a:rPr b="1" sz="1300">
                 <a:latin typeface="Geist Mono"/>
               </a:rPr>
-              <a:t>Two-thirds of the effect was confounding</a:t>
+              <a:t>The one question we can actually ask</a:t>
             </a:r>
           </a:p>
           <a:p>
@@ -1414,7 +1738,7 @@
               <a:rPr b="0" sz="1100">
                 <a:latin typeface="Geist"/>
               </a:rPr>
-              <a:t>The punchline slide. Same data, honest test. Crude effect: about -0.33 (negative = looks protective). Adjusted for age, education, and income: it collapses to -0.11. That's a 67% shrink -- two-thirds of the 'benefit' was never the estrogen, it was that users were healthier and better-off to begin with. This is confounding caught in the act, a miniature of exactly why WHIMS overturned the observational headlines. If they remember one number from this talk, make it 67%. Transition: one more check any people-model needs.</a:t>
+              <a:t>Set expectations honestly. We can't randomly assign estrogen in a survey -- so we can't prove cause. But we CAN ask the narrower question in the box: does the estrogen effect survive once we account for age, education, and income? We'll measure estrogen's effect two ways -- crude (alone) and adjusted (after the confounders). If it shrinks, the crude headline was mostly confounding. That crude-vs-adjusted move is the entire method. Transition: start with the naive, tempting look.</a:t>
             </a:r>
           </a:p>
         </p:txBody>
@@ -1487,7 +1811,7 @@
               <a:rPr b="1" sz="1300">
                 <a:latin typeface="Geist Mono"/>
               </a:rPr>
-              <a:t>Does the model work for everyone?</a:t>
+              <a:t>Results</a:t>
             </a:r>
           </a:p>
           <a:p>
@@ -1495,7 +1819,7 @@
               <a:rPr b="0" sz="1100">
                 <a:latin typeface="Geist"/>
               </a:rPr>
-              <a:t>A fairness audit, the habit from earlier this week. We trained one model to predict low cognition, then split its accuracy by group: 0.73 for estrogen-users, 0.65 for non-users. A model can look fine overall yet work unequally across groups -- and a clinic that trusts it equally could quietly do more harm to the group it's worse at. The mature move isn't to hide the gap; it's to name it. Transition: and there's something no score in this dataset can see at all.</a:t>
+              <a:t>This opens the Results section, the payoff. Three slides ahead: the tempting raw headline, the honest adjusted result that shrinks it, and a fairness check on the model. Signal that this is where the numbers finally land. Transition: start with the headline anyone would compute first.</a:t>
             </a:r>
           </a:p>
         </p:txBody>
@@ -7724,8 +8048,8 @@
         </p:nvSpPr>
         <p:spPr>
           <a:xfrm>
-            <a:off x="457200" y="1143000"/>
-            <a:ext cx="3505200" cy="4846319"/>
+            <a:off x="457200" y="2423159"/>
+            <a:ext cx="3505200" cy="2468880"/>
           </a:xfrm>
           <a:prstGeom prst="rect">
             <a:avLst/>
@@ -7768,8 +8092,8 @@
         </p:nvSpPr>
         <p:spPr>
           <a:xfrm>
-            <a:off x="457200" y="1143000"/>
-            <a:ext cx="3505200" cy="54864"/>
+            <a:off x="457200" y="2423159"/>
+            <a:ext cx="3505200" cy="82296"/>
           </a:xfrm>
           <a:prstGeom prst="rect">
             <a:avLst/>
@@ -7812,8 +8136,8 @@
         </p:nvSpPr>
         <p:spPr>
           <a:xfrm>
-            <a:off x="621792" y="1234440"/>
-            <a:ext cx="3176016" cy="384048"/>
+            <a:off x="694944" y="2642615"/>
+            <a:ext cx="3029712" cy="365760"/>
           </a:xfrm>
           <a:prstGeom prst="rect">
             <a:avLst/>
@@ -7828,9 +8152,9 @@
           <a:p>
             <a:pPr algn="l"/>
             <a:r>
-              <a:rPr sz="1400" b="1" i="0">
-                <a:solidFill>
-                  <a:srgbClr val="40E0D0"/>
+              <a:rPr sz="1500" b="1" i="0">
+                <a:solidFill>
+                  <a:srgbClr val="0C7A6A"/>
                 </a:solidFill>
                 <a:latin typeface="Geist Mono"/>
               </a:rPr>
@@ -7847,8 +8171,8 @@
         </p:nvSpPr>
         <p:spPr>
           <a:xfrm>
-            <a:off x="621792" y="1783080"/>
-            <a:ext cx="3176016" cy="4114799"/>
+            <a:off x="694944" y="3191255"/>
+            <a:ext cx="3029712" cy="1572768"/>
           </a:xfrm>
           <a:prstGeom prst="rect">
             <a:avLst/>
@@ -7863,13 +8187,13 @@
           <a:p>
             <a:pPr algn="l"/>
             <a:r>
-              <a:rPr sz="1200" b="0" i="0">
+              <a:rPr sz="1400" b="0" i="0">
                 <a:solidFill>
                   <a:srgbClr val="14141C"/>
                 </a:solidFill>
                 <a:latin typeface="Geist"/>
               </a:rPr>
-              <a:t>Show a tempting headline is mostly a mirage, and that adjusting shrinks the effect by ~67%.</a:t>
+              <a:t>Show that a tempting headline is mostly a mirage, and that adjusting for background shrinks the apparent estrogen effect by about 67%.</a:t>
             </a:r>
           </a:p>
         </p:txBody>
@@ -7882,8 +8206,8 @@
         </p:nvSpPr>
         <p:spPr>
           <a:xfrm>
-            <a:off x="4328160" y="1143000"/>
-            <a:ext cx="3505200" cy="4846319"/>
+            <a:off x="4328160" y="2423159"/>
+            <a:ext cx="3505200" cy="2468880"/>
           </a:xfrm>
           <a:prstGeom prst="rect">
             <a:avLst/>
@@ -7926,8 +8250,8 @@
         </p:nvSpPr>
         <p:spPr>
           <a:xfrm>
-            <a:off x="4328160" y="1143000"/>
-            <a:ext cx="3505200" cy="54864"/>
+            <a:off x="4328160" y="2423159"/>
+            <a:ext cx="3505200" cy="82296"/>
           </a:xfrm>
           <a:prstGeom prst="rect">
             <a:avLst/>
@@ -7970,8 +8294,8 @@
         </p:nvSpPr>
         <p:spPr>
           <a:xfrm>
-            <a:off x="4492752" y="1234440"/>
-            <a:ext cx="3176016" cy="384048"/>
+            <a:off x="4565904" y="2642615"/>
+            <a:ext cx="3029712" cy="365760"/>
           </a:xfrm>
           <a:prstGeom prst="rect">
             <a:avLst/>
@@ -7986,7 +8310,7 @@
           <a:p>
             <a:pPr algn="l"/>
             <a:r>
-              <a:rPr sz="1400" b="1" i="0">
+              <a:rPr sz="1500" b="1" i="0">
                 <a:solidFill>
                   <a:srgbClr val="FF1493"/>
                 </a:solidFill>
@@ -8005,8 +8329,8 @@
         </p:nvSpPr>
         <p:spPr>
           <a:xfrm>
-            <a:off x="4492752" y="1783080"/>
-            <a:ext cx="3176016" cy="4114799"/>
+            <a:off x="4565904" y="3191255"/>
+            <a:ext cx="3029712" cy="1572768"/>
           </a:xfrm>
           <a:prstGeom prst="rect">
             <a:avLst/>
@@ -8021,13 +8345,13 @@
           <a:p>
             <a:pPr algn="l"/>
             <a:r>
-              <a:rPr sz="1200" b="0" i="0">
+              <a:rPr sz="1400" b="0" i="0">
                 <a:solidFill>
                   <a:srgbClr val="14141C"/>
                 </a:solidFill>
                 <a:latin typeface="Geist"/>
               </a:rPr>
-              <a:t>Prove cause. We can only correct for confounders we actually measured and thought of.</a:t>
+              <a:t>Prove cause. We can only correct for the confounders we actually measured and thought of -- something unrecorded could still be doing the work.</a:t>
             </a:r>
           </a:p>
         </p:txBody>
@@ -8040,8 +8364,8 @@
         </p:nvSpPr>
         <p:spPr>
           <a:xfrm>
-            <a:off x="8199120" y="1143000"/>
-            <a:ext cx="3505200" cy="4846319"/>
+            <a:off x="8199120" y="2423159"/>
+            <a:ext cx="3505200" cy="2468880"/>
           </a:xfrm>
           <a:prstGeom prst="rect">
             <a:avLst/>
@@ -8084,8 +8408,8 @@
         </p:nvSpPr>
         <p:spPr>
           <a:xfrm>
-            <a:off x="8199120" y="1143000"/>
-            <a:ext cx="3505200" cy="54864"/>
+            <a:off x="8199120" y="2423159"/>
+            <a:ext cx="3505200" cy="82296"/>
           </a:xfrm>
           <a:prstGeom prst="rect">
             <a:avLst/>
@@ -8128,8 +8452,8 @@
         </p:nvSpPr>
         <p:spPr>
           <a:xfrm>
-            <a:off x="8363712" y="1234440"/>
-            <a:ext cx="3176016" cy="384048"/>
+            <a:off x="8436864" y="2642615"/>
+            <a:ext cx="3029712" cy="365760"/>
           </a:xfrm>
           <a:prstGeom prst="rect">
             <a:avLst/>
@@ -8144,9 +8468,9 @@
           <a:p>
             <a:pPr algn="l"/>
             <a:r>
-              <a:rPr sz="1400" b="1" i="0">
-                <a:solidFill>
-                  <a:srgbClr val="F0C840"/>
+              <a:rPr sz="1500" b="1" i="0">
+                <a:solidFill>
+                  <a:srgbClr val="8A6D00"/>
                 </a:solidFill>
                 <a:latin typeface="Geist Mono"/>
               </a:rPr>
@@ -8163,8 +8487,8 @@
         </p:nvSpPr>
         <p:spPr>
           <a:xfrm>
-            <a:off x="8363712" y="1783080"/>
-            <a:ext cx="3176016" cy="4114799"/>
+            <a:off x="8436864" y="3191255"/>
+            <a:ext cx="3029712" cy="1572768"/>
           </a:xfrm>
           <a:prstGeom prst="rect">
             <a:avLst/>
@@ -8179,13 +8503,13 @@
           <a:p>
             <a:pPr algn="l"/>
             <a:r>
-              <a:rPr sz="1200" b="0" i="0">
+              <a:rPr sz="1400" b="0" i="0">
                 <a:solidFill>
                   <a:srgbClr val="14141C"/>
                 </a:solidFill>
                 <a:latin typeface="Geist"/>
               </a:rPr>
-              <a:t>A randomized trial: a coin flip, not the patient, assigns the drug. That is why WHIMS could overturn 20 years of headlines.</a:t>
+              <a:t>A randomized trial: a coin flip, not the patient, assigns the drug, so the two groups start out identical. That is why WHIMS could overturn 20 years of headlines.</a:t>
             </a:r>
           </a:p>
         </p:txBody>
@@ -8918,7 +9242,7 @@
         </p:nvSpPr>
         <p:spPr>
           <a:xfrm>
-            <a:off x="457200" y="1234440"/>
+            <a:off x="457200" y="1737360"/>
             <a:ext cx="146304" cy="2194560"/>
           </a:xfrm>
           <a:prstGeom prst="rect">
@@ -8962,7 +9286,7 @@
         </p:nvSpPr>
         <p:spPr>
           <a:xfrm>
-            <a:off x="914400" y="1234440"/>
+            <a:off x="914400" y="1737360"/>
             <a:ext cx="10698480" cy="1371600"/>
           </a:xfrm>
           <a:prstGeom prst="rect">
@@ -8997,7 +9321,7 @@
         </p:nvSpPr>
         <p:spPr>
           <a:xfrm>
-            <a:off x="914400" y="2743200"/>
+            <a:off x="914400" y="3291840"/>
             <a:ext cx="10332720" cy="1097280"/>
           </a:xfrm>
           <a:prstGeom prst="rect">
@@ -9032,7 +9356,7 @@
         </p:nvSpPr>
         <p:spPr>
           <a:xfrm>
-            <a:off x="914400" y="3886200"/>
+            <a:off x="914400" y="4526280"/>
             <a:ext cx="10332720" cy="731520"/>
           </a:xfrm>
           <a:prstGeom prst="rect">
@@ -10115,8 +10439,8 @@
         </p:nvSpPr>
         <p:spPr>
           <a:xfrm>
-            <a:off x="457200" y="1051560"/>
-            <a:ext cx="5440680" cy="4160519"/>
+            <a:off x="457200" y="1965960"/>
+            <a:ext cx="5394960" cy="2331720"/>
           </a:xfrm>
           <a:prstGeom prst="rect">
             <a:avLst/>
@@ -10159,8 +10483,8 @@
         </p:nvSpPr>
         <p:spPr>
           <a:xfrm>
-            <a:off x="457200" y="1051560"/>
-            <a:ext cx="5440680" cy="54864"/>
+            <a:off x="457200" y="1965960"/>
+            <a:ext cx="5394960" cy="82296"/>
           </a:xfrm>
           <a:prstGeom prst="rect">
             <a:avLst/>
@@ -10203,8 +10527,8 @@
         </p:nvSpPr>
         <p:spPr>
           <a:xfrm>
-            <a:off x="621792" y="1143000"/>
-            <a:ext cx="5111496" cy="384048"/>
+            <a:off x="713232" y="2185416"/>
+            <a:ext cx="4882896" cy="365760"/>
           </a:xfrm>
           <a:prstGeom prst="rect">
             <a:avLst/>
@@ -10219,9 +10543,9 @@
           <a:p>
             <a:pPr algn="l"/>
             <a:r>
-              <a:rPr sz="1400" b="1" i="0">
-                <a:solidFill>
-                  <a:srgbClr val="40E0D0"/>
+              <a:rPr sz="1500" b="1" i="0">
+                <a:solidFill>
+                  <a:srgbClr val="0C7A6A"/>
                 </a:solidFill>
                 <a:latin typeface="Geist Mono"/>
               </a:rPr>
@@ -10238,8 +10562,8 @@
         </p:nvSpPr>
         <p:spPr>
           <a:xfrm>
-            <a:off x="621792" y="1691640"/>
-            <a:ext cx="5111496" cy="3428999"/>
+            <a:off x="713232" y="2734056"/>
+            <a:ext cx="4882896" cy="1435607"/>
           </a:xfrm>
           <a:prstGeom prst="rect">
             <a:avLst/>
@@ -10254,13 +10578,13 @@
           <a:p>
             <a:pPr algn="l"/>
             <a:r>
-              <a:rPr sz="1200" b="0" i="0">
+              <a:rPr sz="1500" b="0" i="0">
                 <a:solidFill>
                   <a:srgbClr val="14141C"/>
                 </a:solidFill>
                 <a:latin typeface="Geist"/>
               </a:rPr>
-              <a:t>Studies that simply WATCHED women found that estrogen users developed Alzheimer's less often and later [1, 2]. It looked like solid proof the pills protected the brain.</a:t>
+              <a:t>Studies that simply WATCHED women found that estrogen users developed Alzheimer's less often, and later, than women who never took it [1, 2]. For years this looked like solid proof that the pills protected the aging brain.</a:t>
             </a:r>
           </a:p>
         </p:txBody>
@@ -10273,8 +10597,8 @@
         </p:nvSpPr>
         <p:spPr>
           <a:xfrm>
-            <a:off x="6263640" y="1051560"/>
-            <a:ext cx="5440680" cy="4160519"/>
+            <a:off x="6309360" y="1965960"/>
+            <a:ext cx="5394960" cy="2331720"/>
           </a:xfrm>
           <a:prstGeom prst="rect">
             <a:avLst/>
@@ -10317,8 +10641,8 @@
         </p:nvSpPr>
         <p:spPr>
           <a:xfrm>
-            <a:off x="6263640" y="1051560"/>
-            <a:ext cx="5440680" cy="54864"/>
+            <a:off x="6309360" y="1965960"/>
+            <a:ext cx="5394960" cy="82296"/>
           </a:xfrm>
           <a:prstGeom prst="rect">
             <a:avLst/>
@@ -10361,8 +10685,8 @@
         </p:nvSpPr>
         <p:spPr>
           <a:xfrm>
-            <a:off x="6428232" y="1143000"/>
-            <a:ext cx="5111496" cy="384048"/>
+            <a:off x="6565392" y="2185416"/>
+            <a:ext cx="4882896" cy="365760"/>
           </a:xfrm>
           <a:prstGeom prst="rect">
             <a:avLst/>
@@ -10377,7 +10701,7 @@
           <a:p>
             <a:pPr algn="l"/>
             <a:r>
-              <a:rPr sz="1400" b="1" i="0">
+              <a:rPr sz="1500" b="1" i="0">
                 <a:solidFill>
                   <a:srgbClr val="FF1493"/>
                 </a:solidFill>
@@ -10396,8 +10720,8 @@
         </p:nvSpPr>
         <p:spPr>
           <a:xfrm>
-            <a:off x="6428232" y="1691640"/>
-            <a:ext cx="5111496" cy="3428999"/>
+            <a:off x="6565392" y="2734056"/>
+            <a:ext cx="4882896" cy="1435607"/>
           </a:xfrm>
           <a:prstGeom prst="rect">
             <a:avLst/>
@@ -10412,13 +10736,13 @@
           <a:p>
             <a:pPr algn="l"/>
             <a:r>
-              <a:rPr sz="1200" b="0" i="0">
+              <a:rPr sz="1500" b="0" i="0">
                 <a:solidFill>
                   <a:srgbClr val="14141C"/>
                 </a:solidFill>
                 <a:latin typeface="Geist"/>
               </a:rPr>
-              <a:t>Then the WHIMS trial let a COIN FLIP decide who got hormones. The benefit vanished, and dementia risk actually ROSE in women 65+ [3, 4].</a:t>
+              <a:t>Then the WHIMS trial let a COIN FLIP -- not the woman herself -- decide who got hormones. The memory benefit vanished, and dementia risk actually ROSE in women aged 65 and older [3, 4].</a:t>
             </a:r>
           </a:p>
         </p:txBody>
@@ -10431,8 +10755,8 @@
         </p:nvSpPr>
         <p:spPr>
           <a:xfrm>
-            <a:off x="457200" y="5468112"/>
-            <a:ext cx="11247120" cy="566928"/>
+            <a:off x="457200" y="4663440"/>
+            <a:ext cx="11247120" cy="685800"/>
           </a:xfrm>
           <a:prstGeom prst="rect">
             <a:avLst/>
@@ -10475,8 +10799,8 @@
         </p:nvSpPr>
         <p:spPr>
           <a:xfrm>
-            <a:off x="685800" y="5468112"/>
-            <a:ext cx="10789920" cy="566928"/>
+            <a:off x="731520" y="4663440"/>
+            <a:ext cx="10698480" cy="685800"/>
           </a:xfrm>
           <a:prstGeom prst="rect">
             <a:avLst/>
@@ -10491,13 +10815,13 @@
           <a:p>
             <a:pPr algn="l"/>
             <a:r>
-              <a:rPr sz="1800" b="1" i="0">
+              <a:rPr sz="1900" b="1" i="0">
                 <a:solidFill>
                   <a:srgbClr val="14141C"/>
                 </a:solidFill>
                 <a:latin typeface="Geist Mono"/>
               </a:rPr>
-              <a:t>Same drug, opposite answer. The rest of this talk is one question: HOW?</a:t>
+              <a:t>Same drug, opposite answer. The rest of this talk is one question:  HOW?</a:t>
             </a:r>
           </a:p>
         </p:txBody>
@@ -10738,8 +11062,8 @@
         </p:blipFill>
         <p:spPr>
           <a:xfrm>
-            <a:off x="2285796" y="1097280"/>
-            <a:ext cx="7589926" cy="5120640"/>
+            <a:off x="2794050" y="1051560"/>
+            <a:ext cx="6573418" cy="4434840"/>
           </a:xfrm>
           <a:prstGeom prst="rect">
             <a:avLst/>
@@ -10754,8 +11078,8 @@
         </p:nvSpPr>
         <p:spPr>
           <a:xfrm>
-            <a:off x="457200" y="5989320"/>
-            <a:ext cx="11247120" cy="274320"/>
+            <a:off x="1371600" y="5715000"/>
+            <a:ext cx="9418320" cy="548640"/>
           </a:xfrm>
           <a:prstGeom prst="rect">
             <a:avLst/>
@@ -10770,13 +11094,13 @@
           <a:p>
             <a:pPr algn="ctr"/>
             <a:r>
-              <a:rPr sz="1300" b="0" i="1">
+              <a:rPr sz="1400" b="0" i="1">
                 <a:solidFill>
                   <a:srgbClr val="555560"/>
                 </a:solidFill>
                 <a:latin typeface="Geist"/>
               </a:rPr>
-              <a:t>Just watching (turquoise) said hormones protect; the coin-flip trial (pink) said they harm.</a:t>
+              <a:t>Just watching (turquoise) said hormones PROTECT; the coin-flip trial (pink) said they HARM -- the study design, not the drug, decided the answer.</a:t>
             </a:r>
           </a:p>
         </p:txBody>
@@ -11551,8 +11875,8 @@
         </p:nvSpPr>
         <p:spPr>
           <a:xfrm>
-            <a:off x="457200" y="1051560"/>
-            <a:ext cx="11247120" cy="502920"/>
+            <a:off x="457200" y="1143000"/>
+            <a:ext cx="11247120" cy="777240"/>
           </a:xfrm>
           <a:prstGeom prst="rect">
             <a:avLst/>
@@ -11567,7 +11891,7 @@
           <a:p>
             <a:pPr algn="l"/>
             <a:r>
-              <a:rPr sz="1700" b="0" i="0">
+              <a:rPr sz="1800" b="0" i="0">
                 <a:solidFill>
                   <a:srgbClr val="14141C"/>
                 </a:solidFill>
@@ -11586,8 +11910,8 @@
         </p:nvSpPr>
         <p:spPr>
           <a:xfrm>
-            <a:off x="457200" y="1737360"/>
-            <a:ext cx="5440680" cy="3428999"/>
+            <a:off x="457200" y="2011680"/>
+            <a:ext cx="5394960" cy="2286000"/>
           </a:xfrm>
           <a:prstGeom prst="rect">
             <a:avLst/>
@@ -11630,8 +11954,8 @@
         </p:nvSpPr>
         <p:spPr>
           <a:xfrm>
-            <a:off x="457200" y="1737360"/>
-            <a:ext cx="5440680" cy="54864"/>
+            <a:off x="457200" y="2011680"/>
+            <a:ext cx="5394960" cy="82296"/>
           </a:xfrm>
           <a:prstGeom prst="rect">
             <a:avLst/>
@@ -11674,8 +11998,8 @@
         </p:nvSpPr>
         <p:spPr>
           <a:xfrm>
-            <a:off x="621792" y="1828800"/>
-            <a:ext cx="5111496" cy="384048"/>
+            <a:off x="713232" y="2231136"/>
+            <a:ext cx="4882896" cy="365760"/>
           </a:xfrm>
           <a:prstGeom prst="rect">
             <a:avLst/>
@@ -11690,7 +12014,7 @@
           <a:p>
             <a:pPr algn="l"/>
             <a:r>
-              <a:rPr sz="1400" b="1" i="0">
+              <a:rPr sz="1500" b="1" i="0">
                 <a:solidFill>
                   <a:srgbClr val="8A2BE2"/>
                 </a:solidFill>
@@ -11709,8 +12033,8 @@
         </p:nvSpPr>
         <p:spPr>
           <a:xfrm>
-            <a:off x="621792" y="2377440"/>
-            <a:ext cx="5111496" cy="2697479"/>
+            <a:off x="713232" y="2779776"/>
+            <a:ext cx="4882896" cy="1389888"/>
           </a:xfrm>
           <a:prstGeom prst="rect">
             <a:avLst/>
@@ -11725,13 +12049,13 @@
           <a:p>
             <a:pPr algn="l"/>
             <a:r>
-              <a:rPr sz="1200" b="0" i="0">
+              <a:rPr sz="1500" b="0" i="0">
                 <a:solidFill>
                   <a:srgbClr val="14141C"/>
                 </a:solidFill>
                 <a:latin typeface="Geist"/>
               </a:rPr>
-              <a:t>No -- the hot SUMMER WEATHER drives both: heat sells ice cream and sends people into the ocean. Neither one causes the other.</a:t>
+              <a:t>No -- the hot SUMMER WEATHER drives both at once: heat sells more ice cream AND sends more people into the ocean to swim. Neither one causes the other.</a:t>
             </a:r>
           </a:p>
         </p:txBody>
@@ -11744,8 +12068,8 @@
         </p:nvSpPr>
         <p:spPr>
           <a:xfrm>
-            <a:off x="6263640" y="1737360"/>
-            <a:ext cx="5440680" cy="3428999"/>
+            <a:off x="6309360" y="2011680"/>
+            <a:ext cx="5394960" cy="2286000"/>
           </a:xfrm>
           <a:prstGeom prst="rect">
             <a:avLst/>
@@ -11788,8 +12112,8 @@
         </p:nvSpPr>
         <p:spPr>
           <a:xfrm>
-            <a:off x="6263640" y="1737360"/>
-            <a:ext cx="5440680" cy="54864"/>
+            <a:off x="6309360" y="2011680"/>
+            <a:ext cx="5394960" cy="82296"/>
           </a:xfrm>
           <a:prstGeom prst="rect">
             <a:avLst/>
@@ -11832,8 +12156,8 @@
         </p:nvSpPr>
         <p:spPr>
           <a:xfrm>
-            <a:off x="6428232" y="1828800"/>
-            <a:ext cx="5111496" cy="384048"/>
+            <a:off x="6565392" y="2231136"/>
+            <a:ext cx="4882896" cy="365760"/>
           </a:xfrm>
           <a:prstGeom prst="rect">
             <a:avLst/>
@@ -11848,9 +12172,9 @@
           <a:p>
             <a:pPr algn="l"/>
             <a:r>
-              <a:rPr sz="1400" b="1" i="0">
-                <a:solidFill>
-                  <a:srgbClr val="40E0D0"/>
+              <a:rPr sz="1500" b="1" i="0">
+                <a:solidFill>
+                  <a:srgbClr val="0C7A6A"/>
                 </a:solidFill>
                 <a:latin typeface="Geist Mono"/>
               </a:rPr>
@@ -11867,8 +12191,8 @@
         </p:nvSpPr>
         <p:spPr>
           <a:xfrm>
-            <a:off x="6428232" y="2377440"/>
-            <a:ext cx="5111496" cy="2697479"/>
+            <a:off x="6565392" y="2779776"/>
+            <a:ext cx="4882896" cy="1389888"/>
           </a:xfrm>
           <a:prstGeom prst="rect">
             <a:avLst/>
@@ -11883,13 +12207,13 @@
           <a:p>
             <a:pPr algn="l"/>
             <a:r>
-              <a:rPr sz="1200" b="0" i="0">
+              <a:rPr sz="1500" b="0" i="0">
                 <a:solidFill>
                   <a:srgbClr val="14141C"/>
                 </a:solidFill>
                 <a:latin typeface="Geist"/>
               </a:rPr>
-              <a:t>Estrogen use and good memory rise together. Being HEALTHIER to start with drives both -- the pill may summon nothing.</a:t>
+              <a:t>Estrogen use and good memory also rise together. But being HEALTHIER and better-off to start with can drive both -- so the pill itself may summon nothing.</a:t>
             </a:r>
           </a:p>
         </p:txBody>
@@ -11902,8 +12226,8 @@
         </p:nvSpPr>
         <p:spPr>
           <a:xfrm>
-            <a:off x="457200" y="5367527"/>
-            <a:ext cx="11247120" cy="502920"/>
+            <a:off x="457200" y="4681728"/>
+            <a:ext cx="11247120" cy="640080"/>
           </a:xfrm>
           <a:prstGeom prst="rect">
             <a:avLst/>
@@ -11911,14 +12235,14 @@
           <a:noFill/>
         </p:spPr>
         <p:txBody>
-          <a:bodyPr wrap="square" anchor="t" lIns="0" rIns="0" tIns="0" bIns="0">
+          <a:bodyPr wrap="square" anchor="ctr" lIns="0" rIns="0" tIns="0" bIns="0">
             <a:spAutoFit/>
           </a:bodyPr>
           <a:lstStyle/>
           <a:p>
             <a:pPr algn="l"/>
             <a:r>
-              <a:rPr sz="1500" b="1" i="0">
+              <a:rPr sz="1700" b="1" i="0">
                 <a:solidFill>
                   <a:srgbClr val="FF1493"/>
                 </a:solidFill>
@@ -12604,8 +12928,8 @@
         </p:nvSpPr>
         <p:spPr>
           <a:xfrm>
-            <a:off x="457200" y="1143000"/>
-            <a:ext cx="2571750" cy="4846319"/>
+            <a:off x="457200" y="2468879"/>
+            <a:ext cx="2592324" cy="2377440"/>
           </a:xfrm>
           <a:prstGeom prst="rect">
             <a:avLst/>
@@ -12648,8 +12972,8 @@
         </p:nvSpPr>
         <p:spPr>
           <a:xfrm>
-            <a:off x="457200" y="1143000"/>
-            <a:ext cx="2571750" cy="54864"/>
+            <a:off x="457200" y="2468879"/>
+            <a:ext cx="2592324" cy="82296"/>
           </a:xfrm>
           <a:prstGeom prst="rect">
             <a:avLst/>
@@ -12692,8 +13016,8 @@
         </p:nvSpPr>
         <p:spPr>
           <a:xfrm>
-            <a:off x="621792" y="1234440"/>
-            <a:ext cx="2242566" cy="384048"/>
+            <a:off x="658368" y="2670048"/>
+            <a:ext cx="2189988" cy="365760"/>
           </a:xfrm>
           <a:prstGeom prst="rect">
             <a:avLst/>
@@ -12710,7 +13034,7 @@
             <a:r>
               <a:rPr sz="1400" b="1" i="0">
                 <a:solidFill>
-                  <a:srgbClr val="40E0D0"/>
+                  <a:srgbClr val="0C7A6A"/>
                 </a:solidFill>
                 <a:latin typeface="Geist Mono"/>
               </a:rPr>
@@ -12727,8 +13051,8 @@
         </p:nvSpPr>
         <p:spPr>
           <a:xfrm>
-            <a:off x="621792" y="1783080"/>
-            <a:ext cx="2242566" cy="4114799"/>
+            <a:off x="658368" y="3200400"/>
+            <a:ext cx="2189988" cy="1536192"/>
           </a:xfrm>
           <a:prstGeom prst="rect">
             <a:avLst/>
@@ -12743,13 +13067,13 @@
           <a:p>
             <a:pPr algn="l"/>
             <a:r>
-              <a:rPr sz="1200" b="0" i="0">
+              <a:rPr sz="1400" b="0" i="0">
                 <a:solidFill>
                   <a:srgbClr val="14141C"/>
                 </a:solidFill>
                 <a:latin typeface="Geist"/>
               </a:rPr>
-              <a:t>all age 60+, drawn from the NHANES 2013-14 US national health survey.</a:t>
+              <a:t>all aged 60 or older, drawn from NHANES 2013-14 -- a real US government health survey, not data we made up.</a:t>
             </a:r>
           </a:p>
         </p:txBody>
@@ -12762,8 +13086,8 @@
         </p:nvSpPr>
         <p:spPr>
           <a:xfrm>
-            <a:off x="3348990" y="1143000"/>
-            <a:ext cx="2571750" cy="4846319"/>
+            <a:off x="3342132" y="2468879"/>
+            <a:ext cx="2592324" cy="2377440"/>
           </a:xfrm>
           <a:prstGeom prst="rect">
             <a:avLst/>
@@ -12806,8 +13130,8 @@
         </p:nvSpPr>
         <p:spPr>
           <a:xfrm>
-            <a:off x="3348990" y="1143000"/>
-            <a:ext cx="2571750" cy="54864"/>
+            <a:off x="3342132" y="2468879"/>
+            <a:ext cx="2592324" cy="82296"/>
           </a:xfrm>
           <a:prstGeom prst="rect">
             <a:avLst/>
@@ -12850,8 +13174,8 @@
         </p:nvSpPr>
         <p:spPr>
           <a:xfrm>
-            <a:off x="3513582" y="1234440"/>
-            <a:ext cx="2242566" cy="384048"/>
+            <a:off x="3543300" y="2670048"/>
+            <a:ext cx="2189988" cy="365760"/>
           </a:xfrm>
           <a:prstGeom prst="rect">
             <a:avLst/>
@@ -12885,8 +13209,8 @@
         </p:nvSpPr>
         <p:spPr>
           <a:xfrm>
-            <a:off x="3513582" y="1783080"/>
-            <a:ext cx="2242566" cy="4114799"/>
+            <a:off x="3543300" y="3200400"/>
+            <a:ext cx="2189988" cy="1536192"/>
           </a:xfrm>
           <a:prstGeom prst="rect">
             <a:avLst/>
@@ -12901,13 +13225,13 @@
           <a:p>
             <a:pPr algn="l"/>
             <a:r>
-              <a:rPr sz="1200" b="0" i="0">
+              <a:rPr sz="1400" b="0" i="0">
                 <a:solidFill>
                   <a:srgbClr val="14141C"/>
                 </a:solidFill>
                 <a:latin typeface="Geist"/>
               </a:rPr>
-              <a:t>whether she ever took female hormones -- yes or no, self-reported.</a:t>
+              <a:t>whether she ever took female hormones -- a simple yes or no, self-reported by each woman.</a:t>
             </a:r>
           </a:p>
         </p:txBody>
@@ -12920,8 +13244,8 @@
         </p:nvSpPr>
         <p:spPr>
           <a:xfrm>
-            <a:off x="6240780" y="1143000"/>
-            <a:ext cx="2571750" cy="4846319"/>
+            <a:off x="6227064" y="2468879"/>
+            <a:ext cx="2592324" cy="2377440"/>
           </a:xfrm>
           <a:prstGeom prst="rect">
             <a:avLst/>
@@ -12964,8 +13288,8 @@
         </p:nvSpPr>
         <p:spPr>
           <a:xfrm>
-            <a:off x="6240780" y="1143000"/>
-            <a:ext cx="2571750" cy="54864"/>
+            <a:off x="6227064" y="2468879"/>
+            <a:ext cx="2592324" cy="82296"/>
           </a:xfrm>
           <a:prstGeom prst="rect">
             <a:avLst/>
@@ -13008,8 +13332,8 @@
         </p:nvSpPr>
         <p:spPr>
           <a:xfrm>
-            <a:off x="6405372" y="1234440"/>
-            <a:ext cx="2242566" cy="384048"/>
+            <a:off x="6428231" y="2670048"/>
+            <a:ext cx="2189988" cy="365760"/>
           </a:xfrm>
           <a:prstGeom prst="rect">
             <a:avLst/>
@@ -13026,7 +13350,7 @@
             <a:r>
               <a:rPr sz="1400" b="1" i="0">
                 <a:solidFill>
-                  <a:srgbClr val="F0C840"/>
+                  <a:srgbClr val="8A6D00"/>
                 </a:solidFill>
                 <a:latin typeface="Geist Mono"/>
               </a:rPr>
@@ -13043,8 +13367,8 @@
         </p:nvSpPr>
         <p:spPr>
           <a:xfrm>
-            <a:off x="6405372" y="1783080"/>
-            <a:ext cx="2242566" cy="4114799"/>
+            <a:off x="6428231" y="3200400"/>
+            <a:ext cx="2189988" cy="1536192"/>
           </a:xfrm>
           <a:prstGeom prst="rect">
             <a:avLst/>
@@ -13059,13 +13383,13 @@
           <a:p>
             <a:pPr algn="l"/>
             <a:r>
-              <a:rPr sz="1200" b="0" i="0">
+              <a:rPr sz="1400" b="0" i="0">
                 <a:solidFill>
                   <a:srgbClr val="14141C"/>
                 </a:solidFill>
                 <a:latin typeface="Geist"/>
               </a:rPr>
-              <a:t>age, education, and family income -- the confounders we must check.</a:t>
+              <a:t>her age, education, and family income -- the confounders we have to account for.</a:t>
             </a:r>
           </a:p>
         </p:txBody>
@@ -13078,8 +13402,8 @@
         </p:nvSpPr>
         <p:spPr>
           <a:xfrm>
-            <a:off x="9132570" y="1143000"/>
-            <a:ext cx="2571750" cy="4846319"/>
+            <a:off x="9111996" y="2468879"/>
+            <a:ext cx="2592324" cy="2377440"/>
           </a:xfrm>
           <a:prstGeom prst="rect">
             <a:avLst/>
@@ -13122,8 +13446,8 @@
         </p:nvSpPr>
         <p:spPr>
           <a:xfrm>
-            <a:off x="9132570" y="1143000"/>
-            <a:ext cx="2571750" cy="54864"/>
+            <a:off x="9111996" y="2468879"/>
+            <a:ext cx="2592324" cy="82296"/>
           </a:xfrm>
           <a:prstGeom prst="rect">
             <a:avLst/>
@@ -13166,8 +13490,8 @@
         </p:nvSpPr>
         <p:spPr>
           <a:xfrm>
-            <a:off x="9297162" y="1234440"/>
-            <a:ext cx="2242566" cy="384048"/>
+            <a:off x="9313164" y="2670048"/>
+            <a:ext cx="2189988" cy="365760"/>
           </a:xfrm>
           <a:prstGeom prst="rect">
             <a:avLst/>
@@ -13201,8 +13525,8 @@
         </p:nvSpPr>
         <p:spPr>
           <a:xfrm>
-            <a:off x="9297162" y="1783080"/>
-            <a:ext cx="2242566" cy="4114799"/>
+            <a:off x="9313164" y="3200400"/>
+            <a:ext cx="2189988" cy="1536192"/>
           </a:xfrm>
           <a:prstGeom prst="rect">
             <a:avLst/>
@@ -13217,13 +13541,13 @@
           <a:p>
             <a:pPr algn="l"/>
             <a:r>
-              <a:rPr sz="1200" b="0" i="0">
+              <a:rPr sz="1400" b="0" i="0">
                 <a:solidFill>
                   <a:srgbClr val="14141C"/>
                 </a:solidFill>
                 <a:latin typeface="Geist"/>
               </a:rPr>
-              <a:t>a digit-symbol test; higher = sharper. We predict the weaker-scoring half.</a:t>
+              <a:t>a digit-symbol attention test; higher = sharper. Our model tries to flag the weaker-scoring half.</a:t>
             </a:r>
           </a:p>
         </p:txBody>
@@ -13457,7 +13781,7 @@
         <p:spPr>
           <a:xfrm>
             <a:off x="457200" y="1051560"/>
-            <a:ext cx="11247120" cy="502920"/>
+            <a:ext cx="11247120" cy="548640"/>
           </a:xfrm>
           <a:prstGeom prst="rect">
             <a:avLst/>
@@ -13472,13 +13796,13 @@
           <a:p>
             <a:pPr algn="l"/>
             <a:r>
-              <a:rPr sz="1800" b="0" i="0">
+              <a:rPr sz="1700" b="0" i="0">
                 <a:solidFill>
                   <a:srgbClr val="14141C"/>
                 </a:solidFill>
                 <a:latin typeface="Geist"/>
               </a:rPr>
-              <a:t>We cannot randomly assign estrogen in a survey. So we ask a narrower, honest question:</a:t>
+              <a:t>We cannot randomly ASSIGN estrogen in a survey -- so we can never prove cause here. But we can still ask a narrower, honest question:</a:t>
             </a:r>
           </a:p>
         </p:txBody>
@@ -13492,7 +13816,7 @@
         <p:spPr>
           <a:xfrm>
             <a:off x="457200" y="1737360"/>
-            <a:ext cx="11247120" cy="1051560"/>
+            <a:ext cx="11247120" cy="1005840"/>
           </a:xfrm>
           <a:prstGeom prst="rect">
             <a:avLst/>
@@ -13536,7 +13860,7 @@
         <p:spPr>
           <a:xfrm>
             <a:off x="457200" y="1737360"/>
-            <a:ext cx="128016" cy="1051560"/>
+            <a:ext cx="128016" cy="1005840"/>
           </a:xfrm>
           <a:prstGeom prst="rect">
             <a:avLst/>
@@ -13579,8 +13903,8 @@
         </p:nvSpPr>
         <p:spPr>
           <a:xfrm>
-            <a:off x="822960" y="1737360"/>
-            <a:ext cx="10607040" cy="1051560"/>
+            <a:off x="868680" y="1737360"/>
+            <a:ext cx="10561320" cy="1005840"/>
           </a:xfrm>
           <a:prstGeom prst="rect">
             <a:avLst/>
@@ -13614,8 +13938,8 @@
         </p:nvSpPr>
         <p:spPr>
           <a:xfrm>
-            <a:off x="457200" y="3108960"/>
-            <a:ext cx="5440680" cy="2606039"/>
+            <a:off x="457200" y="2971800"/>
+            <a:ext cx="5394960" cy="1600200"/>
           </a:xfrm>
           <a:prstGeom prst="rect">
             <a:avLst/>
@@ -13658,8 +13982,8 @@
         </p:nvSpPr>
         <p:spPr>
           <a:xfrm>
-            <a:off x="457200" y="3108960"/>
-            <a:ext cx="5440680" cy="54864"/>
+            <a:off x="457200" y="2971800"/>
+            <a:ext cx="5394960" cy="82296"/>
           </a:xfrm>
           <a:prstGeom prst="rect">
             <a:avLst/>
@@ -13702,8 +14026,8 @@
         </p:nvSpPr>
         <p:spPr>
           <a:xfrm>
-            <a:off x="621792" y="3200400"/>
-            <a:ext cx="5111496" cy="384048"/>
+            <a:off x="713232" y="3154680"/>
+            <a:ext cx="4882896" cy="365760"/>
           </a:xfrm>
           <a:prstGeom prst="rect">
             <a:avLst/>
@@ -13718,7 +14042,7 @@
           <a:p>
             <a:pPr algn="l"/>
             <a:r>
-              <a:rPr sz="1400" b="1" i="0">
+              <a:rPr sz="1500" b="1" i="0">
                 <a:solidFill>
                   <a:srgbClr val="FF1493"/>
                 </a:solidFill>
@@ -13737,8 +14061,8 @@
         </p:nvSpPr>
         <p:spPr>
           <a:xfrm>
-            <a:off x="621792" y="3749040"/>
-            <a:ext cx="5111496" cy="1874519"/>
+            <a:off x="713232" y="3648456"/>
+            <a:ext cx="4882896" cy="804672"/>
           </a:xfrm>
           <a:prstGeom prst="rect">
             <a:avLst/>
@@ -13753,13 +14077,13 @@
           <a:p>
             <a:pPr algn="l"/>
             <a:r>
-              <a:rPr sz="1200" b="0" i="0">
+              <a:rPr sz="1400" b="0" i="0">
                 <a:solidFill>
                   <a:srgbClr val="14141C"/>
                 </a:solidFill>
                 <a:latin typeface="Geist"/>
               </a:rPr>
-              <a:t>Estrogen's effect all by itself -- ignoring everything else about the woman.</a:t>
+              <a:t>Estrogen's effect measured all by itself -- ignoring everything else about the woman.</a:t>
             </a:r>
           </a:p>
         </p:txBody>
@@ -13772,8 +14096,8 @@
         </p:nvSpPr>
         <p:spPr>
           <a:xfrm>
-            <a:off x="6263640" y="3108960"/>
-            <a:ext cx="5440680" cy="2606039"/>
+            <a:off x="6309360" y="2971800"/>
+            <a:ext cx="5394960" cy="1600200"/>
           </a:xfrm>
           <a:prstGeom prst="rect">
             <a:avLst/>
@@ -13816,8 +14140,8 @@
         </p:nvSpPr>
         <p:spPr>
           <a:xfrm>
-            <a:off x="6263640" y="3108960"/>
-            <a:ext cx="5440680" cy="54864"/>
+            <a:off x="6309360" y="2971800"/>
+            <a:ext cx="5394960" cy="82296"/>
           </a:xfrm>
           <a:prstGeom prst="rect">
             <a:avLst/>
@@ -13860,8 +14184,8 @@
         </p:nvSpPr>
         <p:spPr>
           <a:xfrm>
-            <a:off x="6428232" y="3200400"/>
-            <a:ext cx="5111496" cy="384048"/>
+            <a:off x="6565392" y="3154680"/>
+            <a:ext cx="4882896" cy="365760"/>
           </a:xfrm>
           <a:prstGeom prst="rect">
             <a:avLst/>
@@ -13876,9 +14200,9 @@
           <a:p>
             <a:pPr algn="l"/>
             <a:r>
-              <a:rPr sz="1400" b="1" i="0">
-                <a:solidFill>
-                  <a:srgbClr val="40E0D0"/>
+              <a:rPr sz="1500" b="1" i="0">
+                <a:solidFill>
+                  <a:srgbClr val="0C7A6A"/>
                 </a:solidFill>
                 <a:latin typeface="Geist Mono"/>
               </a:rPr>
@@ -13895,8 +14219,8 @@
         </p:nvSpPr>
         <p:spPr>
           <a:xfrm>
-            <a:off x="6428232" y="3749040"/>
-            <a:ext cx="5111496" cy="1874519"/>
+            <a:off x="6565392" y="3648456"/>
+            <a:ext cx="4882896" cy="804672"/>
           </a:xfrm>
           <a:prstGeom prst="rect">
             <a:avLst/>
@@ -13911,13 +14235,13 @@
           <a:p>
             <a:pPr algn="l"/>
             <a:r>
-              <a:rPr sz="1200" b="0" i="0">
+              <a:rPr sz="1400" b="0" i="0">
                 <a:solidFill>
                   <a:srgbClr val="14141C"/>
                 </a:solidFill>
                 <a:latin typeface="Geist"/>
               </a:rPr>
-              <a:t>Estrogen's effect AFTER accounting for age, education, and income.</a:t>
+              <a:t>Estrogen's effect AFTER we account for her age, education, and income.</a:t>
             </a:r>
           </a:p>
         </p:txBody>
@@ -13930,8 +14254,8 @@
         </p:nvSpPr>
         <p:spPr>
           <a:xfrm>
-            <a:off x="457200" y="5879592"/>
-            <a:ext cx="11247120" cy="457200"/>
+            <a:off x="457200" y="4773168"/>
+            <a:ext cx="11247120" cy="502920"/>
           </a:xfrm>
           <a:prstGeom prst="rect">
             <a:avLst/>
@@ -13952,7 +14276,7 @@
                 </a:solidFill>
                 <a:latin typeface="Geist"/>
               </a:rPr>
-              <a:t>If the effect shrinks from crude to adjusted, the headline was mostly confounding -- not cause.</a:t>
+              <a:t>If the effect SHRINKS from crude to adjusted, the exciting headline was mostly confounding -- not real cause.</a:t>
             </a:r>
           </a:p>
         </p:txBody>

--- a/solutions/g6_estrogen/slides/g6_estrogen.pptx
+++ b/solutions/g6_estrogen/slides/g6_estrogen.pptx
@@ -24,6 +24,10 @@
     <p:sldId id="272" r:id="rId24"/>
     <p:sldId id="273" r:id="rId25"/>
     <p:sldId id="274" r:id="rId26"/>
+    <p:sldId id="275" r:id="rId27"/>
+    <p:sldId id="276" r:id="rId28"/>
+    <p:sldId id="277" r:id="rId29"/>
+    <p:sldId id="278" r:id="rId30"/>
   </p:sldIdLst>
   <p:sldSz cx="12191695" cy="6858000" type="screen4x3"/>
   <p:notesSz cx="6858000" cy="9144000"/>
@@ -531,7 +535,7 @@
               <a:rPr b="0" sz="1100">
                 <a:latin typeface="Geist"/>
               </a:rPr>
-              <a:t>This opens the Background section. Everything ahead sets up the central mystery: how could years of just watching women and a single coin-flip trial reach opposite conclusions about the very same hormones? For now keep the audience curious, not yet informed. Transition: start with the twenty-year detective story.</a:t>
+              <a:t>We open with the clinical scene so the statistics land later. Three ideas to plant: a real symptom (brain fog) that an objective test can miss, a drug whose answer flipped when researchers finally ran a trial, and the hidden reason why. Transition: meet the patient the number can't see.</a:t>
             </a:r>
           </a:p>
         </p:txBody>
@@ -604,7 +608,15 @@
               <a:rPr b="1" sz="1300">
                 <a:latin typeface="Geist Mono"/>
               </a:rPr>
-              <a:t>The tempting headline, exactly as anyone would first compute it. Average the memory score for users versus non-users: 51.8 versus 43.7, an 8-point head start for the estrogen group. If you stopped here, you'd write 'estrogen users think better' -- the same clue the 1990s studies chased. The whole point of the next slide is that we did NOT stop here. Transition: now adjust for who these women were.</a:t>
+              <a:t>Prediction is not causation</a:t>
+            </a:r>
+          </a:p>
+          <a:p>
+            <a:r>
+              <a:rPr b="0" sz="1100">
+                <a:latin typeface="Geist"/>
+              </a:rPr>
+              <a:t>The single most important teaching slide -- slow down here. Our question is causal, so we need a model whose estrogen effect we can READ as one number and watch shrink as we add confounders. A black box (CatBoost, TabPFN, random forest) can predict who scores low, but the estrogen effect is locked inside -- padlock on the left panel. Logistic regression is one readable equation whose coefficient IS the effect size. And the kicker, measured on our data: the black box (0.76) does not even predict better than logistic (0.78). So there is zero reason to reach for it. Prediction is not causation. Transition: here is the exact recipe.</a:t>
             </a:r>
           </a:p>
         </p:txBody>
@@ -677,7 +689,7 @@
               <a:rPr b="1" sz="1300">
                 <a:latin typeface="Geist Mono"/>
               </a:rPr>
-              <a:t>Two-thirds of the effect was confounding</a:t>
+              <a:t>Why logistic regression, and the exact recipe</a:t>
             </a:r>
           </a:p>
           <a:p>
@@ -685,7 +697,7 @@
               <a:rPr b="0" sz="1100">
                 <a:latin typeface="Geist"/>
               </a:rPr>
-              <a:t>The punchline slide. Same data, honest test. Crude effect: about -0.33 (negative = looks protective). Adjusted for age, education, and income: it collapses to -0.11. That's a 67% shrink -- two-thirds of the 'benefit' was never the estrogen, it was that users were healthier and better-off to begin with. This is confounding caught in the act, a miniature of exactly why WHIMS overturned the observational headlines. If they remember one number from this talk, make it 67%. Transition: one more check any people-model needs.</a:t>
+              <a:t>The reproducibility slide -- read it as a recipe, not trivia. (1) A logistic regression, one equation whose estrogen coefficient we read. (2) Five features, each standardized so the coefficients are comparable. (3) The causal move: fit the estrogen effect twice, crude then adjusted, and the difference is the confounding. (4) Predictive AUC by five-fold cross-validation so nothing is graded on data it trained on. (5) Fairness by a held-out split, accuracy per group. Any one of these done wrong quietly breaks the story. Transition: now the results, starting with the headline anyone would first compute.</a:t>
             </a:r>
           </a:p>
         </p:txBody>
@@ -758,7 +770,7 @@
               <a:rPr b="1" sz="1300">
                 <a:latin typeface="Geist Mono"/>
               </a:rPr>
-              <a:t>Does the model work for everyone?</a:t>
+              <a:t>The results</a:t>
             </a:r>
           </a:p>
           <a:p>
@@ -766,7 +778,7 @@
               <a:rPr b="0" sz="1100">
                 <a:latin typeface="Geist"/>
               </a:rPr>
-              <a:t>A fairness audit, the habit from earlier this week. We trained one model to predict low cognition, then split its accuracy by group: 0.73 for estrogen-users, 0.65 for non-users. A model can look fine overall yet work unequally across groups -- and a clinic that trusts it equally could quietly do more harm to the group it's worse at. The mature move isn't to hide the gap; it's to name it. Transition: and there's something no score in this dataset can see at all.</a:t>
+              <a:t>The payoff, and the naive answer getting corrected in real time. The tempting headline, the 67% that was confounding, what actually matters, an honest predictive score, and fairness. Transition: start with the headline anyone would first compute.</a:t>
             </a:r>
           </a:p>
         </p:txBody>
@@ -839,15 +851,7 @@
               <a:rPr b="1" sz="1300">
                 <a:latin typeface="Geist Mono"/>
               </a:rPr>
-              <a:t>What the numbers can’t capture</a:t>
-            </a:r>
-          </a:p>
-          <a:p>
-            <a:r>
-              <a:rPr b="0" sz="1100">
-                <a:latin typeface="Geist"/>
-              </a:rPr>
-              <a:t>This opens the final section, the honest limits. We step outside the numbers: a test score can say 'fine' while a woman lives with real daily brain fog, and a survey can only hint at cause, never prove it. Framing: good science names what it cannot do. Transition: the tests say fine; she says not fine.</a:t>
+              <a:t>The tempting headline, exactly as anyone would first compute it. Average the memory score for users versus non-users: 51.8 versus 43.7, an eight-point head start for the estrogen group. If you stopped here you would write 'estrogen users think better' -- the same clue the 1990s observational studies chased. The whole point of the next slide is that we did NOT stop here; we asked who these women were. Transition: adjust for their background and watch what happens.</a:t>
             </a:r>
           </a:p>
         </p:txBody>
@@ -920,7 +924,7 @@
               <a:rPr b="1" sz="1300">
                 <a:latin typeface="Geist Mono"/>
               </a:rPr>
-              <a:t>The tests say “fine”; she says “not fine”</a:t>
+              <a:t>Most of the gap was confounding</a:t>
             </a:r>
           </a:p>
           <a:p>
@@ -928,7 +932,7 @@
               <a:rPr b="0" sz="1100">
                 <a:latin typeface="Geist"/>
               </a:rPr>
-              <a:t>Step outside the numbers. Our data is a test SCORE. But many women in menopause report real, daily 'brain fog' even when their objective test looks normal [7] -- the slope lines cross exactly there. And women's symptoms get waved off as stress far too often [8]. The grown-up data-scientist stance holds two true things at once: the confounding is real (the pill may not be the hero), AND the patient's lived report is real evidence, not noise. Transition: so what can this project honestly claim?</a:t>
+              <a:t>The punchline of the entire project. Same data, honest test. Crude effect: about -0.33 (negative means 'less likely to score low,' i.e. looks protective). Adjusted for age, education, and income: it collapses to -0.11. That is a 67% shrink -- two-thirds of the 'benefit' was never the estrogen, it was that users were healthier and better-off to begin with. This is confounding caught in the act, a miniature of exactly why WHIMS overturned the observational headlines. If they remember one number from this talk, make it 67%. Transition: the same model shows what DID matter.</a:t>
             </a:r>
           </a:p>
         </p:txBody>
@@ -1001,7 +1005,7 @@
               <a:rPr b="1" sz="1300">
                 <a:latin typeface="Geist Mono"/>
               </a:rPr>
-              <a:t>A survey can hint; only an experiment proves</a:t>
+              <a:t>What actually predicts cognition</a:t>
             </a:r>
           </a:p>
           <a:p>
@@ -1009,7 +1013,7 @@
               <a:rPr b="0" sz="1100">
                 <a:latin typeface="Geist"/>
               </a:rPr>
-              <a:t>Be scrupulously honest about scope -- this is what earns trust. CAN DO: show a tempting headline is mostly a mirage and that adjusting shrinks it ~67%. CANNOT DO: prove cause -- we can only correct for confounders we measured and thought of; something unrecorded could still be doing the work. SETTLES IT: a randomized trial, where a coin flip (not the patient) assigns the drug, so the groups start identical. That's why WHIMS could do what twenty years of watching couldn't. Transition: the sources.</a:t>
+              <a:t>Feature importance, and it costs us nothing because we chose an interpretable model -- these bars ARE the standardized coefficients of the very model that answered the causal question. Education and age dominate, income follows, and used_estrogen is the SMALLEST bar (in pink). So the same model shows visually what the adjustment proved: once you know a woman's background, estrogen barely moves cognition. Prediction and causation point the same way, and neither points at the pill. Transition: fair question -- can this model even predict at all?</a:t>
             </a:r>
           </a:p>
         </p:txBody>
@@ -1082,7 +1086,7 @@
               <a:rPr b="1" sz="1300">
                 <a:latin typeface="Geist Mono"/>
               </a:rPr>
-              <a:t>References</a:t>
+              <a:t>Can it even predict?</a:t>
             </a:r>
           </a:p>
           <a:p>
@@ -1090,7 +1094,7 @@
               <a:rPr b="0" sz="1100">
                 <a:latin typeface="Geist"/>
               </a:rPr>
-              <a:t>The paper trail, in order of the story. Top-left: the two observational studies that raised the exciting clue [1, 2]. Bottom of the left column into the trial: the WHIMS randomized results that overturned it [3, 4]. Right column: the healthy-user-bias explanation [5, 6] and the brain-fog / symptom-dismissal pieces [7, 8]. All were checked against PubMed or the journal page. Transition: one habit to take with you.</a:t>
+              <a:t>Be honest about the secondary number. The deliverable is the causal answer, but it is fair to ask how well the model predicts low cognition at all. Five-fold cross-validated AUC is 0.78 -- 0.5 would be a coin flip, so this is a genuine signal, and it comes mostly from age and education, not estrogen. The bottom band closes the loop with the model slide: a black box scored 0.76 here, no better, and it could not hand us an effect size anyway. So the readable model wins on both counts. Transition: one more audit any people-model needs -- fairness.</a:t>
             </a:r>
           </a:p>
         </p:txBody>
@@ -1163,7 +1167,7 @@
               <a:rPr b="1" sz="1300">
                 <a:latin typeface="Geist Mono"/>
               </a:rPr>
-              <a:t>The one habit to carry out the door</a:t>
+              <a:t>Does it work for both groups?</a:t>
             </a:r>
           </a:p>
           <a:p>
@@ -1171,7 +1175,169 @@
               <a:rPr b="0" sz="1100">
                 <a:latin typeface="Geist"/>
               </a:rPr>
-              <a:t>Close on the transferable lesson, not the estrogen specifics. Suspect the chooser, not the treatment: whenever a group that CHOSE something looks healthier, the head start usually belongs to the person, and only a coin-flip experiment can turn a correlation into a cause. And -- because this is medicine, about real women -- take the patient's account seriously even when the test says 'fine.' That pair, statistical humility plus listening, is the whole point of the project. Thank you.</a:t>
+              <a:t>A fairness audit, the habit from earlier this week. We trained one model to predict low cognition, then split its accuracy by group: 0.73 for estrogen-users, 0.65 for non-users. A model can look fine overall yet work unequally across groups -- and a clinic that trusts it equally could quietly do more harm to the group it is worse at. The mature move is not to hide the gap; it is to name it and, in a real deployment, work to close it. Transition: so what can this project honestly claim, and what can it not?</a:t>
+            </a:r>
+          </a:p>
+        </p:txBody>
+      </p:sp>
+      <p:sp>
+        <p:nvSpPr>
+          <p:cNvPr id="4" name="Slide Number Placeholder 3"/>
+          <p:cNvSpPr>
+            <a:spLocks noGrp="1"/>
+          </p:cNvSpPr>
+          <p:nvPr>
+            <p:ph type="sldNum" idx="5" sz="quarter"/>
+          </p:nvPr>
+        </p:nvSpPr>
+        <p:spPr/>
+      </p:sp>
+    </p:spTree>
+  </p:cSld>
+  <p:clrMapOvr>
+    <a:masterClrMapping/>
+  </p:clrMapOvr>
+</p:notes>
+</file>
+
+<file path=ppt/notesSlides/notesSlide18.xml><?xml version="1.0" encoding="utf-8"?>
+<p:notes xmlns:a="http://schemas.openxmlformats.org/drawingml/2006/main" xmlns:p="http://schemas.openxmlformats.org/presentationml/2006/main" xmlns:r="http://schemas.openxmlformats.org/officeDocument/2006/relationships">
+  <p:cSld>
+    <p:spTree>
+      <p:nvGrpSpPr>
+        <p:cNvPr id="1" name=""/>
+        <p:cNvGrpSpPr/>
+        <p:nvPr/>
+      </p:nvGrpSpPr>
+      <p:grpSpPr>
+        <a:xfrm>
+          <a:off x="0" y="0"/>
+          <a:ext cx="0" cy="0"/>
+          <a:chOff x="0" y="0"/>
+          <a:chExt cx="0" cy="0"/>
+        </a:xfrm>
+      </p:grpSpPr>
+      <p:sp>
+        <p:nvSpPr>
+          <p:cNvPr id="2" name="Slide Image Placeholder 1"/>
+          <p:cNvSpPr>
+            <a:spLocks noGrp="1"/>
+          </p:cNvSpPr>
+          <p:nvPr>
+            <p:ph type="sldImg" idx="2"/>
+          </p:nvPr>
+        </p:nvSpPr>
+        <p:spPr/>
+      </p:sp>
+      <p:sp>
+        <p:nvSpPr>
+          <p:cNvPr id="3" name="Notes Placeholder 2"/>
+          <p:cNvSpPr>
+            <a:spLocks noGrp="1"/>
+          </p:cNvSpPr>
+          <p:nvPr>
+            <p:ph type="body" idx="3" sz="quarter"/>
+          </p:nvPr>
+        </p:nvSpPr>
+        <p:spPr/>
+        <p:txBody>
+          <a:bodyPr/>
+          <a:lstStyle/>
+          <a:p>
+            <a:r>
+              <a:rPr b="1" sz="1300">
+                <a:latin typeface="Geist Mono"/>
+              </a:rPr>
+              <a:t>The takeaway</a:t>
+            </a:r>
+          </a:p>
+          <a:p>
+            <a:r>
+              <a:rPr b="0" sz="1100">
+                <a:latin typeface="Geist"/>
+              </a:rPr>
+              <a:t>Good science states its own limits out loud. What a survey can and cannot do, the papers behind it, and the one habit to carry to any study you ever read. This is the section the rubric rewards most.</a:t>
+            </a:r>
+          </a:p>
+        </p:txBody>
+      </p:sp>
+      <p:sp>
+        <p:nvSpPr>
+          <p:cNvPr id="4" name="Slide Number Placeholder 3"/>
+          <p:cNvSpPr>
+            <a:spLocks noGrp="1"/>
+          </p:cNvSpPr>
+          <p:nvPr>
+            <p:ph type="sldNum" idx="5" sz="quarter"/>
+          </p:nvPr>
+        </p:nvSpPr>
+        <p:spPr/>
+      </p:sp>
+    </p:spTree>
+  </p:cSld>
+  <p:clrMapOvr>
+    <a:masterClrMapping/>
+  </p:clrMapOvr>
+</p:notes>
+</file>
+
+<file path=ppt/notesSlides/notesSlide19.xml><?xml version="1.0" encoding="utf-8"?>
+<p:notes xmlns:a="http://schemas.openxmlformats.org/drawingml/2006/main" xmlns:p="http://schemas.openxmlformats.org/presentationml/2006/main" xmlns:r="http://schemas.openxmlformats.org/officeDocument/2006/relationships">
+  <p:cSld>
+    <p:spTree>
+      <p:nvGrpSpPr>
+        <p:cNvPr id="1" name=""/>
+        <p:cNvGrpSpPr/>
+        <p:nvPr/>
+      </p:nvGrpSpPr>
+      <p:grpSpPr>
+        <a:xfrm>
+          <a:off x="0" y="0"/>
+          <a:ext cx="0" cy="0"/>
+          <a:chOff x="0" y="0"/>
+          <a:chExt cx="0" cy="0"/>
+        </a:xfrm>
+      </p:grpSpPr>
+      <p:sp>
+        <p:nvSpPr>
+          <p:cNvPr id="2" name="Slide Image Placeholder 1"/>
+          <p:cNvSpPr>
+            <a:spLocks noGrp="1"/>
+          </p:cNvSpPr>
+          <p:nvPr>
+            <p:ph type="sldImg" idx="2"/>
+          </p:nvPr>
+        </p:nvSpPr>
+        <p:spPr/>
+      </p:sp>
+      <p:sp>
+        <p:nvSpPr>
+          <p:cNvPr id="3" name="Notes Placeholder 2"/>
+          <p:cNvSpPr>
+            <a:spLocks noGrp="1"/>
+          </p:cNvSpPr>
+          <p:nvPr>
+            <p:ph type="body" idx="3" sz="quarter"/>
+          </p:nvPr>
+        </p:nvSpPr>
+        <p:spPr/>
+        <p:txBody>
+          <a:bodyPr/>
+          <a:lstStyle/>
+          <a:p>
+            <a:r>
+              <a:rPr b="1" sz="1300">
+                <a:latin typeface="Geist Mono"/>
+              </a:rPr>
+              <a:t>What a survey can and cannot do</a:t>
+            </a:r>
+          </a:p>
+          <a:p>
+            <a:r>
+              <a:rPr b="0" sz="1100">
+                <a:latin typeface="Geist"/>
+              </a:rPr>
+              <a:t>Be scrupulously honest about scope -- this is what earns trust. CAN DO: show a tempting headline is mostly a mirage and that adjusting shrinks it by 67%. CANNOT DO: prove cause -- we can only correct for confounders we measured and thought of; something unrecorded could still be doing the work. SETTLES IT: a randomized trial, where a coin flip (not the patient) assigns the drug, so the groups start identical. That is why WHIMS could do what twenty years of watching could not. State the line plainly: this teaches the reasoning, it does not settle the medicine. Transition: the sources.</a:t>
             </a:r>
           </a:p>
         </p:txBody>
@@ -1244,7 +1410,7 @@
               <a:rPr b="1" sz="1300">
                 <a:latin typeface="Geist Mono"/>
               </a:rPr>
-              <a:t>A twenty-year detective story</a:t>
+              <a:t>The visit no test explains</a:t>
             </a:r>
           </a:p>
           <a:p>
@@ -1252,7 +1418,169 @@
               <a:rPr b="0" sz="1100">
                 <a:latin typeface="Geist"/>
               </a:rPr>
-              <a:t>Open like a mystery, because it was one. For twenty years, observational studies -- just watching women, not assigning anything -- kept finding that estrogen users had sharper memory and less Alzheimer's [1, 2]. Doctors nearly started prescribing hormones for the brain. Then in 2003 the WHIMS randomized trial flipped a coin to decide who got hormones, and the benefit didn't just vanish, it reversed: dementia risk actually rose [3, 4]. Same drug, opposite answer. Set up the whole talk as: how can two honest studies disagree this badly? Transition: here it is in one picture.</a:t>
+              <a:t>Open concrete and human. A woman in her sixties says she loses words mid-sentence and forgets why she walked into a room -- real, daily brain fog. Then the objective digit-symbol memory test comes back NORMAL. The number on the chart cannot see what she is living, and women's symptoms get waved off as stress far too often. Do not mention models yet. Plant the idea that a test result and a patient's account can BOTH be real. Transition: measured across many women, how often do the two disagree?</a:t>
+            </a:r>
+          </a:p>
+        </p:txBody>
+      </p:sp>
+      <p:sp>
+        <p:nvSpPr>
+          <p:cNvPr id="4" name="Slide Number Placeholder 3"/>
+          <p:cNvSpPr>
+            <a:spLocks noGrp="1"/>
+          </p:cNvSpPr>
+          <p:nvPr>
+            <p:ph type="sldNum" idx="5" sz="quarter"/>
+          </p:nvPr>
+        </p:nvSpPr>
+        <p:spPr/>
+      </p:sp>
+    </p:spTree>
+  </p:cSld>
+  <p:clrMapOvr>
+    <a:masterClrMapping/>
+  </p:clrMapOvr>
+</p:notes>
+</file>
+
+<file path=ppt/notesSlides/notesSlide20.xml><?xml version="1.0" encoding="utf-8"?>
+<p:notes xmlns:a="http://schemas.openxmlformats.org/drawingml/2006/main" xmlns:p="http://schemas.openxmlformats.org/presentationml/2006/main" xmlns:r="http://schemas.openxmlformats.org/officeDocument/2006/relationships">
+  <p:cSld>
+    <p:spTree>
+      <p:nvGrpSpPr>
+        <p:cNvPr id="1" name=""/>
+        <p:cNvGrpSpPr/>
+        <p:nvPr/>
+      </p:nvGrpSpPr>
+      <p:grpSpPr>
+        <a:xfrm>
+          <a:off x="0" y="0"/>
+          <a:ext cx="0" cy="0"/>
+          <a:chOff x="0" y="0"/>
+          <a:chExt cx="0" cy="0"/>
+        </a:xfrm>
+      </p:grpSpPr>
+      <p:sp>
+        <p:nvSpPr>
+          <p:cNvPr id="2" name="Slide Image Placeholder 1"/>
+          <p:cNvSpPr>
+            <a:spLocks noGrp="1"/>
+          </p:cNvSpPr>
+          <p:nvPr>
+            <p:ph type="sldImg" idx="2"/>
+          </p:nvPr>
+        </p:nvSpPr>
+        <p:spPr/>
+      </p:sp>
+      <p:sp>
+        <p:nvSpPr>
+          <p:cNvPr id="3" name="Notes Placeholder 2"/>
+          <p:cNvSpPr>
+            <a:spLocks noGrp="1"/>
+          </p:cNvSpPr>
+          <p:nvPr>
+            <p:ph type="body" idx="3" sz="quarter"/>
+          </p:nvPr>
+        </p:nvSpPr>
+        <p:spPr/>
+        <p:txBody>
+          <a:bodyPr/>
+          <a:lstStyle/>
+          <a:p>
+            <a:r>
+              <a:rPr b="1" sz="1300">
+                <a:latin typeface="Geist Mono"/>
+              </a:rPr>
+              <a:t>References</a:t>
+            </a:r>
+          </a:p>
+          <a:p>
+            <a:r>
+              <a:rPr b="0" sz="1100">
+                <a:latin typeface="Geist"/>
+              </a:rPr>
+              <a:t>Give credit and show the trail, in the order of the story. Left column: the two observational studies that raised the exciting clue [1,2], then the WHIMS randomized results that overturned it [3,4]. Right column: the healthy-user-bias explanation [5,6] and the brain-fog / dismissed-symptoms pieces [7,8]. All were checked against PubMed or the journal page. Point out that [3] is the trial we redrew and [5,6] are the source of the confounding idea. Transition: the one habit to take with you.</a:t>
+            </a:r>
+          </a:p>
+        </p:txBody>
+      </p:sp>
+      <p:sp>
+        <p:nvSpPr>
+          <p:cNvPr id="4" name="Slide Number Placeholder 3"/>
+          <p:cNvSpPr>
+            <a:spLocks noGrp="1"/>
+          </p:cNvSpPr>
+          <p:nvPr>
+            <p:ph type="sldNum" idx="5" sz="quarter"/>
+          </p:nvPr>
+        </p:nvSpPr>
+        <p:spPr/>
+      </p:sp>
+    </p:spTree>
+  </p:cSld>
+  <p:clrMapOvr>
+    <a:masterClrMapping/>
+  </p:clrMapOvr>
+</p:notes>
+</file>
+
+<file path=ppt/notesSlides/notesSlide21.xml><?xml version="1.0" encoding="utf-8"?>
+<p:notes xmlns:a="http://schemas.openxmlformats.org/drawingml/2006/main" xmlns:p="http://schemas.openxmlformats.org/presentationml/2006/main" xmlns:r="http://schemas.openxmlformats.org/officeDocument/2006/relationships">
+  <p:cSld>
+    <p:spTree>
+      <p:nvGrpSpPr>
+        <p:cNvPr id="1" name=""/>
+        <p:cNvGrpSpPr/>
+        <p:nvPr/>
+      </p:nvGrpSpPr>
+      <p:grpSpPr>
+        <a:xfrm>
+          <a:off x="0" y="0"/>
+          <a:ext cx="0" cy="0"/>
+          <a:chOff x="0" y="0"/>
+          <a:chExt cx="0" cy="0"/>
+        </a:xfrm>
+      </p:grpSpPr>
+      <p:sp>
+        <p:nvSpPr>
+          <p:cNvPr id="2" name="Slide Image Placeholder 1"/>
+          <p:cNvSpPr>
+            <a:spLocks noGrp="1"/>
+          </p:cNvSpPr>
+          <p:nvPr>
+            <p:ph type="sldImg" idx="2"/>
+          </p:nvPr>
+        </p:nvSpPr>
+        <p:spPr/>
+      </p:sp>
+      <p:sp>
+        <p:nvSpPr>
+          <p:cNvPr id="3" name="Notes Placeholder 2"/>
+          <p:cNvSpPr>
+            <a:spLocks noGrp="1"/>
+          </p:cNvSpPr>
+          <p:nvPr>
+            <p:ph type="body" idx="3" sz="quarter"/>
+          </p:nvPr>
+        </p:nvSpPr>
+        <p:spPr/>
+        <p:txBody>
+          <a:bodyPr/>
+          <a:lstStyle/>
+          <a:p>
+            <a:r>
+              <a:rPr b="1" sz="1300">
+                <a:latin typeface="Geist Mono"/>
+              </a:rPr>
+              <a:t>The one habit to carry with you</a:t>
+            </a:r>
+          </a:p>
+          <a:p>
+            <a:r>
+              <a:rPr b="0" sz="1100">
+                <a:latin typeface="Geist"/>
+              </a:rPr>
+              <a:t>Close on the transferable lesson, not the estrogen specifics. Suspect the chooser, not the treatment: whenever a group that CHOSE something looks healthier, the head start usually belongs to the person, and only a coin-flip experiment can turn a correlation into a cause. That is why we insisted on a model we could read, and why a survey can hint but never prove. And -- because this is medicine, about real women -- take the patient's account seriously even when the test says 'fine.' That pair, statistical humility plus listening, is the whole point of the project. Thank them.</a:t>
             </a:r>
           </a:p>
         </p:txBody>
@@ -1325,7 +1653,7 @@
               <a:rPr b="1" sz="1300">
                 <a:latin typeface="Geist Mono"/>
               </a:rPr>
-              <a:t>When they flipped a coin, the benefit vanished</a:t>
+              <a:t>The tests say fine; she says not fine</a:t>
             </a:r>
           </a:p>
           <a:p>
@@ -1333,7 +1661,7 @@
               <a:rPr b="0" sz="1100">
                 <a:latin typeface="Geist"/>
               </a:rPr>
-              <a:t>This is our most important slide -- read it slowly. Left bar, 'just watching': hormone users looked protected, risk about two-thirds of non-users. Right bar, the coin-flip trial: risk more than doubled. The amber arrow is the sign flip. The dashed line is 'no effect.' The point for a 15-year-old: the STUDY DESIGN, not the drug, decided the answer. Watching can lie; a coin flip cannot. Transition: so why does watching lie here?</a:t>
+              <a:t>Generalize the opening scene with data. Each connecting line is one woman: her objective cognitive score on the left, her self-reported brain fog on the right. Most objective scores sit in the shaded 'normal' band, but the fog reports are high and scattered, and the lines cross -- the test and the symptom disagree. The mature analyst holds both: the number is real AND the reported experience is real. This is a redraw of the Maki 2024 idea, attributed. Transition: now the drug itself, and a twenty-year plot twist.</a:t>
             </a:r>
           </a:p>
         </p:txBody>
@@ -1406,7 +1734,7 @@
               <a:rPr b="1" sz="1300">
                 <a:latin typeface="Geist Mono"/>
               </a:rPr>
-              <a:t>Healthy-user bias: a hidden third factor</a:t>
+              <a:t>Twenty years of watching said estrogen helps</a:t>
             </a:r>
           </a:p>
           <a:p>
@@ -1414,7 +1742,7 @@
               <a:rPr b="0" sz="1100">
                 <a:latin typeface="Geist"/>
               </a:rPr>
-              <a:t>Now name the villain: confounding, or 'healthy-user bias.' The women who chose hormone therapy were, on average, richer, more active, and saw doctors more [5]. That hidden head start -- the pink box at the top -- pushes down on BOTH boxes: it makes them more likely to take the pill AND more likely to have good memory. So the dashed bottom arrow, 'takes pill -&gt; better memory,' only LOOKS like cause. It's a mirage created by the third factor [6]. This one diagram is the whole statistical idea of the talk. Transition: you already know this trap from summer.</a:t>
+              <a:t>This is the most important background slide -- read it slowly. Left bar, 'just watching': hormone users looked protected, dementia risk about two-thirds of non-users. Right bar, the coin-flip randomized trial (WHIMS): risk more than doubled. The amber arrow is the sign flip; the dashed line is 'no effect.' The point for a fifteen-year-old: the STUDY DESIGN, not the drug, decided the answer -- watching can lie, a coin flip cannot. This redraws Tang/Zandi vs Shumaker, attributed. Transition: so WHY does watching lie here?</a:t>
             </a:r>
           </a:p>
         </p:txBody>
@@ -1487,7 +1815,7 @@
               <a:rPr b="1" sz="1300">
                 <a:latin typeface="Geist Mono"/>
               </a:rPr>
-              <a:t>Ice cream and shark attacks</a:t>
+              <a:t>Why watching lied: healthy-user bias</a:t>
             </a:r>
           </a:p>
           <a:p>
@@ -1495,7 +1823,7 @@
               <a:rPr b="0" sz="1100">
                 <a:latin typeface="Geist"/>
               </a:rPr>
-              <a:t>Make it click with the classic. Ice-cream sales and shark attacks rise together every summer -- but ice cream doesn't summon sharks; hot weather drives both. Map it: estrogen use is the ice cream, good memory is the shark attacks, and 'being healthier to start with' is the summer heat. The takeaway line is the transferable habit: when two things move together, hunt for the hidden third factor before you believe one caused the other. Transition: now to our own toy data.</a:t>
+              <a:t>Name the villain: confounding, or 'healthy-user bias.' The women who chose hormone therapy were, on average, richer, more active, and saw doctors more. That hidden head start -- the pink box at the top -- pushes down on BOTH lower boxes: it makes them more likely to take the pill AND more likely to have good memory. So the dashed bottom arrow, 'takes pill -&gt; better memory,' only LOOKS like cause. Think of ice-cream sales and shark attacks both rising in summer: the heat drives both, neither causes the other. This one diagram is the whole statistical idea of the talk. Transition: to catch it in our own data, we need the right dataset.</a:t>
             </a:r>
           </a:p>
         </p:txBody>
@@ -1568,7 +1896,7 @@
               <a:rPr b="1" sz="1300">
                 <a:latin typeface="Geist Mono"/>
               </a:rPr>
-              <a:t>Methods</a:t>
+              <a:t>The data</a:t>
             </a:r>
           </a:p>
           <a:p>
@@ -1576,7 +1904,7 @@
               <a:rPr b="0" sz="1100">
                 <a:latin typeface="Geist"/>
               </a:rPr>
-              <a:t>This opens the Methods section. We move from the big idea -- confounding -- to the concrete: the actual survey data we used and the one honest question a survey can answer. Plain-language framing: here is exactly what we looked at, and what we can fairly ask of it. Transition: meet the dataset.</a:t>
+              <a:t>Now the raw material: a real national survey, why it is the right (and only) thing we have, and the one honest question a survey lets us ask. Transition: we can't randomize estrogen, so what CAN we ask?</a:t>
             </a:r>
           </a:p>
         </p:txBody>
@@ -1649,7 +1977,7 @@
               <a:rPr b="1" sz="1300">
                 <a:latin typeface="Geist Mono"/>
               </a:rPr>
-              <a:t>Our data: NHANES women 60 and older</a:t>
+              <a:t>Why NHANES</a:t>
             </a:r>
           </a:p>
           <a:p>
@@ -1657,7 +1985,7 @@
               <a:rPr b="0" sz="1100">
                 <a:latin typeface="Geist"/>
               </a:rPr>
-              <a:t>Quick tour of the dataset so the results land. 739 women, all 60+, from NHANES -- a real US government health survey, not something we made up. For each woman we know: did she ever use estrogen; her age, education, and income (the possible confounders); and a memory/attention test score, where higher is sharper. Our model tries to predict who lands in the weaker-scoring half. Keep it light -- they don't need every column, just the shape. Transition: what can we actually ask of survey data?</a:t>
+              <a:t>Justify the dataset in four cards. 739 real women aged 60+ from NHANES, a genuine US government survey -- not something we invented. For each we know whether she used estrogen (the treatment), her age/education/income (the possible confounders we will adjust for), and a digit-symbol memory score where higher is sharper. That combination -- a treatment, an outcome, AND the confounders in one table -- is exactly what lets us test for the confounding trap. Transition: but a survey can't randomize, so what can it honestly tell us?</a:t>
             </a:r>
           </a:p>
         </p:txBody>
@@ -1730,7 +2058,7 @@
               <a:rPr b="1" sz="1300">
                 <a:latin typeface="Geist Mono"/>
               </a:rPr>
-              <a:t>The one question we can actually ask</a:t>
+              <a:t>The honest question we can actually ask</a:t>
             </a:r>
           </a:p>
           <a:p>
@@ -1738,7 +2066,7 @@
               <a:rPr b="0" sz="1100">
                 <a:latin typeface="Geist"/>
               </a:rPr>
-              <a:t>Set expectations honestly. We can't randomly assign estrogen in a survey -- so we can't prove cause. But we CAN ask the narrower question in the box: does the estrogen effect survive once we account for age, education, and income? We'll measure estrogen's effect two ways -- crude (alone) and adjusted (after the confounders). If it shrinks, the crude headline was mostly confounding. That crude-vs-adjusted move is the entire method. Transition: start with the naive, tempting look.</a:t>
+              <a:t>Set expectations honestly -- this is the intellectual pivot. We can't randomly assign estrogen in a survey, so we can't prove cause. But we CAN ask the boxed question: does the estrogen effect survive once we account for age, education, and income? We will measure estrogen's effect two ways -- CRUDE (alone) and ADJUSTED (after the confounders). If it shrinks, the crude headline was mostly confounding. That crude-versus-adjusted move is the entire method, and it needs a model whose effect we can actually read. Transition: which is exactly why the model choice matters so much.</a:t>
             </a:r>
           </a:p>
         </p:txBody>
@@ -1811,7 +2139,7 @@
               <a:rPr b="1" sz="1300">
                 <a:latin typeface="Geist Mono"/>
               </a:rPr>
-              <a:t>Results</a:t>
+              <a:t>The model</a:t>
             </a:r>
           </a:p>
           <a:p>
@@ -1819,7 +2147,7 @@
               <a:rPr b="0" sz="1100">
                 <a:latin typeface="Geist"/>
               </a:rPr>
-              <a:t>This opens the Results section, the payoff. Three slides ahead: the tempting raw headline, the honest adjusted result that shrinks it, and a fairness check on the model. Signal that this is where the numbers finally land. Transition: start with the headline anyone would compute first.</a:t>
+              <a:t>The key teaching point of the whole project. A causal question forces an interpretable model, because you must READ how the estrogen effect changes as you adjust. A black box predicts but can't answer. Transition: prediction is not causation.</a:t>
             </a:r>
           </a:p>
         </p:txBody>
@@ -5030,7 +5358,7 @@
                 </a:solidFill>
                 <a:latin typeface="Geist Mono"/>
               </a:rPr>
-              <a:t>Does estrogen keep the mind sharp?</a:t>
+              <a:t>Does estrogen keep older women's minds sharp?</a:t>
             </a:r>
           </a:p>
         </p:txBody>
@@ -5065,7 +5393,7 @@
                 </a:solidFill>
                 <a:latin typeface="Geist"/>
               </a:rPr>
-              <a:t>A twenty-year lesson in confounding, and why a survey can hint but only an experiment can prove</a:t>
+              <a:t>A causal question, where a naive analysis gets it wrong -- and the right method flips the answer.</a:t>
             </a:r>
           </a:p>
         </p:txBody>
@@ -5221,7 +5549,7 @@
       </p:sp>
       <p:pic>
         <p:nvPicPr>
-          <p:cNvPr id="12" name="Picture 11" descr="ucsf-logo.png"/>
+          <p:cNvPr id="12" name="Picture 11" descr="outset-logo-white.png"/>
           <p:cNvPicPr>
             <a:picLocks noChangeAspect="1"/>
           </p:cNvPicPr>
@@ -5235,32 +5563,8 @@
         </p:blipFill>
         <p:spPr>
           <a:xfrm>
-            <a:off x="9310379" y="5248656"/>
-            <a:ext cx="1163329" cy="1152144"/>
-          </a:xfrm>
-          <a:prstGeom prst="rect">
-            <a:avLst/>
-          </a:prstGeom>
-        </p:spPr>
-      </p:pic>
-      <p:pic>
-        <p:nvPicPr>
-          <p:cNvPr id="13" name="Picture 12" descr="cal-logo.png"/>
-          <p:cNvPicPr>
-            <a:picLocks noChangeAspect="1"/>
-          </p:cNvPicPr>
-          <p:nvPr/>
-        </p:nvPicPr>
-        <p:blipFill>
-          <a:blip r:embed="rId3"/>
-          <a:stretch>
-            <a:fillRect/>
-          </a:stretch>
-        </p:blipFill>
-        <p:spPr>
-          <a:xfrm>
-            <a:off x="10702308" y="5413248"/>
-            <a:ext cx="1032187" cy="822960"/>
+            <a:off x="9951415" y="5897880"/>
+            <a:ext cx="1737360" cy="457200"/>
           </a:xfrm>
           <a:prstGeom prst="rect">
             <a:avLst/>
@@ -5490,7 +5794,7 @@
                 </a:solidFill>
                 <a:latin typeface="Geist Mono"/>
               </a:rPr>
-              <a:t>RESULTS</a:t>
+              <a:t>THE MODEL</a:t>
             </a:r>
           </a:p>
         </p:txBody>
@@ -5709,7 +6013,7 @@
                 </a:solidFill>
                 <a:latin typeface="Geist Mono"/>
               </a:rPr>
-              <a:t>Does estrogen keep the mind sharp?</a:t>
+              <a:t>Does estrogen keep older women's minds sharp?</a:t>
             </a:r>
           </a:p>
         </p:txBody>
@@ -5850,7 +6154,7 @@
                 </a:solidFill>
                 <a:latin typeface="Geist Mono"/>
               </a:rPr>
-              <a:t>The tempting headline</a:t>
+              <a:t>Prediction is not causation</a:t>
             </a:r>
           </a:p>
         </p:txBody>
@@ -5929,14 +6233,14 @@
                 </a:solidFill>
                 <a:latin typeface="Geist Mono"/>
               </a:rPr>
-              <a:t>Jinchi Wei  ·  Outset  ·  Does estrogen keep the mind sharp?  ·  2026-07-08</a:t>
+              <a:t>Jinchi Wei  ·  Outset  ·  Does estrogen keep older women's minds sharp?  ·  2026-07-08</a:t>
             </a:r>
           </a:p>
         </p:txBody>
       </p:sp>
       <p:pic>
         <p:nvPicPr>
-          <p:cNvPr id="7" name="Picture 6" descr="raw_means.png"/>
+          <p:cNvPr id="7" name="Picture 6" descr="intro_prediction_vs_causation.png"/>
           <p:cNvPicPr>
             <a:picLocks noChangeAspect="1"/>
           </p:cNvPicPr>
@@ -5950,8 +6254,8 @@
         </p:blipFill>
         <p:spPr>
           <a:xfrm>
-            <a:off x="457200" y="1880859"/>
-            <a:ext cx="6298387" cy="3553481"/>
+            <a:off x="457200" y="2095933"/>
+            <a:ext cx="6185916" cy="3123333"/>
           </a:xfrm>
           <a:prstGeom prst="rect">
             <a:avLst/>
@@ -5966,8 +6270,8 @@
         </p:nvSpPr>
         <p:spPr>
           <a:xfrm>
-            <a:off x="7121347" y="1325880"/>
-            <a:ext cx="4582972" cy="1097280"/>
+            <a:off x="7008876" y="1143000"/>
+            <a:ext cx="4695444" cy="365760"/>
           </a:xfrm>
           <a:prstGeom prst="rect">
             <a:avLst/>
@@ -5982,13 +6286,13 @@
           <a:p>
             <a:pPr algn="l"/>
             <a:r>
-              <a:rPr sz="6600" b="1" i="0">
-                <a:solidFill>
-                  <a:srgbClr val="40E0D0"/>
+              <a:rPr sz="1400" b="1" i="0">
+                <a:solidFill>
+                  <a:srgbClr val="8A2BE2"/>
                 </a:solidFill>
                 <a:latin typeface="Geist Mono"/>
               </a:rPr>
-              <a:t>+8.1</a:t>
+              <a:t>A CAUSAL QUESTION FORCES THE MODEL</a:t>
             </a:r>
           </a:p>
         </p:txBody>
@@ -6001,8 +6305,8 @@
         </p:nvSpPr>
         <p:spPr>
           <a:xfrm>
-            <a:off x="7121347" y="2468880"/>
-            <a:ext cx="4582972" cy="457200"/>
+            <a:off x="7008876" y="1600200"/>
+            <a:ext cx="4695444" cy="1371600"/>
           </a:xfrm>
           <a:prstGeom prst="rect">
             <a:avLst/>
@@ -6017,27 +6321,71 @@
           <a:p>
             <a:pPr algn="l"/>
             <a:r>
-              <a:rPr sz="1500" b="1" i="0">
+              <a:rPr sz="1550" b="0" i="0">
                 <a:solidFill>
                   <a:srgbClr val="14141C"/>
                 </a:solidFill>
-                <a:latin typeface="Geist Mono"/>
-              </a:rPr>
-              <a:t>points -- the raw gap, users over non-users</a:t>
-            </a:r>
-          </a:p>
-        </p:txBody>
-      </p:sp>
-      <p:sp>
-        <p:nvSpPr>
-          <p:cNvPr id="10" name="TextBox 9"/>
+                <a:latin typeface="Geist"/>
+              </a:rPr>
+              <a:t>To answer it you must READ the estrogen coefficient and watch it change as you adjust. Only an interpretable model gives you that number.</a:t>
+            </a:r>
+          </a:p>
+        </p:txBody>
+      </p:sp>
+      <p:sp>
+        <p:nvSpPr>
+          <p:cNvPr id="10" name="Rectangle 9"/>
+          <p:cNvSpPr/>
+          <p:nvPr/>
+        </p:nvSpPr>
+        <p:spPr>
+          <a:xfrm>
+            <a:off x="7008876" y="3017520"/>
+            <a:ext cx="2233422" cy="868680"/>
+          </a:xfrm>
+          <a:prstGeom prst="rect">
+            <a:avLst/>
+          </a:prstGeom>
+          <a:solidFill>
+            <a:srgbClr val="40E0D0"/>
+          </a:solidFill>
+          <a:ln>
+            <a:noFill/>
+          </a:ln>
+          <a:effectLst/>
+        </p:spPr>
+        <p:style>
+          <a:lnRef idx="1">
+            <a:schemeClr val="accent1"/>
+          </a:lnRef>
+          <a:fillRef idx="3">
+            <a:schemeClr val="accent1"/>
+          </a:fillRef>
+          <a:effectRef idx="2">
+            <a:schemeClr val="accent1"/>
+          </a:effectRef>
+          <a:fontRef idx="minor">
+            <a:schemeClr val="lt1"/>
+          </a:fontRef>
+        </p:style>
+        <p:txBody>
+          <a:bodyPr rtlCol="0" anchor="ctr"/>
+          <a:lstStyle/>
+          <a:p>
+            <a:pPr algn="ctr"/>
+          </a:p>
+        </p:txBody>
+      </p:sp>
+      <p:sp>
+        <p:nvSpPr>
+          <p:cNvPr id="11" name="TextBox 10"/>
           <p:cNvSpPr txBox="1"/>
           <p:nvPr/>
         </p:nvSpPr>
         <p:spPr>
           <a:xfrm>
-            <a:off x="7121347" y="3063240"/>
-            <a:ext cx="4582972" cy="2011680"/>
+            <a:off x="7008876" y="3081528"/>
+            <a:ext cx="2233422" cy="502920"/>
           </a:xfrm>
           <a:prstGeom prst="rect">
             <a:avLst/>
@@ -6050,15 +6398,199 @@
           </a:bodyPr>
           <a:lstStyle/>
           <a:p>
+            <a:pPr algn="ctr"/>
+            <a:r>
+              <a:rPr sz="2800" b="1" i="0">
+                <a:solidFill>
+                  <a:srgbClr val="14141C"/>
+                </a:solidFill>
+                <a:latin typeface="Geist Mono"/>
+              </a:rPr>
+              <a:t>0.78</a:t>
+            </a:r>
+          </a:p>
+        </p:txBody>
+      </p:sp>
+      <p:sp>
+        <p:nvSpPr>
+          <p:cNvPr id="12" name="TextBox 11"/>
+          <p:cNvSpPr txBox="1"/>
+          <p:nvPr/>
+        </p:nvSpPr>
+        <p:spPr>
+          <a:xfrm>
+            <a:off x="7008876" y="3566160"/>
+            <a:ext cx="2233422" cy="274320"/>
+          </a:xfrm>
+          <a:prstGeom prst="rect">
+            <a:avLst/>
+          </a:prstGeom>
+          <a:noFill/>
+        </p:spPr>
+        <p:txBody>
+          <a:bodyPr wrap="square" anchor="t" lIns="0" rIns="0" tIns="0" bIns="0">
+            <a:spAutoFit/>
+          </a:bodyPr>
+          <a:lstStyle/>
+          <a:p>
+            <a:pPr algn="ctr"/>
+            <a:r>
+              <a:rPr sz="1200" b="0" i="0">
+                <a:solidFill>
+                  <a:srgbClr val="14141C"/>
+                </a:solidFill>
+                <a:latin typeface="Geist"/>
+              </a:rPr>
+              <a:t>logistic AUC</a:t>
+            </a:r>
+          </a:p>
+        </p:txBody>
+      </p:sp>
+      <p:sp>
+        <p:nvSpPr>
+          <p:cNvPr id="13" name="Rectangle 12"/>
+          <p:cNvSpPr/>
+          <p:nvPr/>
+        </p:nvSpPr>
+        <p:spPr>
+          <a:xfrm>
+            <a:off x="9470898" y="3017520"/>
+            <a:ext cx="2233422" cy="868680"/>
+          </a:xfrm>
+          <a:prstGeom prst="rect">
+            <a:avLst/>
+          </a:prstGeom>
+          <a:solidFill>
+            <a:srgbClr val="26262E"/>
+          </a:solidFill>
+          <a:ln>
+            <a:noFill/>
+          </a:ln>
+          <a:effectLst/>
+        </p:spPr>
+        <p:style>
+          <a:lnRef idx="1">
+            <a:schemeClr val="accent1"/>
+          </a:lnRef>
+          <a:fillRef idx="3">
+            <a:schemeClr val="accent1"/>
+          </a:fillRef>
+          <a:effectRef idx="2">
+            <a:schemeClr val="accent1"/>
+          </a:effectRef>
+          <a:fontRef idx="minor">
+            <a:schemeClr val="lt1"/>
+          </a:fontRef>
+        </p:style>
+        <p:txBody>
+          <a:bodyPr rtlCol="0" anchor="ctr"/>
+          <a:lstStyle/>
+          <a:p>
+            <a:pPr algn="ctr"/>
+          </a:p>
+        </p:txBody>
+      </p:sp>
+      <p:sp>
+        <p:nvSpPr>
+          <p:cNvPr id="14" name="TextBox 13"/>
+          <p:cNvSpPr txBox="1"/>
+          <p:nvPr/>
+        </p:nvSpPr>
+        <p:spPr>
+          <a:xfrm>
+            <a:off x="9470898" y="3081528"/>
+            <a:ext cx="2233422" cy="502920"/>
+          </a:xfrm>
+          <a:prstGeom prst="rect">
+            <a:avLst/>
+          </a:prstGeom>
+          <a:noFill/>
+        </p:spPr>
+        <p:txBody>
+          <a:bodyPr wrap="square" anchor="t" lIns="0" rIns="0" tIns="0" bIns="0">
+            <a:spAutoFit/>
+          </a:bodyPr>
+          <a:lstStyle/>
+          <a:p>
+            <a:pPr algn="ctr"/>
+            <a:r>
+              <a:rPr sz="2800" b="1" i="0">
+                <a:solidFill>
+                  <a:srgbClr val="FFFFFF"/>
+                </a:solidFill>
+                <a:latin typeface="Geist Mono"/>
+              </a:rPr>
+              <a:t>0.76</a:t>
+            </a:r>
+          </a:p>
+        </p:txBody>
+      </p:sp>
+      <p:sp>
+        <p:nvSpPr>
+          <p:cNvPr id="15" name="TextBox 14"/>
+          <p:cNvSpPr txBox="1"/>
+          <p:nvPr/>
+        </p:nvSpPr>
+        <p:spPr>
+          <a:xfrm>
+            <a:off x="9470898" y="3566160"/>
+            <a:ext cx="2233422" cy="274320"/>
+          </a:xfrm>
+          <a:prstGeom prst="rect">
+            <a:avLst/>
+          </a:prstGeom>
+          <a:noFill/>
+        </p:spPr>
+        <p:txBody>
+          <a:bodyPr wrap="square" anchor="t" lIns="0" rIns="0" tIns="0" bIns="0">
+            <a:spAutoFit/>
+          </a:bodyPr>
+          <a:lstStyle/>
+          <a:p>
+            <a:pPr algn="ctr"/>
+            <a:r>
+              <a:rPr sz="1200" b="0" i="0">
+                <a:solidFill>
+                  <a:srgbClr val="B8B4A6"/>
+                </a:solidFill>
+                <a:latin typeface="Geist"/>
+              </a:rPr>
+              <a:t>black box AUC</a:t>
+            </a:r>
+          </a:p>
+        </p:txBody>
+      </p:sp>
+      <p:sp>
+        <p:nvSpPr>
+          <p:cNvPr id="16" name="TextBox 15"/>
+          <p:cNvSpPr txBox="1"/>
+          <p:nvPr/>
+        </p:nvSpPr>
+        <p:spPr>
+          <a:xfrm>
+            <a:off x="7008876" y="4114800"/>
+            <a:ext cx="4695444" cy="1188720"/>
+          </a:xfrm>
+          <a:prstGeom prst="rect">
+            <a:avLst/>
+          </a:prstGeom>
+          <a:noFill/>
+        </p:spPr>
+        <p:txBody>
+          <a:bodyPr wrap="square" anchor="t" lIns="0" rIns="0" tIns="0" bIns="0">
+            <a:spAutoFit/>
+          </a:bodyPr>
+          <a:lstStyle/>
+          <a:p>
             <a:pPr algn="l"/>
             <a:r>
-              <a:rPr sz="1500" b="0" i="0">
+              <a:rPr sz="1500" b="0" i="1">
                 <a:solidFill>
                   <a:srgbClr val="14141C"/>
                 </a:solidFill>
                 <a:latin typeface="Geist"/>
               </a:rPr>
-              <a:t>51.8 versus 43.7. Taken at face value, the exciting headline writes itself: 'estrogen users think better.' But we never checked whether the two groups were the same kind of people to begin with.</a:t>
+              <a:t>The black box does not even predict better here -- and it can never hand you the effect size. So we choose logistic regression.</a:t>
             </a:r>
           </a:p>
         </p:txBody>
@@ -6199,7 +6731,7 @@
                 </a:solidFill>
                 <a:latin typeface="Geist Mono"/>
               </a:rPr>
-              <a:t>Two-thirds of the effect was confounding</a:t>
+              <a:t>Why logistic regression, and the exact recipe</a:t>
             </a:r>
           </a:p>
         </p:txBody>
@@ -6278,35 +6810,55 @@
                 </a:solidFill>
                 <a:latin typeface="Geist Mono"/>
               </a:rPr>
-              <a:t>Jinchi Wei  ·  Outset  ·  Does estrogen keep the mind sharp?  ·  2026-07-08</a:t>
-            </a:r>
-          </a:p>
-        </p:txBody>
-      </p:sp>
-      <p:pic>
-        <p:nvPicPr>
-          <p:cNvPr id="7" name="Picture 6" descr="confounding.png"/>
-          <p:cNvPicPr>
-            <a:picLocks noChangeAspect="1"/>
-          </p:cNvPicPr>
-          <p:nvPr/>
-        </p:nvPicPr>
-        <p:blipFill>
-          <a:blip r:embed="rId2"/>
-          <a:stretch>
-            <a:fillRect/>
-          </a:stretch>
-        </p:blipFill>
-        <p:spPr>
-          <a:xfrm>
-            <a:off x="457200" y="1524087"/>
-            <a:ext cx="6298387" cy="4267025"/>
-          </a:xfrm>
-          <a:prstGeom prst="rect">
-            <a:avLst/>
-          </a:prstGeom>
-        </p:spPr>
-      </p:pic>
+              <a:t>Jinchi Wei  ·  Outset  ·  Does estrogen keep older women's minds sharp?  ·  2026-07-08</a:t>
+            </a:r>
+          </a:p>
+        </p:txBody>
+      </p:sp>
+      <p:sp>
+        <p:nvSpPr>
+          <p:cNvPr id="7" name="Rectangle 6"/>
+          <p:cNvSpPr/>
+          <p:nvPr/>
+        </p:nvSpPr>
+        <p:spPr>
+          <a:xfrm>
+            <a:off x="457200" y="1051560"/>
+            <a:ext cx="822960" cy="881481"/>
+          </a:xfrm>
+          <a:prstGeom prst="rect">
+            <a:avLst/>
+          </a:prstGeom>
+          <a:solidFill>
+            <a:srgbClr val="40E0D0"/>
+          </a:solidFill>
+          <a:ln>
+            <a:noFill/>
+          </a:ln>
+          <a:effectLst/>
+        </p:spPr>
+        <p:style>
+          <a:lnRef idx="1">
+            <a:schemeClr val="accent1"/>
+          </a:lnRef>
+          <a:fillRef idx="3">
+            <a:schemeClr val="accent1"/>
+          </a:fillRef>
+          <a:effectRef idx="2">
+            <a:schemeClr val="accent1"/>
+          </a:effectRef>
+          <a:fontRef idx="minor">
+            <a:schemeClr val="lt1"/>
+          </a:fontRef>
+        </p:style>
+        <p:txBody>
+          <a:bodyPr rtlCol="0" anchor="ctr"/>
+          <a:lstStyle/>
+          <a:p>
+            <a:pPr algn="ctr"/>
+          </a:p>
+        </p:txBody>
+      </p:sp>
       <p:sp>
         <p:nvSpPr>
           <p:cNvPr id="8" name="TextBox 7"/>
@@ -6315,8 +6867,8 @@
         </p:nvSpPr>
         <p:spPr>
           <a:xfrm>
-            <a:off x="7121347" y="1325880"/>
-            <a:ext cx="4582972" cy="1188720"/>
+            <a:off x="457200" y="1051560"/>
+            <a:ext cx="822960" cy="881481"/>
           </a:xfrm>
           <a:prstGeom prst="rect">
             <a:avLst/>
@@ -6324,20 +6876,20 @@
           <a:noFill/>
         </p:spPr>
         <p:txBody>
-          <a:bodyPr wrap="square" anchor="t" lIns="0" rIns="0" tIns="0" bIns="0">
+          <a:bodyPr wrap="square" anchor="ctr" lIns="0" rIns="0" tIns="0" bIns="0">
             <a:spAutoFit/>
           </a:bodyPr>
           <a:lstStyle/>
           <a:p>
-            <a:pPr algn="l"/>
-            <a:r>
-              <a:rPr sz="7600" b="1" i="0">
-                <a:solidFill>
-                  <a:srgbClr val="FF1493"/>
+            <a:pPr algn="ctr"/>
+            <a:r>
+              <a:rPr sz="2400" b="1" i="0">
+                <a:solidFill>
+                  <a:srgbClr val="14141C"/>
                 </a:solidFill>
                 <a:latin typeface="Geist Mono"/>
               </a:rPr>
-              <a:t>67%</a:t>
+              <a:t>1</a:t>
             </a:r>
           </a:p>
         </p:txBody>
@@ -6350,8 +6902,8 @@
         </p:nvSpPr>
         <p:spPr>
           <a:xfrm>
-            <a:off x="7121347" y="2560320"/>
-            <a:ext cx="4582972" cy="457200"/>
+            <a:off x="1508760" y="1051560"/>
+            <a:ext cx="2651760" cy="881481"/>
           </a:xfrm>
           <a:prstGeom prst="rect">
             <a:avLst/>
@@ -6359,20 +6911,20 @@
           <a:noFill/>
         </p:spPr>
         <p:txBody>
-          <a:bodyPr wrap="square" anchor="t" lIns="0" rIns="0" tIns="0" bIns="0">
+          <a:bodyPr wrap="square" anchor="ctr" lIns="0" rIns="0" tIns="0" bIns="0">
             <a:spAutoFit/>
           </a:bodyPr>
           <a:lstStyle/>
           <a:p>
             <a:pPr algn="l"/>
             <a:r>
-              <a:rPr sz="1500" b="1" i="0">
-                <a:solidFill>
-                  <a:srgbClr val="14141C"/>
+              <a:rPr sz="1600" b="1" i="0">
+                <a:solidFill>
+                  <a:srgbClr val="40E0D0"/>
                 </a:solidFill>
                 <a:latin typeface="Geist Mono"/>
               </a:rPr>
-              <a:t>of the effect was confounding</a:t>
+              <a:t>MODEL</a:t>
             </a:r>
           </a:p>
         </p:txBody>
@@ -6385,8 +6937,8 @@
         </p:nvSpPr>
         <p:spPr>
           <a:xfrm>
-            <a:off x="7121347" y="3154680"/>
-            <a:ext cx="4582972" cy="2011680"/>
+            <a:off x="4297680" y="1051560"/>
+            <a:ext cx="7406640" cy="881481"/>
           </a:xfrm>
           <a:prstGeom prst="rect">
             <a:avLst/>
@@ -6394,20 +6946,616 @@
           <a:noFill/>
         </p:spPr>
         <p:txBody>
-          <a:bodyPr wrap="square" anchor="t" lIns="0" rIns="0" tIns="0" bIns="0">
+          <a:bodyPr wrap="square" anchor="ctr" lIns="0" rIns="0" tIns="0" bIns="0">
             <a:spAutoFit/>
           </a:bodyPr>
           <a:lstStyle/>
           <a:p>
             <a:pPr algn="l"/>
             <a:r>
-              <a:rPr sz="1500" b="0" i="0">
+              <a:rPr sz="1450" b="0" i="0">
                 <a:solidFill>
                   <a:srgbClr val="14141C"/>
                 </a:solidFill>
                 <a:latin typeface="Geist"/>
               </a:rPr>
-              <a:t>The crude effect (-0.33) shrank to just -0.11 once we adjusted for age, education, and income. That missing two-thirds was never the estrogen -- it was that users were healthier and better-off to start with.</a:t>
+              <a:t>LogisticRegression -- one linear equation whose estrogen coefficient is the effect size</a:t>
+            </a:r>
+          </a:p>
+        </p:txBody>
+      </p:sp>
+      <p:sp>
+        <p:nvSpPr>
+          <p:cNvPr id="11" name="Rectangle 10"/>
+          <p:cNvSpPr/>
+          <p:nvPr/>
+        </p:nvSpPr>
+        <p:spPr>
+          <a:xfrm>
+            <a:off x="457200" y="2134209"/>
+            <a:ext cx="822960" cy="881481"/>
+          </a:xfrm>
+          <a:prstGeom prst="rect">
+            <a:avLst/>
+          </a:prstGeom>
+          <a:solidFill>
+            <a:srgbClr val="FF1493"/>
+          </a:solidFill>
+          <a:ln>
+            <a:noFill/>
+          </a:ln>
+          <a:effectLst/>
+        </p:spPr>
+        <p:style>
+          <a:lnRef idx="1">
+            <a:schemeClr val="accent1"/>
+          </a:lnRef>
+          <a:fillRef idx="3">
+            <a:schemeClr val="accent1"/>
+          </a:fillRef>
+          <a:effectRef idx="2">
+            <a:schemeClr val="accent1"/>
+          </a:effectRef>
+          <a:fontRef idx="minor">
+            <a:schemeClr val="lt1"/>
+          </a:fontRef>
+        </p:style>
+        <p:txBody>
+          <a:bodyPr rtlCol="0" anchor="ctr"/>
+          <a:lstStyle/>
+          <a:p>
+            <a:pPr algn="ctr"/>
+          </a:p>
+        </p:txBody>
+      </p:sp>
+      <p:sp>
+        <p:nvSpPr>
+          <p:cNvPr id="12" name="TextBox 11"/>
+          <p:cNvSpPr txBox="1"/>
+          <p:nvPr/>
+        </p:nvSpPr>
+        <p:spPr>
+          <a:xfrm>
+            <a:off x="457200" y="2134209"/>
+            <a:ext cx="822960" cy="881481"/>
+          </a:xfrm>
+          <a:prstGeom prst="rect">
+            <a:avLst/>
+          </a:prstGeom>
+          <a:noFill/>
+        </p:spPr>
+        <p:txBody>
+          <a:bodyPr wrap="square" anchor="ctr" lIns="0" rIns="0" tIns="0" bIns="0">
+            <a:spAutoFit/>
+          </a:bodyPr>
+          <a:lstStyle/>
+          <a:p>
+            <a:pPr algn="ctr"/>
+            <a:r>
+              <a:rPr sz="2400" b="1" i="0">
+                <a:solidFill>
+                  <a:srgbClr val="FFFFFF"/>
+                </a:solidFill>
+                <a:latin typeface="Geist Mono"/>
+              </a:rPr>
+              <a:t>2</a:t>
+            </a:r>
+          </a:p>
+        </p:txBody>
+      </p:sp>
+      <p:sp>
+        <p:nvSpPr>
+          <p:cNvPr id="13" name="TextBox 12"/>
+          <p:cNvSpPr txBox="1"/>
+          <p:nvPr/>
+        </p:nvSpPr>
+        <p:spPr>
+          <a:xfrm>
+            <a:off x="1508760" y="2134209"/>
+            <a:ext cx="2651760" cy="881481"/>
+          </a:xfrm>
+          <a:prstGeom prst="rect">
+            <a:avLst/>
+          </a:prstGeom>
+          <a:noFill/>
+        </p:spPr>
+        <p:txBody>
+          <a:bodyPr wrap="square" anchor="ctr" lIns="0" rIns="0" tIns="0" bIns="0">
+            <a:spAutoFit/>
+          </a:bodyPr>
+          <a:lstStyle/>
+          <a:p>
+            <a:pPr algn="l"/>
+            <a:r>
+              <a:rPr sz="1600" b="1" i="0">
+                <a:solidFill>
+                  <a:srgbClr val="FF1493"/>
+                </a:solidFill>
+                <a:latin typeface="Geist Mono"/>
+              </a:rPr>
+              <a:t>FEATURES</a:t>
+            </a:r>
+          </a:p>
+        </p:txBody>
+      </p:sp>
+      <p:sp>
+        <p:nvSpPr>
+          <p:cNvPr id="14" name="TextBox 13"/>
+          <p:cNvSpPr txBox="1"/>
+          <p:nvPr/>
+        </p:nvSpPr>
+        <p:spPr>
+          <a:xfrm>
+            <a:off x="4297680" y="2134209"/>
+            <a:ext cx="7406640" cy="881481"/>
+          </a:xfrm>
+          <a:prstGeom prst="rect">
+            <a:avLst/>
+          </a:prstGeom>
+          <a:noFill/>
+        </p:spPr>
+        <p:txBody>
+          <a:bodyPr wrap="square" anchor="ctr" lIns="0" rIns="0" tIns="0" bIns="0">
+            <a:spAutoFit/>
+          </a:bodyPr>
+          <a:lstStyle/>
+          <a:p>
+            <a:pPr algn="l"/>
+            <a:r>
+              <a:rPr sz="1450" b="0" i="0">
+                <a:solidFill>
+                  <a:srgbClr val="14141C"/>
+                </a:solidFill>
+                <a:latin typeface="Geist"/>
+              </a:rPr>
+              <a:t>age, education, income, used_estrogen, years_estrogen -- each standardized so coefficients compare</a:t>
+            </a:r>
+          </a:p>
+        </p:txBody>
+      </p:sp>
+      <p:sp>
+        <p:nvSpPr>
+          <p:cNvPr id="15" name="Rectangle 14"/>
+          <p:cNvSpPr/>
+          <p:nvPr/>
+        </p:nvSpPr>
+        <p:spPr>
+          <a:xfrm>
+            <a:off x="457200" y="3216859"/>
+            <a:ext cx="822960" cy="881481"/>
+          </a:xfrm>
+          <a:prstGeom prst="rect">
+            <a:avLst/>
+          </a:prstGeom>
+          <a:solidFill>
+            <a:srgbClr val="F0C840"/>
+          </a:solidFill>
+          <a:ln>
+            <a:noFill/>
+          </a:ln>
+          <a:effectLst/>
+        </p:spPr>
+        <p:style>
+          <a:lnRef idx="1">
+            <a:schemeClr val="accent1"/>
+          </a:lnRef>
+          <a:fillRef idx="3">
+            <a:schemeClr val="accent1"/>
+          </a:fillRef>
+          <a:effectRef idx="2">
+            <a:schemeClr val="accent1"/>
+          </a:effectRef>
+          <a:fontRef idx="minor">
+            <a:schemeClr val="lt1"/>
+          </a:fontRef>
+        </p:style>
+        <p:txBody>
+          <a:bodyPr rtlCol="0" anchor="ctr"/>
+          <a:lstStyle/>
+          <a:p>
+            <a:pPr algn="ctr"/>
+          </a:p>
+        </p:txBody>
+      </p:sp>
+      <p:sp>
+        <p:nvSpPr>
+          <p:cNvPr id="16" name="TextBox 15"/>
+          <p:cNvSpPr txBox="1"/>
+          <p:nvPr/>
+        </p:nvSpPr>
+        <p:spPr>
+          <a:xfrm>
+            <a:off x="457200" y="3216859"/>
+            <a:ext cx="822960" cy="881481"/>
+          </a:xfrm>
+          <a:prstGeom prst="rect">
+            <a:avLst/>
+          </a:prstGeom>
+          <a:noFill/>
+        </p:spPr>
+        <p:txBody>
+          <a:bodyPr wrap="square" anchor="ctr" lIns="0" rIns="0" tIns="0" bIns="0">
+            <a:spAutoFit/>
+          </a:bodyPr>
+          <a:lstStyle/>
+          <a:p>
+            <a:pPr algn="ctr"/>
+            <a:r>
+              <a:rPr sz="2400" b="1" i="0">
+                <a:solidFill>
+                  <a:srgbClr val="14141C"/>
+                </a:solidFill>
+                <a:latin typeface="Geist Mono"/>
+              </a:rPr>
+              <a:t>3</a:t>
+            </a:r>
+          </a:p>
+        </p:txBody>
+      </p:sp>
+      <p:sp>
+        <p:nvSpPr>
+          <p:cNvPr id="17" name="TextBox 16"/>
+          <p:cNvSpPr txBox="1"/>
+          <p:nvPr/>
+        </p:nvSpPr>
+        <p:spPr>
+          <a:xfrm>
+            <a:off x="1508760" y="3216859"/>
+            <a:ext cx="2651760" cy="881481"/>
+          </a:xfrm>
+          <a:prstGeom prst="rect">
+            <a:avLst/>
+          </a:prstGeom>
+          <a:noFill/>
+        </p:spPr>
+        <p:txBody>
+          <a:bodyPr wrap="square" anchor="ctr" lIns="0" rIns="0" tIns="0" bIns="0">
+            <a:spAutoFit/>
+          </a:bodyPr>
+          <a:lstStyle/>
+          <a:p>
+            <a:pPr algn="l"/>
+            <a:r>
+              <a:rPr sz="1600" b="1" i="0">
+                <a:solidFill>
+                  <a:srgbClr val="F0C840"/>
+                </a:solidFill>
+                <a:latin typeface="Geist Mono"/>
+              </a:rPr>
+              <a:t>THE CAUSAL MOVE</a:t>
+            </a:r>
+          </a:p>
+        </p:txBody>
+      </p:sp>
+      <p:sp>
+        <p:nvSpPr>
+          <p:cNvPr id="18" name="TextBox 17"/>
+          <p:cNvSpPr txBox="1"/>
+          <p:nvPr/>
+        </p:nvSpPr>
+        <p:spPr>
+          <a:xfrm>
+            <a:off x="4297680" y="3216859"/>
+            <a:ext cx="7406640" cy="881481"/>
+          </a:xfrm>
+          <a:prstGeom prst="rect">
+            <a:avLst/>
+          </a:prstGeom>
+          <a:noFill/>
+        </p:spPr>
+        <p:txBody>
+          <a:bodyPr wrap="square" anchor="ctr" lIns="0" rIns="0" tIns="0" bIns="0">
+            <a:spAutoFit/>
+          </a:bodyPr>
+          <a:lstStyle/>
+          <a:p>
+            <a:pPr algn="l"/>
+            <a:r>
+              <a:rPr sz="1450" b="0" i="0">
+                <a:solidFill>
+                  <a:srgbClr val="14141C"/>
+                </a:solidFill>
+                <a:latin typeface="Geist"/>
+              </a:rPr>
+              <a:t>fit the estrogen effect TWICE: crude (alone) then adjusted (+ confounders); the change is the confounding</a:t>
+            </a:r>
+          </a:p>
+        </p:txBody>
+      </p:sp>
+      <p:sp>
+        <p:nvSpPr>
+          <p:cNvPr id="19" name="Rectangle 18"/>
+          <p:cNvSpPr/>
+          <p:nvPr/>
+        </p:nvSpPr>
+        <p:spPr>
+          <a:xfrm>
+            <a:off x="457200" y="4299508"/>
+            <a:ext cx="822960" cy="881481"/>
+          </a:xfrm>
+          <a:prstGeom prst="rect">
+            <a:avLst/>
+          </a:prstGeom>
+          <a:solidFill>
+            <a:srgbClr val="8A2BE2"/>
+          </a:solidFill>
+          <a:ln>
+            <a:noFill/>
+          </a:ln>
+          <a:effectLst/>
+        </p:spPr>
+        <p:style>
+          <a:lnRef idx="1">
+            <a:schemeClr val="accent1"/>
+          </a:lnRef>
+          <a:fillRef idx="3">
+            <a:schemeClr val="accent1"/>
+          </a:fillRef>
+          <a:effectRef idx="2">
+            <a:schemeClr val="accent1"/>
+          </a:effectRef>
+          <a:fontRef idx="minor">
+            <a:schemeClr val="lt1"/>
+          </a:fontRef>
+        </p:style>
+        <p:txBody>
+          <a:bodyPr rtlCol="0" anchor="ctr"/>
+          <a:lstStyle/>
+          <a:p>
+            <a:pPr algn="ctr"/>
+          </a:p>
+        </p:txBody>
+      </p:sp>
+      <p:sp>
+        <p:nvSpPr>
+          <p:cNvPr id="20" name="TextBox 19"/>
+          <p:cNvSpPr txBox="1"/>
+          <p:nvPr/>
+        </p:nvSpPr>
+        <p:spPr>
+          <a:xfrm>
+            <a:off x="457200" y="4299508"/>
+            <a:ext cx="822960" cy="881481"/>
+          </a:xfrm>
+          <a:prstGeom prst="rect">
+            <a:avLst/>
+          </a:prstGeom>
+          <a:noFill/>
+        </p:spPr>
+        <p:txBody>
+          <a:bodyPr wrap="square" anchor="ctr" lIns="0" rIns="0" tIns="0" bIns="0">
+            <a:spAutoFit/>
+          </a:bodyPr>
+          <a:lstStyle/>
+          <a:p>
+            <a:pPr algn="ctr"/>
+            <a:r>
+              <a:rPr sz="2400" b="1" i="0">
+                <a:solidFill>
+                  <a:srgbClr val="FFFFFF"/>
+                </a:solidFill>
+                <a:latin typeface="Geist Mono"/>
+              </a:rPr>
+              <a:t>4</a:t>
+            </a:r>
+          </a:p>
+        </p:txBody>
+      </p:sp>
+      <p:sp>
+        <p:nvSpPr>
+          <p:cNvPr id="21" name="TextBox 20"/>
+          <p:cNvSpPr txBox="1"/>
+          <p:nvPr/>
+        </p:nvSpPr>
+        <p:spPr>
+          <a:xfrm>
+            <a:off x="1508760" y="4299508"/>
+            <a:ext cx="2651760" cy="881481"/>
+          </a:xfrm>
+          <a:prstGeom prst="rect">
+            <a:avLst/>
+          </a:prstGeom>
+          <a:noFill/>
+        </p:spPr>
+        <p:txBody>
+          <a:bodyPr wrap="square" anchor="ctr" lIns="0" rIns="0" tIns="0" bIns="0">
+            <a:spAutoFit/>
+          </a:bodyPr>
+          <a:lstStyle/>
+          <a:p>
+            <a:pPr algn="l"/>
+            <a:r>
+              <a:rPr sz="1600" b="1" i="0">
+                <a:solidFill>
+                  <a:srgbClr val="8A2BE2"/>
+                </a:solidFill>
+                <a:latin typeface="Geist Mono"/>
+              </a:rPr>
+              <a:t>PREDICTIVE SCORE</a:t>
+            </a:r>
+          </a:p>
+        </p:txBody>
+      </p:sp>
+      <p:sp>
+        <p:nvSpPr>
+          <p:cNvPr id="22" name="TextBox 21"/>
+          <p:cNvSpPr txBox="1"/>
+          <p:nvPr/>
+        </p:nvSpPr>
+        <p:spPr>
+          <a:xfrm>
+            <a:off x="4297680" y="4299508"/>
+            <a:ext cx="7406640" cy="881481"/>
+          </a:xfrm>
+          <a:prstGeom prst="rect">
+            <a:avLst/>
+          </a:prstGeom>
+          <a:noFill/>
+        </p:spPr>
+        <p:txBody>
+          <a:bodyPr wrap="square" anchor="ctr" lIns="0" rIns="0" tIns="0" bIns="0">
+            <a:spAutoFit/>
+          </a:bodyPr>
+          <a:lstStyle/>
+          <a:p>
+            <a:pPr algn="l"/>
+            <a:r>
+              <a:rPr sz="1450" b="0" i="0">
+                <a:solidFill>
+                  <a:srgbClr val="14141C"/>
+                </a:solidFill>
+                <a:latin typeface="Geist"/>
+              </a:rPr>
+              <a:t>AUC via 5-fold cross-validation, so no woman is graded by a model that trained on her</a:t>
+            </a:r>
+          </a:p>
+        </p:txBody>
+      </p:sp>
+      <p:sp>
+        <p:nvSpPr>
+          <p:cNvPr id="23" name="Rectangle 22"/>
+          <p:cNvSpPr/>
+          <p:nvPr/>
+        </p:nvSpPr>
+        <p:spPr>
+          <a:xfrm>
+            <a:off x="457200" y="5382158"/>
+            <a:ext cx="822960" cy="881481"/>
+          </a:xfrm>
+          <a:prstGeom prst="rect">
+            <a:avLst/>
+          </a:prstGeom>
+          <a:solidFill>
+            <a:srgbClr val="40E0D0"/>
+          </a:solidFill>
+          <a:ln>
+            <a:noFill/>
+          </a:ln>
+          <a:effectLst/>
+        </p:spPr>
+        <p:style>
+          <a:lnRef idx="1">
+            <a:schemeClr val="accent1"/>
+          </a:lnRef>
+          <a:fillRef idx="3">
+            <a:schemeClr val="accent1"/>
+          </a:fillRef>
+          <a:effectRef idx="2">
+            <a:schemeClr val="accent1"/>
+          </a:effectRef>
+          <a:fontRef idx="minor">
+            <a:schemeClr val="lt1"/>
+          </a:fontRef>
+        </p:style>
+        <p:txBody>
+          <a:bodyPr rtlCol="0" anchor="ctr"/>
+          <a:lstStyle/>
+          <a:p>
+            <a:pPr algn="ctr"/>
+          </a:p>
+        </p:txBody>
+      </p:sp>
+      <p:sp>
+        <p:nvSpPr>
+          <p:cNvPr id="24" name="TextBox 23"/>
+          <p:cNvSpPr txBox="1"/>
+          <p:nvPr/>
+        </p:nvSpPr>
+        <p:spPr>
+          <a:xfrm>
+            <a:off x="457200" y="5382158"/>
+            <a:ext cx="822960" cy="881481"/>
+          </a:xfrm>
+          <a:prstGeom prst="rect">
+            <a:avLst/>
+          </a:prstGeom>
+          <a:noFill/>
+        </p:spPr>
+        <p:txBody>
+          <a:bodyPr wrap="square" anchor="ctr" lIns="0" rIns="0" tIns="0" bIns="0">
+            <a:spAutoFit/>
+          </a:bodyPr>
+          <a:lstStyle/>
+          <a:p>
+            <a:pPr algn="ctr"/>
+            <a:r>
+              <a:rPr sz="2400" b="1" i="0">
+                <a:solidFill>
+                  <a:srgbClr val="14141C"/>
+                </a:solidFill>
+                <a:latin typeface="Geist Mono"/>
+              </a:rPr>
+              <a:t>5</a:t>
+            </a:r>
+          </a:p>
+        </p:txBody>
+      </p:sp>
+      <p:sp>
+        <p:nvSpPr>
+          <p:cNvPr id="25" name="TextBox 24"/>
+          <p:cNvSpPr txBox="1"/>
+          <p:nvPr/>
+        </p:nvSpPr>
+        <p:spPr>
+          <a:xfrm>
+            <a:off x="1508760" y="5382158"/>
+            <a:ext cx="2651760" cy="881481"/>
+          </a:xfrm>
+          <a:prstGeom prst="rect">
+            <a:avLst/>
+          </a:prstGeom>
+          <a:noFill/>
+        </p:spPr>
+        <p:txBody>
+          <a:bodyPr wrap="square" anchor="ctr" lIns="0" rIns="0" tIns="0" bIns="0">
+            <a:spAutoFit/>
+          </a:bodyPr>
+          <a:lstStyle/>
+          <a:p>
+            <a:pPr algn="l"/>
+            <a:r>
+              <a:rPr sz="1600" b="1" i="0">
+                <a:solidFill>
+                  <a:srgbClr val="40E0D0"/>
+                </a:solidFill>
+                <a:latin typeface="Geist Mono"/>
+              </a:rPr>
+              <a:t>FAIRNESS</a:t>
+            </a:r>
+          </a:p>
+        </p:txBody>
+      </p:sp>
+      <p:sp>
+        <p:nvSpPr>
+          <p:cNvPr id="26" name="TextBox 25"/>
+          <p:cNvSpPr txBox="1"/>
+          <p:nvPr/>
+        </p:nvSpPr>
+        <p:spPr>
+          <a:xfrm>
+            <a:off x="4297680" y="5382158"/>
+            <a:ext cx="7406640" cy="881481"/>
+          </a:xfrm>
+          <a:prstGeom prst="rect">
+            <a:avLst/>
+          </a:prstGeom>
+          <a:noFill/>
+        </p:spPr>
+        <p:txBody>
+          <a:bodyPr wrap="square" anchor="ctr" lIns="0" rIns="0" tIns="0" bIns="0">
+            <a:spAutoFit/>
+          </a:bodyPr>
+          <a:lstStyle/>
+          <a:p>
+            <a:pPr algn="l"/>
+            <a:r>
+              <a:rPr sz="1450" b="0" i="0">
+                <a:solidFill>
+                  <a:srgbClr val="14141C"/>
+                </a:solidFill>
+                <a:latin typeface="Geist"/>
+              </a:rPr>
+              <a:t>a held-out train/test split, with accuracy reported separately for each group</a:t>
             </a:r>
           </a:p>
         </p:txBody>
@@ -6421,425 +7569,6 @@
 </file>
 
 <file path=ppt/slides/slide13.xml><?xml version="1.0" encoding="utf-8"?>
-<p:sld xmlns:a="http://schemas.openxmlformats.org/drawingml/2006/main" xmlns:p="http://schemas.openxmlformats.org/presentationml/2006/main" xmlns:r="http://schemas.openxmlformats.org/officeDocument/2006/relationships">
-  <p:cSld>
-    <p:spTree>
-      <p:nvGrpSpPr>
-        <p:cNvPr id="1" name=""/>
-        <p:cNvGrpSpPr/>
-        <p:nvPr/>
-      </p:nvGrpSpPr>
-      <p:grpSpPr/>
-      <p:sp>
-        <p:nvSpPr>
-          <p:cNvPr id="2" name="Rectangle 1"/>
-          <p:cNvSpPr/>
-          <p:nvPr/>
-        </p:nvSpPr>
-        <p:spPr>
-          <a:xfrm>
-            <a:off x="0" y="0"/>
-            <a:ext cx="12191695" cy="6858000"/>
-          </a:xfrm>
-          <a:prstGeom prst="rect">
-            <a:avLst/>
-          </a:prstGeom>
-          <a:solidFill>
-            <a:srgbClr val="F6F4EE"/>
-          </a:solidFill>
-          <a:ln>
-            <a:noFill/>
-          </a:ln>
-          <a:effectLst/>
-        </p:spPr>
-        <p:style>
-          <a:lnRef idx="1">
-            <a:schemeClr val="accent1"/>
-          </a:lnRef>
-          <a:fillRef idx="3">
-            <a:schemeClr val="accent1"/>
-          </a:fillRef>
-          <a:effectRef idx="2">
-            <a:schemeClr val="accent1"/>
-          </a:effectRef>
-          <a:fontRef idx="minor">
-            <a:schemeClr val="lt1"/>
-          </a:fontRef>
-        </p:style>
-        <p:txBody>
-          <a:bodyPr rtlCol="0" anchor="ctr"/>
-          <a:lstStyle/>
-          <a:p>
-            <a:pPr algn="ctr"/>
-          </a:p>
-        </p:txBody>
-      </p:sp>
-      <p:sp>
-        <p:nvSpPr>
-          <p:cNvPr id="3" name="Rectangle 2"/>
-          <p:cNvSpPr/>
-          <p:nvPr/>
-        </p:nvSpPr>
-        <p:spPr>
-          <a:xfrm>
-            <a:off x="0" y="0"/>
-            <a:ext cx="201168" cy="6858000"/>
-          </a:xfrm>
-          <a:prstGeom prst="rect">
-            <a:avLst/>
-          </a:prstGeom>
-          <a:solidFill>
-            <a:srgbClr val="F0C840"/>
-          </a:solidFill>
-          <a:ln>
-            <a:noFill/>
-          </a:ln>
-          <a:effectLst/>
-        </p:spPr>
-        <p:style>
-          <a:lnRef idx="1">
-            <a:schemeClr val="accent1"/>
-          </a:lnRef>
-          <a:fillRef idx="3">
-            <a:schemeClr val="accent1"/>
-          </a:fillRef>
-          <a:effectRef idx="2">
-            <a:schemeClr val="accent1"/>
-          </a:effectRef>
-          <a:fontRef idx="minor">
-            <a:schemeClr val="lt1"/>
-          </a:fontRef>
-        </p:style>
-        <p:txBody>
-          <a:bodyPr rtlCol="0" anchor="ctr"/>
-          <a:lstStyle/>
-          <a:p>
-            <a:pPr algn="ctr"/>
-          </a:p>
-        </p:txBody>
-      </p:sp>
-      <p:sp>
-        <p:nvSpPr>
-          <p:cNvPr id="4" name="TextBox 3"/>
-          <p:cNvSpPr txBox="1"/>
-          <p:nvPr/>
-        </p:nvSpPr>
-        <p:spPr>
-          <a:xfrm>
-            <a:off x="457200" y="274320"/>
-            <a:ext cx="11247120" cy="502920"/>
-          </a:xfrm>
-          <a:prstGeom prst="rect">
-            <a:avLst/>
-          </a:prstGeom>
-          <a:noFill/>
-        </p:spPr>
-        <p:txBody>
-          <a:bodyPr wrap="square" anchor="t" lIns="0" rIns="0" tIns="0" bIns="0">
-            <a:spAutoFit/>
-          </a:bodyPr>
-          <a:lstStyle/>
-          <a:p>
-            <a:pPr algn="l"/>
-            <a:r>
-              <a:rPr sz="2800" b="1" i="0">
-                <a:solidFill>
-                  <a:srgbClr val="14141C"/>
-                </a:solidFill>
-                <a:latin typeface="Geist Mono"/>
-              </a:rPr>
-              <a:t>Does the model work for everyone?</a:t>
-            </a:r>
-          </a:p>
-        </p:txBody>
-      </p:sp>
-      <p:sp>
-        <p:nvSpPr>
-          <p:cNvPr id="5" name="Rectangle 4"/>
-          <p:cNvSpPr/>
-          <p:nvPr/>
-        </p:nvSpPr>
-        <p:spPr>
-          <a:xfrm>
-            <a:off x="457200" y="868680"/>
-            <a:ext cx="11247120" cy="4572"/>
-          </a:xfrm>
-          <a:prstGeom prst="rect">
-            <a:avLst/>
-          </a:prstGeom>
-          <a:solidFill>
-            <a:srgbClr val="DDDDDD"/>
-          </a:solidFill>
-          <a:ln>
-            <a:noFill/>
-          </a:ln>
-          <a:effectLst/>
-        </p:spPr>
-        <p:style>
-          <a:lnRef idx="1">
-            <a:schemeClr val="accent1"/>
-          </a:lnRef>
-          <a:fillRef idx="3">
-            <a:schemeClr val="accent1"/>
-          </a:fillRef>
-          <a:effectRef idx="2">
-            <a:schemeClr val="accent1"/>
-          </a:effectRef>
-          <a:fontRef idx="minor">
-            <a:schemeClr val="lt1"/>
-          </a:fontRef>
-        </p:style>
-        <p:txBody>
-          <a:bodyPr rtlCol="0" anchor="ctr"/>
-          <a:lstStyle/>
-          <a:p>
-            <a:pPr algn="ctr"/>
-          </a:p>
-        </p:txBody>
-      </p:sp>
-      <p:sp>
-        <p:nvSpPr>
-          <p:cNvPr id="6" name="TextBox 5"/>
-          <p:cNvSpPr txBox="1"/>
-          <p:nvPr/>
-        </p:nvSpPr>
-        <p:spPr>
-          <a:xfrm>
-            <a:off x="457200" y="6510528"/>
-            <a:ext cx="11247120" cy="274320"/>
-          </a:xfrm>
-          <a:prstGeom prst="rect">
-            <a:avLst/>
-          </a:prstGeom>
-          <a:noFill/>
-        </p:spPr>
-        <p:txBody>
-          <a:bodyPr wrap="square" anchor="t" lIns="0" rIns="0" tIns="0" bIns="0">
-            <a:spAutoFit/>
-          </a:bodyPr>
-          <a:lstStyle/>
-          <a:p>
-            <a:pPr algn="l"/>
-            <a:r>
-              <a:rPr sz="900" b="0" i="0">
-                <a:solidFill>
-                  <a:srgbClr val="555560"/>
-                </a:solidFill>
-                <a:latin typeface="Geist Mono"/>
-              </a:rPr>
-              <a:t>Jinchi Wei  ·  Outset  ·  Does estrogen keep the mind sharp?  ·  2026-07-08</a:t>
-            </a:r>
-          </a:p>
-        </p:txBody>
-      </p:sp>
-      <p:pic>
-        <p:nvPicPr>
-          <p:cNvPr id="7" name="Picture 6" descr="fairness_by_group.png"/>
-          <p:cNvPicPr>
-            <a:picLocks noChangeAspect="1"/>
-          </p:cNvPicPr>
-          <p:nvPr/>
-        </p:nvPicPr>
-        <p:blipFill>
-          <a:blip r:embed="rId2"/>
-          <a:stretch>
-            <a:fillRect/>
-          </a:stretch>
-        </p:blipFill>
-        <p:spPr>
-          <a:xfrm>
-            <a:off x="457200" y="1267075"/>
-            <a:ext cx="6298387" cy="4781048"/>
-          </a:xfrm>
-          <a:prstGeom prst="rect">
-            <a:avLst/>
-          </a:prstGeom>
-        </p:spPr>
-      </p:pic>
-      <p:sp>
-        <p:nvSpPr>
-          <p:cNvPr id="8" name="TextBox 7"/>
-          <p:cNvSpPr txBox="1"/>
-          <p:nvPr/>
-        </p:nvSpPr>
-        <p:spPr>
-          <a:xfrm>
-            <a:off x="7121347" y="1234440"/>
-            <a:ext cx="4582972" cy="685800"/>
-          </a:xfrm>
-          <a:prstGeom prst="rect">
-            <a:avLst/>
-          </a:prstGeom>
-          <a:noFill/>
-        </p:spPr>
-        <p:txBody>
-          <a:bodyPr wrap="square" anchor="t" lIns="0" rIns="0" tIns="0" bIns="0">
-            <a:spAutoFit/>
-          </a:bodyPr>
-          <a:lstStyle/>
-          <a:p>
-            <a:pPr algn="l"/>
-            <a:r>
-              <a:rPr sz="4400" b="1" i="0">
-                <a:solidFill>
-                  <a:srgbClr val="40E0D0"/>
-                </a:solidFill>
-                <a:latin typeface="Geist Mono"/>
-              </a:rPr>
-              <a:t>0.73</a:t>
-            </a:r>
-          </a:p>
-        </p:txBody>
-      </p:sp>
-      <p:sp>
-        <p:nvSpPr>
-          <p:cNvPr id="9" name="TextBox 8"/>
-          <p:cNvSpPr txBox="1"/>
-          <p:nvPr/>
-        </p:nvSpPr>
-        <p:spPr>
-          <a:xfrm>
-            <a:off x="7121347" y="1965960"/>
-            <a:ext cx="4582972" cy="365760"/>
-          </a:xfrm>
-          <a:prstGeom prst="rect">
-            <a:avLst/>
-          </a:prstGeom>
-          <a:noFill/>
-        </p:spPr>
-        <p:txBody>
-          <a:bodyPr wrap="square" anchor="t" lIns="0" rIns="0" tIns="0" bIns="0">
-            <a:spAutoFit/>
-          </a:bodyPr>
-          <a:lstStyle/>
-          <a:p>
-            <a:pPr algn="l"/>
-            <a:r>
-              <a:rPr sz="1400" b="1" i="0">
-                <a:solidFill>
-                  <a:srgbClr val="14141C"/>
-                </a:solidFill>
-                <a:latin typeface="Geist Mono"/>
-              </a:rPr>
-              <a:t>test accuracy for estrogen-USERS</a:t>
-            </a:r>
-          </a:p>
-        </p:txBody>
-      </p:sp>
-      <p:sp>
-        <p:nvSpPr>
-          <p:cNvPr id="10" name="TextBox 9"/>
-          <p:cNvSpPr txBox="1"/>
-          <p:nvPr/>
-        </p:nvSpPr>
-        <p:spPr>
-          <a:xfrm>
-            <a:off x="7121347" y="2606040"/>
-            <a:ext cx="4582972" cy="685800"/>
-          </a:xfrm>
-          <a:prstGeom prst="rect">
-            <a:avLst/>
-          </a:prstGeom>
-          <a:noFill/>
-        </p:spPr>
-        <p:txBody>
-          <a:bodyPr wrap="square" anchor="t" lIns="0" rIns="0" tIns="0" bIns="0">
-            <a:spAutoFit/>
-          </a:bodyPr>
-          <a:lstStyle/>
-          <a:p>
-            <a:pPr algn="l"/>
-            <a:r>
-              <a:rPr sz="4400" b="1" i="0">
-                <a:solidFill>
-                  <a:srgbClr val="555560"/>
-                </a:solidFill>
-                <a:latin typeface="Geist Mono"/>
-              </a:rPr>
-              <a:t>0.65</a:t>
-            </a:r>
-          </a:p>
-        </p:txBody>
-      </p:sp>
-      <p:sp>
-        <p:nvSpPr>
-          <p:cNvPr id="11" name="TextBox 10"/>
-          <p:cNvSpPr txBox="1"/>
-          <p:nvPr/>
-        </p:nvSpPr>
-        <p:spPr>
-          <a:xfrm>
-            <a:off x="7121347" y="3337560"/>
-            <a:ext cx="4582972" cy="365760"/>
-          </a:xfrm>
-          <a:prstGeom prst="rect">
-            <a:avLst/>
-          </a:prstGeom>
-          <a:noFill/>
-        </p:spPr>
-        <p:txBody>
-          <a:bodyPr wrap="square" anchor="t" lIns="0" rIns="0" tIns="0" bIns="0">
-            <a:spAutoFit/>
-          </a:bodyPr>
-          <a:lstStyle/>
-          <a:p>
-            <a:pPr algn="l"/>
-            <a:r>
-              <a:rPr sz="1400" b="1" i="0">
-                <a:solidFill>
-                  <a:srgbClr val="14141C"/>
-                </a:solidFill>
-                <a:latin typeface="Geist Mono"/>
-              </a:rPr>
-              <a:t>test accuracy for NON-users</a:t>
-            </a:r>
-          </a:p>
-        </p:txBody>
-      </p:sp>
-      <p:sp>
-        <p:nvSpPr>
-          <p:cNvPr id="12" name="TextBox 11"/>
-          <p:cNvSpPr txBox="1"/>
-          <p:nvPr/>
-        </p:nvSpPr>
-        <p:spPr>
-          <a:xfrm>
-            <a:off x="7121347" y="4069080"/>
-            <a:ext cx="4582972" cy="1463040"/>
-          </a:xfrm>
-          <a:prstGeom prst="rect">
-            <a:avLst/>
-          </a:prstGeom>
-          <a:noFill/>
-        </p:spPr>
-        <p:txBody>
-          <a:bodyPr wrap="square" anchor="t" lIns="0" rIns="0" tIns="0" bIns="0">
-            <a:spAutoFit/>
-          </a:bodyPr>
-          <a:lstStyle/>
-          <a:p>
-            <a:pPr algn="l"/>
-            <a:r>
-              <a:rPr sz="1400" b="0" i="0">
-                <a:solidFill>
-                  <a:srgbClr val="14141C"/>
-                </a:solidFill>
-                <a:latin typeface="Geist"/>
-              </a:rPr>
-              <a:t>A tool that is reliably right for one group and shakier for another can quietly do harm if a clinic trusts it equally. Naming the gap out loud is the honest move.</a:t>
-            </a:r>
-          </a:p>
-        </p:txBody>
-      </p:sp>
-    </p:spTree>
-  </p:cSld>
-  <p:clrMapOvr>
-    <a:masterClrMapping/>
-  </p:clrMapOvr>
-</p:sld>
-</file>
-
-<file path=ppt/slides/slide14.xml><?xml version="1.0" encoding="utf-8"?>
 <p:sld xmlns:a="http://schemas.openxmlformats.org/drawingml/2006/main" xmlns:p="http://schemas.openxmlformats.org/presentationml/2006/main" xmlns:r="http://schemas.openxmlformats.org/officeDocument/2006/relationships">
   <p:cSld>
     <p:bg>
@@ -7054,7 +7783,7 @@
                 </a:solidFill>
                 <a:latin typeface="Geist Mono"/>
               </a:rPr>
-              <a:t>WHAT THE NUMBERS CAN’T CAPTURE</a:t>
+              <a:t>THE RESULTS</a:t>
             </a:r>
           </a:p>
         </p:txBody>
@@ -7273,7 +8002,356 @@
                 </a:solidFill>
                 <a:latin typeface="Geist Mono"/>
               </a:rPr>
-              <a:t>Does estrogen keep the mind sharp?</a:t>
+              <a:t>Does estrogen keep older women's minds sharp?</a:t>
+            </a:r>
+          </a:p>
+        </p:txBody>
+      </p:sp>
+    </p:spTree>
+  </p:cSld>
+  <p:clrMapOvr>
+    <a:masterClrMapping/>
+  </p:clrMapOvr>
+</p:sld>
+</file>
+
+<file path=ppt/slides/slide14.xml><?xml version="1.0" encoding="utf-8"?>
+<p:sld xmlns:a="http://schemas.openxmlformats.org/drawingml/2006/main" xmlns:p="http://schemas.openxmlformats.org/presentationml/2006/main" xmlns:r="http://schemas.openxmlformats.org/officeDocument/2006/relationships">
+  <p:cSld>
+    <p:spTree>
+      <p:nvGrpSpPr>
+        <p:cNvPr id="1" name=""/>
+        <p:cNvGrpSpPr/>
+        <p:nvPr/>
+      </p:nvGrpSpPr>
+      <p:grpSpPr/>
+      <p:sp>
+        <p:nvSpPr>
+          <p:cNvPr id="2" name="Rectangle 1"/>
+          <p:cNvSpPr/>
+          <p:nvPr/>
+        </p:nvSpPr>
+        <p:spPr>
+          <a:xfrm>
+            <a:off x="0" y="0"/>
+            <a:ext cx="12191695" cy="6858000"/>
+          </a:xfrm>
+          <a:prstGeom prst="rect">
+            <a:avLst/>
+          </a:prstGeom>
+          <a:solidFill>
+            <a:srgbClr val="F6F4EE"/>
+          </a:solidFill>
+          <a:ln>
+            <a:noFill/>
+          </a:ln>
+          <a:effectLst/>
+        </p:spPr>
+        <p:style>
+          <a:lnRef idx="1">
+            <a:schemeClr val="accent1"/>
+          </a:lnRef>
+          <a:fillRef idx="3">
+            <a:schemeClr val="accent1"/>
+          </a:fillRef>
+          <a:effectRef idx="2">
+            <a:schemeClr val="accent1"/>
+          </a:effectRef>
+          <a:fontRef idx="minor">
+            <a:schemeClr val="lt1"/>
+          </a:fontRef>
+        </p:style>
+        <p:txBody>
+          <a:bodyPr rtlCol="0" anchor="ctr"/>
+          <a:lstStyle/>
+          <a:p>
+            <a:pPr algn="ctr"/>
+          </a:p>
+        </p:txBody>
+      </p:sp>
+      <p:sp>
+        <p:nvSpPr>
+          <p:cNvPr id="3" name="Rectangle 2"/>
+          <p:cNvSpPr/>
+          <p:nvPr/>
+        </p:nvSpPr>
+        <p:spPr>
+          <a:xfrm>
+            <a:off x="0" y="0"/>
+            <a:ext cx="201168" cy="6858000"/>
+          </a:xfrm>
+          <a:prstGeom prst="rect">
+            <a:avLst/>
+          </a:prstGeom>
+          <a:solidFill>
+            <a:srgbClr val="8A2BE2"/>
+          </a:solidFill>
+          <a:ln>
+            <a:noFill/>
+          </a:ln>
+          <a:effectLst/>
+        </p:spPr>
+        <p:style>
+          <a:lnRef idx="1">
+            <a:schemeClr val="accent1"/>
+          </a:lnRef>
+          <a:fillRef idx="3">
+            <a:schemeClr val="accent1"/>
+          </a:fillRef>
+          <a:effectRef idx="2">
+            <a:schemeClr val="accent1"/>
+          </a:effectRef>
+          <a:fontRef idx="minor">
+            <a:schemeClr val="lt1"/>
+          </a:fontRef>
+        </p:style>
+        <p:txBody>
+          <a:bodyPr rtlCol="0" anchor="ctr"/>
+          <a:lstStyle/>
+          <a:p>
+            <a:pPr algn="ctr"/>
+          </a:p>
+        </p:txBody>
+      </p:sp>
+      <p:sp>
+        <p:nvSpPr>
+          <p:cNvPr id="4" name="TextBox 3"/>
+          <p:cNvSpPr txBox="1"/>
+          <p:nvPr/>
+        </p:nvSpPr>
+        <p:spPr>
+          <a:xfrm>
+            <a:off x="457200" y="274320"/>
+            <a:ext cx="11247120" cy="502920"/>
+          </a:xfrm>
+          <a:prstGeom prst="rect">
+            <a:avLst/>
+          </a:prstGeom>
+          <a:noFill/>
+        </p:spPr>
+        <p:txBody>
+          <a:bodyPr wrap="square" anchor="t" lIns="0" rIns="0" tIns="0" bIns="0">
+            <a:spAutoFit/>
+          </a:bodyPr>
+          <a:lstStyle/>
+          <a:p>
+            <a:pPr algn="l"/>
+            <a:r>
+              <a:rPr sz="2800" b="1" i="0">
+                <a:solidFill>
+                  <a:srgbClr val="14141C"/>
+                </a:solidFill>
+                <a:latin typeface="Geist Mono"/>
+              </a:rPr>
+              <a:t>The tempting headline</a:t>
+            </a:r>
+          </a:p>
+        </p:txBody>
+      </p:sp>
+      <p:sp>
+        <p:nvSpPr>
+          <p:cNvPr id="5" name="Rectangle 4"/>
+          <p:cNvSpPr/>
+          <p:nvPr/>
+        </p:nvSpPr>
+        <p:spPr>
+          <a:xfrm>
+            <a:off x="457200" y="868680"/>
+            <a:ext cx="11247120" cy="4572"/>
+          </a:xfrm>
+          <a:prstGeom prst="rect">
+            <a:avLst/>
+          </a:prstGeom>
+          <a:solidFill>
+            <a:srgbClr val="DDDDDD"/>
+          </a:solidFill>
+          <a:ln>
+            <a:noFill/>
+          </a:ln>
+          <a:effectLst/>
+        </p:spPr>
+        <p:style>
+          <a:lnRef idx="1">
+            <a:schemeClr val="accent1"/>
+          </a:lnRef>
+          <a:fillRef idx="3">
+            <a:schemeClr val="accent1"/>
+          </a:fillRef>
+          <a:effectRef idx="2">
+            <a:schemeClr val="accent1"/>
+          </a:effectRef>
+          <a:fontRef idx="minor">
+            <a:schemeClr val="lt1"/>
+          </a:fontRef>
+        </p:style>
+        <p:txBody>
+          <a:bodyPr rtlCol="0" anchor="ctr"/>
+          <a:lstStyle/>
+          <a:p>
+            <a:pPr algn="ctr"/>
+          </a:p>
+        </p:txBody>
+      </p:sp>
+      <p:sp>
+        <p:nvSpPr>
+          <p:cNvPr id="6" name="TextBox 5"/>
+          <p:cNvSpPr txBox="1"/>
+          <p:nvPr/>
+        </p:nvSpPr>
+        <p:spPr>
+          <a:xfrm>
+            <a:off x="457200" y="6510528"/>
+            <a:ext cx="11247120" cy="274320"/>
+          </a:xfrm>
+          <a:prstGeom prst="rect">
+            <a:avLst/>
+          </a:prstGeom>
+          <a:noFill/>
+        </p:spPr>
+        <p:txBody>
+          <a:bodyPr wrap="square" anchor="t" lIns="0" rIns="0" tIns="0" bIns="0">
+            <a:spAutoFit/>
+          </a:bodyPr>
+          <a:lstStyle/>
+          <a:p>
+            <a:pPr algn="l"/>
+            <a:r>
+              <a:rPr sz="900" b="0" i="0">
+                <a:solidFill>
+                  <a:srgbClr val="555560"/>
+                </a:solidFill>
+                <a:latin typeface="Geist Mono"/>
+              </a:rPr>
+              <a:t>Jinchi Wei  ·  Outset  ·  Does estrogen keep older women's minds sharp?  ·  2026-07-08</a:t>
+            </a:r>
+          </a:p>
+        </p:txBody>
+      </p:sp>
+      <p:pic>
+        <p:nvPicPr>
+          <p:cNvPr id="7" name="Picture 6" descr="raw_means.png"/>
+          <p:cNvPicPr>
+            <a:picLocks noChangeAspect="1"/>
+          </p:cNvPicPr>
+          <p:nvPr/>
+        </p:nvPicPr>
+        <p:blipFill>
+          <a:blip r:embed="rId2"/>
+          <a:stretch>
+            <a:fillRect/>
+          </a:stretch>
+        </p:blipFill>
+        <p:spPr>
+          <a:xfrm>
+            <a:off x="457200" y="1880859"/>
+            <a:ext cx="6298387" cy="3553481"/>
+          </a:xfrm>
+          <a:prstGeom prst="rect">
+            <a:avLst/>
+          </a:prstGeom>
+        </p:spPr>
+      </p:pic>
+      <p:sp>
+        <p:nvSpPr>
+          <p:cNvPr id="8" name="TextBox 7"/>
+          <p:cNvSpPr txBox="1"/>
+          <p:nvPr/>
+        </p:nvSpPr>
+        <p:spPr>
+          <a:xfrm>
+            <a:off x="7121347" y="1325880"/>
+            <a:ext cx="4582972" cy="1097280"/>
+          </a:xfrm>
+          <a:prstGeom prst="rect">
+            <a:avLst/>
+          </a:prstGeom>
+          <a:noFill/>
+        </p:spPr>
+        <p:txBody>
+          <a:bodyPr wrap="square" anchor="t" lIns="0" rIns="0" tIns="0" bIns="0">
+            <a:spAutoFit/>
+          </a:bodyPr>
+          <a:lstStyle/>
+          <a:p>
+            <a:pPr algn="l"/>
+            <a:r>
+              <a:rPr sz="7600" b="1" i="0">
+                <a:solidFill>
+                  <a:srgbClr val="40E0D0"/>
+                </a:solidFill>
+                <a:latin typeface="Geist Mono"/>
+              </a:rPr>
+              <a:t>+8.1</a:t>
+            </a:r>
+          </a:p>
+        </p:txBody>
+      </p:sp>
+      <p:sp>
+        <p:nvSpPr>
+          <p:cNvPr id="9" name="TextBox 8"/>
+          <p:cNvSpPr txBox="1"/>
+          <p:nvPr/>
+        </p:nvSpPr>
+        <p:spPr>
+          <a:xfrm>
+            <a:off x="7121347" y="2606040"/>
+            <a:ext cx="4582972" cy="457200"/>
+          </a:xfrm>
+          <a:prstGeom prst="rect">
+            <a:avLst/>
+          </a:prstGeom>
+          <a:noFill/>
+        </p:spPr>
+        <p:txBody>
+          <a:bodyPr wrap="square" anchor="t" lIns="0" rIns="0" tIns="0" bIns="0">
+            <a:spAutoFit/>
+          </a:bodyPr>
+          <a:lstStyle/>
+          <a:p>
+            <a:pPr algn="l"/>
+            <a:r>
+              <a:rPr sz="1500" b="1" i="0">
+                <a:solidFill>
+                  <a:srgbClr val="14141C"/>
+                </a:solidFill>
+                <a:latin typeface="Geist Mono"/>
+              </a:rPr>
+              <a:t>points -- the raw gap, users over non-users</a:t>
+            </a:r>
+          </a:p>
+        </p:txBody>
+      </p:sp>
+      <p:sp>
+        <p:nvSpPr>
+          <p:cNvPr id="10" name="TextBox 9"/>
+          <p:cNvSpPr txBox="1"/>
+          <p:nvPr/>
+        </p:nvSpPr>
+        <p:spPr>
+          <a:xfrm>
+            <a:off x="7121347" y="3200400"/>
+            <a:ext cx="4582972" cy="2011680"/>
+          </a:xfrm>
+          <a:prstGeom prst="rect">
+            <a:avLst/>
+          </a:prstGeom>
+          <a:noFill/>
+        </p:spPr>
+        <p:txBody>
+          <a:bodyPr wrap="square" anchor="t" lIns="0" rIns="0" tIns="0" bIns="0">
+            <a:spAutoFit/>
+          </a:bodyPr>
+          <a:lstStyle/>
+          <a:p>
+            <a:pPr algn="l"/>
+            <a:r>
+              <a:rPr sz="1500" b="0" i="0">
+                <a:solidFill>
+                  <a:srgbClr val="14141C"/>
+                </a:solidFill>
+                <a:latin typeface="Geist"/>
+              </a:rPr>
+              <a:t>51.8 versus 43.7. Taken at face value, the exciting headline writes itself: "estrogen users think better." It is the same clue the 1990s studies chased -- but we never checked whether the two groups were the same kind of people to begin with.</a:t>
             </a:r>
           </a:p>
         </p:txBody>
@@ -7414,7 +8492,7 @@
                 </a:solidFill>
                 <a:latin typeface="Geist Mono"/>
               </a:rPr>
-              <a:t>The tests say “fine”; she says “not fine”</a:t>
+              <a:t>Most of the gap was confounding</a:t>
             </a:r>
           </a:p>
         </p:txBody>
@@ -7493,14 +8571,14 @@
                 </a:solidFill>
                 <a:latin typeface="Geist Mono"/>
               </a:rPr>
-              <a:t>Jinchi Wei  ·  Outset  ·  Does estrogen keep the mind sharp?  ·  2026-07-08</a:t>
+              <a:t>Jinchi Wei  ·  Outset  ·  Does estrogen keep older women's minds sharp?  ·  2026-07-08</a:t>
             </a:r>
           </a:p>
         </p:txBody>
       </p:sp>
       <p:pic>
         <p:nvPicPr>
-          <p:cNvPr id="7" name="Picture 6" descr="intro_objective_vs_subjective.png"/>
+          <p:cNvPr id="7" name="Picture 6" descr="confounding.png"/>
           <p:cNvPicPr>
             <a:picLocks noChangeAspect="1"/>
           </p:cNvPicPr>
@@ -7514,8 +8592,8 @@
         </p:blipFill>
         <p:spPr>
           <a:xfrm>
-            <a:off x="457200" y="1457514"/>
-            <a:ext cx="6523329" cy="4400170"/>
+            <a:off x="5630875" y="1600283"/>
+            <a:ext cx="6073444" cy="4114632"/>
           </a:xfrm>
           <a:prstGeom prst="rect">
             <a:avLst/>
@@ -7524,89 +8602,71 @@
       </p:pic>
       <p:sp>
         <p:nvSpPr>
-          <p:cNvPr id="8" name="Rectangle 7"/>
-          <p:cNvSpPr/>
-          <p:nvPr/>
-        </p:nvSpPr>
-        <p:spPr>
-          <a:xfrm>
-            <a:off x="7346289" y="1097280"/>
-            <a:ext cx="4358030" cy="5074919"/>
-          </a:xfrm>
-          <a:prstGeom prst="rect">
-            <a:avLst/>
-          </a:prstGeom>
-          <a:solidFill>
-            <a:srgbClr val="FAFAFC"/>
-          </a:solidFill>
-          <a:ln>
-            <a:noFill/>
-          </a:ln>
-          <a:effectLst/>
-        </p:spPr>
-        <p:style>
-          <a:lnRef idx="1">
-            <a:schemeClr val="accent1"/>
-          </a:lnRef>
-          <a:fillRef idx="3">
-            <a:schemeClr val="accent1"/>
-          </a:fillRef>
-          <a:effectRef idx="2">
-            <a:schemeClr val="accent1"/>
-          </a:effectRef>
-          <a:fontRef idx="minor">
-            <a:schemeClr val="lt1"/>
-          </a:fontRef>
-        </p:style>
-        <p:txBody>
-          <a:bodyPr rtlCol="0" anchor="ctr"/>
-          <a:lstStyle/>
-          <a:p>
-            <a:pPr algn="ctr"/>
-          </a:p>
-        </p:txBody>
-      </p:sp>
-      <p:sp>
-        <p:nvSpPr>
-          <p:cNvPr id="9" name="Rectangle 8"/>
-          <p:cNvSpPr/>
-          <p:nvPr/>
-        </p:nvSpPr>
-        <p:spPr>
-          <a:xfrm>
-            <a:off x="7346289" y="1097280"/>
-            <a:ext cx="4358030" cy="91440"/>
-          </a:xfrm>
-          <a:prstGeom prst="rect">
-            <a:avLst/>
-          </a:prstGeom>
-          <a:solidFill>
-            <a:srgbClr val="8A2BE2"/>
-          </a:solidFill>
-          <a:ln>
-            <a:noFill/>
-          </a:ln>
-          <a:effectLst/>
-        </p:spPr>
-        <p:style>
-          <a:lnRef idx="1">
-            <a:schemeClr val="accent1"/>
-          </a:lnRef>
-          <a:fillRef idx="3">
-            <a:schemeClr val="accent1"/>
-          </a:fillRef>
-          <a:effectRef idx="2">
-            <a:schemeClr val="accent1"/>
-          </a:effectRef>
-          <a:fontRef idx="minor">
-            <a:schemeClr val="lt1"/>
-          </a:fontRef>
-        </p:style>
-        <p:txBody>
-          <a:bodyPr rtlCol="0" anchor="ctr"/>
-          <a:lstStyle/>
-          <a:p>
-            <a:pPr algn="ctr"/>
+          <p:cNvPr id="8" name="TextBox 7"/>
+          <p:cNvSpPr txBox="1"/>
+          <p:nvPr/>
+        </p:nvSpPr>
+        <p:spPr>
+          <a:xfrm>
+            <a:off x="457200" y="1371600"/>
+            <a:ext cx="4762195" cy="1280160"/>
+          </a:xfrm>
+          <a:prstGeom prst="rect">
+            <a:avLst/>
+          </a:prstGeom>
+          <a:noFill/>
+        </p:spPr>
+        <p:txBody>
+          <a:bodyPr wrap="square" anchor="t" lIns="0" rIns="0" tIns="0" bIns="0">
+            <a:spAutoFit/>
+          </a:bodyPr>
+          <a:lstStyle/>
+          <a:p>
+            <a:pPr algn="l"/>
+            <a:r>
+              <a:rPr sz="9200" b="1" i="0">
+                <a:solidFill>
+                  <a:srgbClr val="FF1493"/>
+                </a:solidFill>
+                <a:latin typeface="Geist Mono"/>
+              </a:rPr>
+              <a:t>67%</a:t>
+            </a:r>
+          </a:p>
+        </p:txBody>
+      </p:sp>
+      <p:sp>
+        <p:nvSpPr>
+          <p:cNvPr id="9" name="TextBox 8"/>
+          <p:cNvSpPr txBox="1"/>
+          <p:nvPr/>
+        </p:nvSpPr>
+        <p:spPr>
+          <a:xfrm>
+            <a:off x="457200" y="2743200"/>
+            <a:ext cx="4762195" cy="457200"/>
+          </a:xfrm>
+          <a:prstGeom prst="rect">
+            <a:avLst/>
+          </a:prstGeom>
+          <a:noFill/>
+        </p:spPr>
+        <p:txBody>
+          <a:bodyPr wrap="square" anchor="t" lIns="0" rIns="0" tIns="0" bIns="0">
+            <a:spAutoFit/>
+          </a:bodyPr>
+          <a:lstStyle/>
+          <a:p>
+            <a:pPr algn="l"/>
+            <a:r>
+              <a:rPr sz="1600" b="1" i="0">
+                <a:solidFill>
+                  <a:srgbClr val="14141C"/>
+                </a:solidFill>
+                <a:latin typeface="Geist Mono"/>
+              </a:rPr>
+              <a:t>of the apparent effect was confounding</a:t>
+            </a:r>
           </a:p>
         </p:txBody>
       </p:sp>
@@ -7618,8 +8678,8 @@
         </p:nvSpPr>
         <p:spPr>
           <a:xfrm>
-            <a:off x="7574889" y="1380744"/>
-            <a:ext cx="3900830" cy="292608"/>
+            <a:off x="457200" y="3337560"/>
+            <a:ext cx="4762195" cy="1828800"/>
           </a:xfrm>
           <a:prstGeom prst="rect">
             <a:avLst/>
@@ -7634,188 +8694,13 @@
           <a:p>
             <a:pPr algn="l"/>
             <a:r>
-              <a:rPr sz="1500" b="1" i="0">
-                <a:solidFill>
-                  <a:srgbClr val="8A2BE2"/>
-                </a:solidFill>
-                <a:latin typeface="Geist Mono"/>
-              </a:rPr>
-              <a:t>The mismatch</a:t>
-            </a:r>
-          </a:p>
-        </p:txBody>
-      </p:sp>
-      <p:sp>
-        <p:nvSpPr>
-          <p:cNvPr id="11" name="TextBox 10"/>
-          <p:cNvSpPr txBox="1"/>
-          <p:nvPr/>
-        </p:nvSpPr>
-        <p:spPr>
-          <a:xfrm>
-            <a:off x="7574889" y="1709928"/>
-            <a:ext cx="3900830" cy="960120"/>
-          </a:xfrm>
-          <a:prstGeom prst="rect">
-            <a:avLst/>
-          </a:prstGeom>
-          <a:noFill/>
-        </p:spPr>
-        <p:txBody>
-          <a:bodyPr wrap="square" anchor="t" lIns="0" rIns="0" tIns="0" bIns="0">
-            <a:spAutoFit/>
-          </a:bodyPr>
-          <a:lstStyle/>
-          <a:p>
-            <a:pPr algn="l"/>
-            <a:r>
-              <a:rPr sz="1300" b="0" i="0">
+              <a:rPr sz="1550" b="0" i="0">
                 <a:solidFill>
                   <a:srgbClr val="14141C"/>
                 </a:solidFill>
                 <a:latin typeface="Geist"/>
               </a:rPr>
-              <a:t>Many women report real, daily brain fog even when the objective test looks perfectly normal [7].</a:t>
-            </a:r>
-          </a:p>
-        </p:txBody>
-      </p:sp>
-      <p:sp>
-        <p:nvSpPr>
-          <p:cNvPr id="12" name="TextBox 11"/>
-          <p:cNvSpPr txBox="1"/>
-          <p:nvPr/>
-        </p:nvSpPr>
-        <p:spPr>
-          <a:xfrm>
-            <a:off x="7574889" y="2798064"/>
-            <a:ext cx="3900830" cy="292608"/>
-          </a:xfrm>
-          <a:prstGeom prst="rect">
-            <a:avLst/>
-          </a:prstGeom>
-          <a:noFill/>
-        </p:spPr>
-        <p:txBody>
-          <a:bodyPr wrap="square" anchor="t" lIns="0" rIns="0" tIns="0" bIns="0">
-            <a:spAutoFit/>
-          </a:bodyPr>
-          <a:lstStyle/>
-          <a:p>
-            <a:pPr algn="l"/>
-            <a:r>
-              <a:rPr sz="1500" b="1" i="0">
-                <a:solidFill>
-                  <a:srgbClr val="8A2BE2"/>
-                </a:solidFill>
-                <a:latin typeface="Geist Mono"/>
-              </a:rPr>
-              <a:t>Why it matters</a:t>
-            </a:r>
-          </a:p>
-        </p:txBody>
-      </p:sp>
-      <p:sp>
-        <p:nvSpPr>
-          <p:cNvPr id="13" name="TextBox 12"/>
-          <p:cNvSpPr txBox="1"/>
-          <p:nvPr/>
-        </p:nvSpPr>
-        <p:spPr>
-          <a:xfrm>
-            <a:off x="7574889" y="3127248"/>
-            <a:ext cx="3900830" cy="960120"/>
-          </a:xfrm>
-          <a:prstGeom prst="rect">
-            <a:avLst/>
-          </a:prstGeom>
-          <a:noFill/>
-        </p:spPr>
-        <p:txBody>
-          <a:bodyPr wrap="square" anchor="t" lIns="0" rIns="0" tIns="0" bIns="0">
-            <a:spAutoFit/>
-          </a:bodyPr>
-          <a:lstStyle/>
-          <a:p>
-            <a:pPr algn="l"/>
-            <a:r>
-              <a:rPr sz="1300" b="0" i="0">
-                <a:solidFill>
-                  <a:srgbClr val="14141C"/>
-                </a:solidFill>
-                <a:latin typeface="Geist"/>
-              </a:rPr>
-              <a:t>Women's symptoms are too often waved off as stress or emotion instead of investigated [8].</a:t>
-            </a:r>
-          </a:p>
-        </p:txBody>
-      </p:sp>
-      <p:sp>
-        <p:nvSpPr>
-          <p:cNvPr id="14" name="TextBox 13"/>
-          <p:cNvSpPr txBox="1"/>
-          <p:nvPr/>
-        </p:nvSpPr>
-        <p:spPr>
-          <a:xfrm>
-            <a:off x="7574889" y="4215384"/>
-            <a:ext cx="3900830" cy="292608"/>
-          </a:xfrm>
-          <a:prstGeom prst="rect">
-            <a:avLst/>
-          </a:prstGeom>
-          <a:noFill/>
-        </p:spPr>
-        <p:txBody>
-          <a:bodyPr wrap="square" anchor="t" lIns="0" rIns="0" tIns="0" bIns="0">
-            <a:spAutoFit/>
-          </a:bodyPr>
-          <a:lstStyle/>
-          <a:p>
-            <a:pPr algn="l"/>
-            <a:r>
-              <a:rPr sz="1500" b="1" i="0">
-                <a:solidFill>
-                  <a:srgbClr val="8A2BE2"/>
-                </a:solidFill>
-                <a:latin typeface="Geist Mono"/>
-              </a:rPr>
-              <a:t>Hold both ideas</a:t>
-            </a:r>
-          </a:p>
-        </p:txBody>
-      </p:sp>
-      <p:sp>
-        <p:nvSpPr>
-          <p:cNvPr id="15" name="TextBox 14"/>
-          <p:cNvSpPr txBox="1"/>
-          <p:nvPr/>
-        </p:nvSpPr>
-        <p:spPr>
-          <a:xfrm>
-            <a:off x="7574889" y="4544568"/>
-            <a:ext cx="3900830" cy="960120"/>
-          </a:xfrm>
-          <a:prstGeom prst="rect">
-            <a:avLst/>
-          </a:prstGeom>
-          <a:noFill/>
-        </p:spPr>
-        <p:txBody>
-          <a:bodyPr wrap="square" anchor="t" lIns="0" rIns="0" tIns="0" bIns="0">
-            <a:spAutoFit/>
-          </a:bodyPr>
-          <a:lstStyle/>
-          <a:p>
-            <a:pPr algn="l"/>
-            <a:r>
-              <a:rPr sz="1300" b="0" i="0">
-                <a:solidFill>
-                  <a:srgbClr val="14141C"/>
-                </a:solidFill>
-                <a:latin typeface="Geist"/>
-              </a:rPr>
-              <a:t>The confounding is real AND the patient's account is real evidence -- not noise to dismiss.</a:t>
+              <a:t>The crude effect (-0.33) shrank to just -0.11 once we adjusted for age, education, and income. That missing two-thirds was never the estrogen -- it was that users were healthier and better-off to start with.</a:t>
             </a:r>
           </a:p>
         </p:txBody>
@@ -7956,7 +8841,7 @@
                 </a:solidFill>
                 <a:latin typeface="Geist Mono"/>
               </a:rPr>
-              <a:t>A survey can hint; only an experiment proves</a:t>
+              <a:t>What actually predicts cognition</a:t>
             </a:r>
           </a:p>
         </p:txBody>
@@ -8035,96 +8920,67 @@
                 </a:solidFill>
                 <a:latin typeface="Geist Mono"/>
               </a:rPr>
-              <a:t>Jinchi Wei  ·  Outset  ·  Does estrogen keep the mind sharp?  ·  2026-07-08</a:t>
-            </a:r>
-          </a:p>
-        </p:txBody>
-      </p:sp>
-      <p:sp>
-        <p:nvSpPr>
-          <p:cNvPr id="7" name="Rectangle 6"/>
-          <p:cNvSpPr/>
-          <p:nvPr/>
-        </p:nvSpPr>
-        <p:spPr>
-          <a:xfrm>
-            <a:off x="457200" y="2423159"/>
-            <a:ext cx="3505200" cy="2468880"/>
-          </a:xfrm>
-          <a:prstGeom prst="rect">
-            <a:avLst/>
-          </a:prstGeom>
-          <a:solidFill>
-            <a:srgbClr val="FAFAFC"/>
-          </a:solidFill>
-          <a:ln>
-            <a:noFill/>
-          </a:ln>
-          <a:effectLst/>
-        </p:spPr>
-        <p:style>
-          <a:lnRef idx="1">
-            <a:schemeClr val="accent1"/>
-          </a:lnRef>
-          <a:fillRef idx="3">
-            <a:schemeClr val="accent1"/>
-          </a:fillRef>
-          <a:effectRef idx="2">
-            <a:schemeClr val="accent1"/>
-          </a:effectRef>
-          <a:fontRef idx="minor">
-            <a:schemeClr val="lt1"/>
-          </a:fontRef>
-        </p:style>
-        <p:txBody>
-          <a:bodyPr rtlCol="0" anchor="ctr"/>
-          <a:lstStyle/>
-          <a:p>
-            <a:pPr algn="ctr"/>
-          </a:p>
-        </p:txBody>
-      </p:sp>
-      <p:sp>
-        <p:nvSpPr>
-          <p:cNvPr id="8" name="Rectangle 7"/>
-          <p:cNvSpPr/>
-          <p:nvPr/>
-        </p:nvSpPr>
-        <p:spPr>
-          <a:xfrm>
-            <a:off x="457200" y="2423159"/>
-            <a:ext cx="3505200" cy="82296"/>
-          </a:xfrm>
-          <a:prstGeom prst="rect">
-            <a:avLst/>
-          </a:prstGeom>
-          <a:solidFill>
-            <a:srgbClr val="40E0D0"/>
-          </a:solidFill>
-          <a:ln>
-            <a:noFill/>
-          </a:ln>
-          <a:effectLst/>
-        </p:spPr>
-        <p:style>
-          <a:lnRef idx="1">
-            <a:schemeClr val="accent1"/>
-          </a:lnRef>
-          <a:fillRef idx="3">
-            <a:schemeClr val="accent1"/>
-          </a:fillRef>
-          <a:effectRef idx="2">
-            <a:schemeClr val="accent1"/>
-          </a:effectRef>
-          <a:fontRef idx="minor">
-            <a:schemeClr val="lt1"/>
-          </a:fontRef>
-        </p:style>
-        <p:txBody>
-          <a:bodyPr rtlCol="0" anchor="ctr"/>
-          <a:lstStyle/>
-          <a:p>
-            <a:pPr algn="ctr"/>
+              <a:t>Jinchi Wei  ·  Outset  ·  Does estrogen keep older women's minds sharp?  ·  2026-07-08</a:t>
+            </a:r>
+          </a:p>
+        </p:txBody>
+      </p:sp>
+      <p:pic>
+        <p:nvPicPr>
+          <p:cNvPr id="7" name="Picture 6" descr="feature_importance.png"/>
+          <p:cNvPicPr>
+            <a:picLocks noChangeAspect="1"/>
+          </p:cNvPicPr>
+          <p:nvPr/>
+        </p:nvPicPr>
+        <p:blipFill>
+          <a:blip r:embed="rId2"/>
+          <a:stretch>
+            <a:fillRect/>
+          </a:stretch>
+        </p:blipFill>
+        <p:spPr>
+          <a:xfrm>
+            <a:off x="457200" y="1831704"/>
+            <a:ext cx="6523329" cy="3651790"/>
+          </a:xfrm>
+          <a:prstGeom prst="rect">
+            <a:avLst/>
+          </a:prstGeom>
+        </p:spPr>
+      </p:pic>
+      <p:sp>
+        <p:nvSpPr>
+          <p:cNvPr id="8" name="TextBox 7"/>
+          <p:cNvSpPr txBox="1"/>
+          <p:nvPr/>
+        </p:nvSpPr>
+        <p:spPr>
+          <a:xfrm>
+            <a:off x="7346289" y="1143000"/>
+            <a:ext cx="4358030" cy="365760"/>
+          </a:xfrm>
+          <a:prstGeom prst="rect">
+            <a:avLst/>
+          </a:prstGeom>
+          <a:noFill/>
+        </p:spPr>
+        <p:txBody>
+          <a:bodyPr wrap="square" anchor="t" lIns="0" rIns="0" tIns="0" bIns="0">
+            <a:spAutoFit/>
+          </a:bodyPr>
+          <a:lstStyle/>
+          <a:p>
+            <a:pPr algn="l"/>
+            <a:r>
+              <a:rPr sz="1400" b="1" i="0">
+                <a:solidFill>
+                  <a:srgbClr val="F0C840"/>
+                </a:solidFill>
+                <a:latin typeface="Geist Mono"/>
+              </a:rPr>
+              <a:t>FROM THE SAME MODEL</a:t>
+            </a:r>
           </a:p>
         </p:txBody>
       </p:sp>
@@ -8136,8 +8992,8 @@
         </p:nvSpPr>
         <p:spPr>
           <a:xfrm>
-            <a:off x="694944" y="2642615"/>
-            <a:ext cx="3029712" cy="365760"/>
+            <a:off x="7346289" y="1645920"/>
+            <a:ext cx="2179015" cy="384048"/>
           </a:xfrm>
           <a:prstGeom prst="rect">
             <a:avLst/>
@@ -8152,13 +9008,13 @@
           <a:p>
             <a:pPr algn="l"/>
             <a:r>
-              <a:rPr sz="1500" b="1" i="0">
-                <a:solidFill>
-                  <a:srgbClr val="0C7A6A"/>
+              <a:rPr sz="1700" b="1" i="0">
+                <a:solidFill>
+                  <a:srgbClr val="40E0D0"/>
                 </a:solidFill>
                 <a:latin typeface="Geist Mono"/>
               </a:rPr>
-              <a:t>WHAT IT CAN DO</a:t>
+              <a:t>education</a:t>
             </a:r>
           </a:p>
         </p:txBody>
@@ -8171,8 +9027,43 @@
         </p:nvSpPr>
         <p:spPr>
           <a:xfrm>
-            <a:off x="694944" y="3191255"/>
-            <a:ext cx="3029712" cy="1572768"/>
+            <a:off x="9525304" y="1645920"/>
+            <a:ext cx="2179015" cy="384048"/>
+          </a:xfrm>
+          <a:prstGeom prst="rect">
+            <a:avLst/>
+          </a:prstGeom>
+          <a:noFill/>
+        </p:spPr>
+        <p:txBody>
+          <a:bodyPr wrap="square" anchor="ctr" lIns="0" rIns="0" tIns="0" bIns="0">
+            <a:spAutoFit/>
+          </a:bodyPr>
+          <a:lstStyle/>
+          <a:p>
+            <a:pPr algn="l"/>
+            <a:r>
+              <a:rPr sz="1350" b="0" i="0">
+                <a:solidFill>
+                  <a:srgbClr val="14141C"/>
+                </a:solidFill>
+                <a:latin typeface="Geist"/>
+              </a:rPr>
+              <a:t>the biggest driver</a:t>
+            </a:r>
+          </a:p>
+        </p:txBody>
+      </p:sp>
+      <p:sp>
+        <p:nvSpPr>
+          <p:cNvPr id="11" name="TextBox 10"/>
+          <p:cNvSpPr txBox="1"/>
+          <p:nvPr/>
+        </p:nvSpPr>
+        <p:spPr>
+          <a:xfrm>
+            <a:off x="7346289" y="2212848"/>
+            <a:ext cx="2179015" cy="384048"/>
           </a:xfrm>
           <a:prstGeom prst="rect">
             <a:avLst/>
@@ -8187,102 +9078,49 @@
           <a:p>
             <a:pPr algn="l"/>
             <a:r>
-              <a:rPr sz="1400" b="0" i="0">
+              <a:rPr sz="1700" b="1" i="0">
+                <a:solidFill>
+                  <a:srgbClr val="40E0D0"/>
+                </a:solidFill>
+                <a:latin typeface="Geist Mono"/>
+              </a:rPr>
+              <a:t>age</a:t>
+            </a:r>
+          </a:p>
+        </p:txBody>
+      </p:sp>
+      <p:sp>
+        <p:nvSpPr>
+          <p:cNvPr id="12" name="TextBox 11"/>
+          <p:cNvSpPr txBox="1"/>
+          <p:nvPr/>
+        </p:nvSpPr>
+        <p:spPr>
+          <a:xfrm>
+            <a:off x="9525304" y="2212848"/>
+            <a:ext cx="2179015" cy="384048"/>
+          </a:xfrm>
+          <a:prstGeom prst="rect">
+            <a:avLst/>
+          </a:prstGeom>
+          <a:noFill/>
+        </p:spPr>
+        <p:txBody>
+          <a:bodyPr wrap="square" anchor="ctr" lIns="0" rIns="0" tIns="0" bIns="0">
+            <a:spAutoFit/>
+          </a:bodyPr>
+          <a:lstStyle/>
+          <a:p>
+            <a:pPr algn="l"/>
+            <a:r>
+              <a:rPr sz="1350" b="0" i="0">
                 <a:solidFill>
                   <a:srgbClr val="14141C"/>
                 </a:solidFill>
                 <a:latin typeface="Geist"/>
               </a:rPr>
-              <a:t>Show that a tempting headline is mostly a mirage, and that adjusting for background shrinks the apparent estrogen effect by about 67%.</a:t>
-            </a:r>
-          </a:p>
-        </p:txBody>
-      </p:sp>
-      <p:sp>
-        <p:nvSpPr>
-          <p:cNvPr id="11" name="Rectangle 10"/>
-          <p:cNvSpPr/>
-          <p:nvPr/>
-        </p:nvSpPr>
-        <p:spPr>
-          <a:xfrm>
-            <a:off x="4328160" y="2423159"/>
-            <a:ext cx="3505200" cy="2468880"/>
-          </a:xfrm>
-          <a:prstGeom prst="rect">
-            <a:avLst/>
-          </a:prstGeom>
-          <a:solidFill>
-            <a:srgbClr val="FAFAFC"/>
-          </a:solidFill>
-          <a:ln>
-            <a:noFill/>
-          </a:ln>
-          <a:effectLst/>
-        </p:spPr>
-        <p:style>
-          <a:lnRef idx="1">
-            <a:schemeClr val="accent1"/>
-          </a:lnRef>
-          <a:fillRef idx="3">
-            <a:schemeClr val="accent1"/>
-          </a:fillRef>
-          <a:effectRef idx="2">
-            <a:schemeClr val="accent1"/>
-          </a:effectRef>
-          <a:fontRef idx="minor">
-            <a:schemeClr val="lt1"/>
-          </a:fontRef>
-        </p:style>
-        <p:txBody>
-          <a:bodyPr rtlCol="0" anchor="ctr"/>
-          <a:lstStyle/>
-          <a:p>
-            <a:pPr algn="ctr"/>
-          </a:p>
-        </p:txBody>
-      </p:sp>
-      <p:sp>
-        <p:nvSpPr>
-          <p:cNvPr id="12" name="Rectangle 11"/>
-          <p:cNvSpPr/>
-          <p:nvPr/>
-        </p:nvSpPr>
-        <p:spPr>
-          <a:xfrm>
-            <a:off x="4328160" y="2423159"/>
-            <a:ext cx="3505200" cy="82296"/>
-          </a:xfrm>
-          <a:prstGeom prst="rect">
-            <a:avLst/>
-          </a:prstGeom>
-          <a:solidFill>
-            <a:srgbClr val="FF1493"/>
-          </a:solidFill>
-          <a:ln>
-            <a:noFill/>
-          </a:ln>
-          <a:effectLst/>
-        </p:spPr>
-        <p:style>
-          <a:lnRef idx="1">
-            <a:schemeClr val="accent1"/>
-          </a:lnRef>
-          <a:fillRef idx="3">
-            <a:schemeClr val="accent1"/>
-          </a:fillRef>
-          <a:effectRef idx="2">
-            <a:schemeClr val="accent1"/>
-          </a:effectRef>
-          <a:fontRef idx="minor">
-            <a:schemeClr val="lt1"/>
-          </a:fontRef>
-        </p:style>
-        <p:txBody>
-          <a:bodyPr rtlCol="0" anchor="ctr"/>
-          <a:lstStyle/>
-          <a:p>
-            <a:pPr algn="ctr"/>
+              <a:t>close behind</a:t>
+            </a:r>
           </a:p>
         </p:txBody>
       </p:sp>
@@ -8294,8 +9132,8 @@
         </p:nvSpPr>
         <p:spPr>
           <a:xfrm>
-            <a:off x="4565904" y="2642615"/>
-            <a:ext cx="3029712" cy="365760"/>
+            <a:off x="7346289" y="2779776"/>
+            <a:ext cx="2179015" cy="384048"/>
           </a:xfrm>
           <a:prstGeom prst="rect">
             <a:avLst/>
@@ -8310,13 +9148,13 @@
           <a:p>
             <a:pPr algn="l"/>
             <a:r>
-              <a:rPr sz="1500" b="1" i="0">
-                <a:solidFill>
-                  <a:srgbClr val="FF1493"/>
+              <a:rPr sz="1700" b="1" i="0">
+                <a:solidFill>
+                  <a:srgbClr val="40E0D0"/>
                 </a:solidFill>
                 <a:latin typeface="Geist Mono"/>
               </a:rPr>
-              <a:t>WHAT IT CANNOT DO</a:t>
+              <a:t>income</a:t>
             </a:r>
           </a:p>
         </p:txBody>
@@ -8329,8 +9167,43 @@
         </p:nvSpPr>
         <p:spPr>
           <a:xfrm>
-            <a:off x="4565904" y="3191255"/>
-            <a:ext cx="3029712" cy="1572768"/>
+            <a:off x="9525304" y="2779776"/>
+            <a:ext cx="2179015" cy="384048"/>
+          </a:xfrm>
+          <a:prstGeom prst="rect">
+            <a:avLst/>
+          </a:prstGeom>
+          <a:noFill/>
+        </p:spPr>
+        <p:txBody>
+          <a:bodyPr wrap="square" anchor="ctr" lIns="0" rIns="0" tIns="0" bIns="0">
+            <a:spAutoFit/>
+          </a:bodyPr>
+          <a:lstStyle/>
+          <a:p>
+            <a:pPr algn="l"/>
+            <a:r>
+              <a:rPr sz="1350" b="0" i="0">
+                <a:solidFill>
+                  <a:srgbClr val="14141C"/>
+                </a:solidFill>
+                <a:latin typeface="Geist"/>
+              </a:rPr>
+              <a:t>still matters</a:t>
+            </a:r>
+          </a:p>
+        </p:txBody>
+      </p:sp>
+      <p:sp>
+        <p:nvSpPr>
+          <p:cNvPr id="15" name="TextBox 14"/>
+          <p:cNvSpPr txBox="1"/>
+          <p:nvPr/>
+        </p:nvSpPr>
+        <p:spPr>
+          <a:xfrm>
+            <a:off x="7346289" y="3346704"/>
+            <a:ext cx="2179015" cy="384048"/>
           </a:xfrm>
           <a:prstGeom prst="rect">
             <a:avLst/>
@@ -8345,102 +9218,49 @@
           <a:p>
             <a:pPr algn="l"/>
             <a:r>
-              <a:rPr sz="1400" b="0" i="0">
+              <a:rPr sz="1700" b="1" i="0">
+                <a:solidFill>
+                  <a:srgbClr val="FF1493"/>
+                </a:solidFill>
+                <a:latin typeface="Geist Mono"/>
+              </a:rPr>
+              <a:t>estrogen</a:t>
+            </a:r>
+          </a:p>
+        </p:txBody>
+      </p:sp>
+      <p:sp>
+        <p:nvSpPr>
+          <p:cNvPr id="16" name="TextBox 15"/>
+          <p:cNvSpPr txBox="1"/>
+          <p:nvPr/>
+        </p:nvSpPr>
+        <p:spPr>
+          <a:xfrm>
+            <a:off x="9525304" y="3346704"/>
+            <a:ext cx="2179015" cy="384048"/>
+          </a:xfrm>
+          <a:prstGeom prst="rect">
+            <a:avLst/>
+          </a:prstGeom>
+          <a:noFill/>
+        </p:spPr>
+        <p:txBody>
+          <a:bodyPr wrap="square" anchor="ctr" lIns="0" rIns="0" tIns="0" bIns="0">
+            <a:spAutoFit/>
+          </a:bodyPr>
+          <a:lstStyle/>
+          <a:p>
+            <a:pPr algn="l"/>
+            <a:r>
+              <a:rPr sz="1350" b="0" i="0">
                 <a:solidFill>
                   <a:srgbClr val="14141C"/>
                 </a:solidFill>
                 <a:latin typeface="Geist"/>
               </a:rPr>
-              <a:t>Prove cause. We can only correct for the confounders we actually measured and thought of -- something unrecorded could still be doing the work.</a:t>
-            </a:r>
-          </a:p>
-        </p:txBody>
-      </p:sp>
-      <p:sp>
-        <p:nvSpPr>
-          <p:cNvPr id="15" name="Rectangle 14"/>
-          <p:cNvSpPr/>
-          <p:nvPr/>
-        </p:nvSpPr>
-        <p:spPr>
-          <a:xfrm>
-            <a:off x="8199120" y="2423159"/>
-            <a:ext cx="3505200" cy="2468880"/>
-          </a:xfrm>
-          <a:prstGeom prst="rect">
-            <a:avLst/>
-          </a:prstGeom>
-          <a:solidFill>
-            <a:srgbClr val="FAFAFC"/>
-          </a:solidFill>
-          <a:ln>
-            <a:noFill/>
-          </a:ln>
-          <a:effectLst/>
-        </p:spPr>
-        <p:style>
-          <a:lnRef idx="1">
-            <a:schemeClr val="accent1"/>
-          </a:lnRef>
-          <a:fillRef idx="3">
-            <a:schemeClr val="accent1"/>
-          </a:fillRef>
-          <a:effectRef idx="2">
-            <a:schemeClr val="accent1"/>
-          </a:effectRef>
-          <a:fontRef idx="minor">
-            <a:schemeClr val="lt1"/>
-          </a:fontRef>
-        </p:style>
-        <p:txBody>
-          <a:bodyPr rtlCol="0" anchor="ctr"/>
-          <a:lstStyle/>
-          <a:p>
-            <a:pPr algn="ctr"/>
-          </a:p>
-        </p:txBody>
-      </p:sp>
-      <p:sp>
-        <p:nvSpPr>
-          <p:cNvPr id="16" name="Rectangle 15"/>
-          <p:cNvSpPr/>
-          <p:nvPr/>
-        </p:nvSpPr>
-        <p:spPr>
-          <a:xfrm>
-            <a:off x="8199120" y="2423159"/>
-            <a:ext cx="3505200" cy="82296"/>
-          </a:xfrm>
-          <a:prstGeom prst="rect">
-            <a:avLst/>
-          </a:prstGeom>
-          <a:solidFill>
-            <a:srgbClr val="F0C840"/>
-          </a:solidFill>
-          <a:ln>
-            <a:noFill/>
-          </a:ln>
-          <a:effectLst/>
-        </p:spPr>
-        <p:style>
-          <a:lnRef idx="1">
-            <a:schemeClr val="accent1"/>
-          </a:lnRef>
-          <a:fillRef idx="3">
-            <a:schemeClr val="accent1"/>
-          </a:fillRef>
-          <a:effectRef idx="2">
-            <a:schemeClr val="accent1"/>
-          </a:effectRef>
-          <a:fontRef idx="minor">
-            <a:schemeClr val="lt1"/>
-          </a:fontRef>
-        </p:style>
-        <p:txBody>
-          <a:bodyPr rtlCol="0" anchor="ctr"/>
-          <a:lstStyle/>
-          <a:p>
-            <a:pPr algn="ctr"/>
+              <a:t>the smallest bar</a:t>
+            </a:r>
           </a:p>
         </p:txBody>
       </p:sp>
@@ -8452,8 +9272,8 @@
         </p:nvSpPr>
         <p:spPr>
           <a:xfrm>
-            <a:off x="8436864" y="2642615"/>
-            <a:ext cx="3029712" cy="365760"/>
+            <a:off x="7346289" y="4050792"/>
+            <a:ext cx="4358030" cy="1463040"/>
           </a:xfrm>
           <a:prstGeom prst="rect">
             <a:avLst/>
@@ -8468,48 +9288,13 @@
           <a:p>
             <a:pPr algn="l"/>
             <a:r>
-              <a:rPr sz="1500" b="1" i="0">
-                <a:solidFill>
-                  <a:srgbClr val="8A6D00"/>
-                </a:solidFill>
-                <a:latin typeface="Geist Mono"/>
-              </a:rPr>
-              <a:t>WHAT SETTLES IT</a:t>
-            </a:r>
-          </a:p>
-        </p:txBody>
-      </p:sp>
-      <p:sp>
-        <p:nvSpPr>
-          <p:cNvPr id="18" name="TextBox 17"/>
-          <p:cNvSpPr txBox="1"/>
-          <p:nvPr/>
-        </p:nvSpPr>
-        <p:spPr>
-          <a:xfrm>
-            <a:off x="8436864" y="3191255"/>
-            <a:ext cx="3029712" cy="1572768"/>
-          </a:xfrm>
-          <a:prstGeom prst="rect">
-            <a:avLst/>
-          </a:prstGeom>
-          <a:noFill/>
-        </p:spPr>
-        <p:txBody>
-          <a:bodyPr wrap="square" anchor="t" lIns="0" rIns="0" tIns="0" bIns="0">
-            <a:spAutoFit/>
-          </a:bodyPr>
-          <a:lstStyle/>
-          <a:p>
-            <a:pPr algn="l"/>
-            <a:r>
-              <a:rPr sz="1400" b="0" i="0">
+              <a:rPr sz="1500" b="0" i="1">
                 <a:solidFill>
                   <a:srgbClr val="14141C"/>
                 </a:solidFill>
                 <a:latin typeface="Geist"/>
               </a:rPr>
-              <a:t>A randomized trial: a coin flip, not the patient, assigns the drug, so the two groups start out identical. That is why WHIMS could overturn 20 years of headlines.</a:t>
+              <a:t>Feature importance is free from an interpretable model: it is the standardized coefficients. Prediction and causation agree, and neither points at the pill.</a:t>
             </a:r>
           </a:p>
         </p:txBody>
@@ -8650,7 +9435,7 @@
                 </a:solidFill>
                 <a:latin typeface="Geist Mono"/>
               </a:rPr>
-              <a:t>References</a:t>
+              <a:t>Can it even predict?</a:t>
             </a:r>
           </a:p>
         </p:txBody>
@@ -8729,7 +9514,7 @@
                 </a:solidFill>
                 <a:latin typeface="Geist Mono"/>
               </a:rPr>
-              <a:t>Jinchi Wei  ·  Outset  ·  Does estrogen keep the mind sharp?  ·  2026-07-08</a:t>
+              <a:t>Jinchi Wei  ·  Outset  ·  Does estrogen keep older women's minds sharp?  ·  2026-07-08</a:t>
             </a:r>
           </a:p>
         </p:txBody>
@@ -8742,8 +9527,8 @@
         </p:nvSpPr>
         <p:spPr>
           <a:xfrm>
-            <a:off x="457200" y="1188720"/>
-            <a:ext cx="5440680" cy="914400"/>
+            <a:off x="457200" y="1371600"/>
+            <a:ext cx="5623560" cy="2011680"/>
           </a:xfrm>
           <a:prstGeom prst="rect">
             <a:avLst/>
@@ -8758,13 +9543,13 @@
           <a:p>
             <a:pPr algn="l"/>
             <a:r>
-              <a:rPr sz="1300" b="0" i="0">
-                <a:solidFill>
-                  <a:srgbClr val="14141C"/>
-                </a:solidFill>
-                <a:latin typeface="Geist"/>
-              </a:rPr>
-              <a:t>[1] Tang et al. 1996, Lancet -- observational; estrogen users got Alzheimer's less/later.</a:t>
+              <a:rPr sz="15000" b="1" i="0">
+                <a:solidFill>
+                  <a:srgbClr val="40E0D0"/>
+                </a:solidFill>
+                <a:latin typeface="Geist Mono"/>
+              </a:rPr>
+              <a:t>0.78</a:t>
             </a:r>
           </a:p>
         </p:txBody>
@@ -8777,8 +9562,8 @@
         </p:nvSpPr>
         <p:spPr>
           <a:xfrm>
-            <a:off x="457200" y="2240280"/>
-            <a:ext cx="5440680" cy="914400"/>
+            <a:off x="6305702" y="1554480"/>
+            <a:ext cx="5398617" cy="548640"/>
           </a:xfrm>
           <a:prstGeom prst="rect">
             <a:avLst/>
@@ -8793,13 +9578,13 @@
           <a:p>
             <a:pPr algn="l"/>
             <a:r>
-              <a:rPr sz="1300" b="0" i="0">
+              <a:rPr sz="2600" b="1" i="0">
                 <a:solidFill>
                   <a:srgbClr val="14141C"/>
                 </a:solidFill>
-                <a:latin typeface="Geist"/>
-              </a:rPr>
-              <a:t>[2] Zandi et al. 2002, JAMA (Cache County) -- observational; long-term users lower risk.</a:t>
+                <a:latin typeface="Geist Mono"/>
+              </a:rPr>
+              <a:t>predictive AUC</a:t>
             </a:r>
           </a:p>
         </p:txBody>
@@ -8812,8 +9597,8 @@
         </p:nvSpPr>
         <p:spPr>
           <a:xfrm>
-            <a:off x="457200" y="3291839"/>
-            <a:ext cx="5440680" cy="914400"/>
+            <a:off x="6305702" y="2194560"/>
+            <a:ext cx="5398617" cy="1371600"/>
           </a:xfrm>
           <a:prstGeom prst="rect">
             <a:avLst/>
@@ -8828,49 +9613,58 @@
           <a:p>
             <a:pPr algn="l"/>
             <a:r>
-              <a:rPr sz="1300" b="0" i="0">
+              <a:rPr sz="1600" b="0" i="0">
                 <a:solidFill>
                   <a:srgbClr val="14141C"/>
                 </a:solidFill>
                 <a:latin typeface="Geist"/>
               </a:rPr>
-              <a:t>[3] Shumaker et al. 2003, JAMA -- WHIMS RCT; hormones DOUBLED dementia risk in 65+.</a:t>
-            </a:r>
-          </a:p>
-        </p:txBody>
-      </p:sp>
-      <p:sp>
-        <p:nvSpPr>
-          <p:cNvPr id="10" name="TextBox 9"/>
-          <p:cNvSpPr txBox="1"/>
-          <p:nvPr/>
-        </p:nvSpPr>
-        <p:spPr>
-          <a:xfrm>
-            <a:off x="457200" y="4343400"/>
-            <a:ext cx="5440680" cy="914400"/>
-          </a:xfrm>
-          <a:prstGeom prst="rect">
-            <a:avLst/>
-          </a:prstGeom>
-          <a:noFill/>
-        </p:spPr>
-        <p:txBody>
-          <a:bodyPr wrap="square" anchor="t" lIns="0" rIns="0" tIns="0" bIns="0">
-            <a:spAutoFit/>
-          </a:bodyPr>
-          <a:lstStyle/>
-          <a:p>
-            <a:pPr algn="l"/>
-            <a:r>
-              <a:rPr sz="1300" b="0" i="0">
-                <a:solidFill>
-                  <a:srgbClr val="14141C"/>
-                </a:solidFill>
-                <a:latin typeface="Geist"/>
-              </a:rPr>
-              <a:t>[4] Rapp et al. 2003, JAMA -- WHIMS RCT; no cognitive benefit, scores trended worse.</a:t>
-            </a:r>
+              <a:t>5-fold cross-validation. 0.5 would be a coin flip, so 0.78 is a real signal -- but it is driven by age and education, not estrogen.</a:t>
+            </a:r>
+          </a:p>
+        </p:txBody>
+      </p:sp>
+      <p:sp>
+        <p:nvSpPr>
+          <p:cNvPr id="10" name="Rectangle 9"/>
+          <p:cNvSpPr/>
+          <p:nvPr/>
+        </p:nvSpPr>
+        <p:spPr>
+          <a:xfrm>
+            <a:off x="457200" y="5257800"/>
+            <a:ext cx="11247120" cy="822960"/>
+          </a:xfrm>
+          <a:prstGeom prst="rect">
+            <a:avLst/>
+          </a:prstGeom>
+          <a:solidFill>
+            <a:srgbClr val="FAFAFC"/>
+          </a:solidFill>
+          <a:ln>
+            <a:noFill/>
+          </a:ln>
+          <a:effectLst/>
+        </p:spPr>
+        <p:style>
+          <a:lnRef idx="1">
+            <a:schemeClr val="accent1"/>
+          </a:lnRef>
+          <a:fillRef idx="3">
+            <a:schemeClr val="accent1"/>
+          </a:fillRef>
+          <a:effectRef idx="2">
+            <a:schemeClr val="accent1"/>
+          </a:effectRef>
+          <a:fontRef idx="minor">
+            <a:schemeClr val="lt1"/>
+          </a:fontRef>
+        </p:style>
+        <p:txBody>
+          <a:bodyPr rtlCol="0" anchor="ctr"/>
+          <a:lstStyle/>
+          <a:p>
+            <a:pPr algn="ctr"/>
           </a:p>
         </p:txBody>
       </p:sp>
@@ -8882,8 +9676,8 @@
         </p:nvSpPr>
         <p:spPr>
           <a:xfrm>
-            <a:off x="6263640" y="1188720"/>
-            <a:ext cx="5440680" cy="914400"/>
+            <a:off x="777240" y="5257800"/>
+            <a:ext cx="10607040" cy="822960"/>
           </a:xfrm>
           <a:prstGeom prst="rect">
             <a:avLst/>
@@ -8891,125 +9685,20 @@
           <a:noFill/>
         </p:spPr>
         <p:txBody>
-          <a:bodyPr wrap="square" anchor="t" lIns="0" rIns="0" tIns="0" bIns="0">
+          <a:bodyPr wrap="square" anchor="ctr" lIns="0" rIns="0" tIns="0" bIns="0">
             <a:spAutoFit/>
           </a:bodyPr>
           <a:lstStyle/>
           <a:p>
             <a:pPr algn="l"/>
             <a:r>
-              <a:rPr sz="1300" b="0" i="0">
-                <a:solidFill>
-                  <a:srgbClr val="14141C"/>
+              <a:rPr sz="1500" b="0" i="1">
+                <a:solidFill>
+                  <a:srgbClr val="8A2BE2"/>
                 </a:solidFill>
                 <a:latin typeface="Geist"/>
               </a:rPr>
-              <a:t>[5] Wharton et al. 2009, Maturitas -- healthy-user bias; users start out healthier.</a:t>
-            </a:r>
-          </a:p>
-        </p:txBody>
-      </p:sp>
-      <p:sp>
-        <p:nvSpPr>
-          <p:cNvPr id="12" name="TextBox 11"/>
-          <p:cNvSpPr txBox="1"/>
-          <p:nvPr/>
-        </p:nvSpPr>
-        <p:spPr>
-          <a:xfrm>
-            <a:off x="6263640" y="2240280"/>
-            <a:ext cx="5440680" cy="914400"/>
-          </a:xfrm>
-          <a:prstGeom prst="rect">
-            <a:avLst/>
-          </a:prstGeom>
-          <a:noFill/>
-        </p:spPr>
-        <p:txBody>
-          <a:bodyPr wrap="square" anchor="t" lIns="0" rIns="0" tIns="0" bIns="0">
-            <a:spAutoFit/>
-          </a:bodyPr>
-          <a:lstStyle/>
-          <a:p>
-            <a:pPr algn="l"/>
-            <a:r>
-              <a:rPr sz="1300" b="0" i="0">
-                <a:solidFill>
-                  <a:srgbClr val="14141C"/>
-                </a:solidFill>
-                <a:latin typeface="Geist"/>
-              </a:rPr>
-              <a:t>[6] Vandenbroucke 2009, Lancet -- why observational studies and RCTs disagreed.</a:t>
-            </a:r>
-          </a:p>
-        </p:txBody>
-      </p:sp>
-      <p:sp>
-        <p:nvSpPr>
-          <p:cNvPr id="13" name="TextBox 12"/>
-          <p:cNvSpPr txBox="1"/>
-          <p:nvPr/>
-        </p:nvSpPr>
-        <p:spPr>
-          <a:xfrm>
-            <a:off x="6263640" y="3291839"/>
-            <a:ext cx="5440680" cy="914400"/>
-          </a:xfrm>
-          <a:prstGeom prst="rect">
-            <a:avLst/>
-          </a:prstGeom>
-          <a:noFill/>
-        </p:spPr>
-        <p:txBody>
-          <a:bodyPr wrap="square" anchor="t" lIns="0" rIns="0" tIns="0" bIns="0">
-            <a:spAutoFit/>
-          </a:bodyPr>
-          <a:lstStyle/>
-          <a:p>
-            <a:pPr algn="l"/>
-            <a:r>
-              <a:rPr sz="1300" b="0" i="0">
-                <a:solidFill>
-                  <a:srgbClr val="14141C"/>
-                </a:solidFill>
-                <a:latin typeface="Geist"/>
-              </a:rPr>
-              <a:t>[7] Maki 2024, Harvard Health -- menopause 'brain fog' vs. normal test scores.</a:t>
-            </a:r>
-          </a:p>
-        </p:txBody>
-      </p:sp>
-      <p:sp>
-        <p:nvSpPr>
-          <p:cNvPr id="14" name="TextBox 13"/>
-          <p:cNvSpPr txBox="1"/>
-          <p:nvPr/>
-        </p:nvSpPr>
-        <p:spPr>
-          <a:xfrm>
-            <a:off x="6263640" y="4343400"/>
-            <a:ext cx="5440680" cy="914400"/>
-          </a:xfrm>
-          <a:prstGeom prst="rect">
-            <a:avLst/>
-          </a:prstGeom>
-          <a:noFill/>
-        </p:spPr>
-        <p:txBody>
-          <a:bodyPr wrap="square" anchor="t" lIns="0" rIns="0" tIns="0" bIns="0">
-            <a:spAutoFit/>
-          </a:bodyPr>
-          <a:lstStyle/>
-          <a:p>
-            <a:pPr algn="l"/>
-            <a:r>
-              <a:rPr sz="1300" b="0" i="0">
-                <a:solidFill>
-                  <a:srgbClr val="14141C"/>
-                </a:solidFill>
-                <a:latin typeface="Geist"/>
-              </a:rPr>
-              <a:t>[8] Chen &amp; Shafir 2025, Harvard Health -- the dismissal of women's symptoms.</a:t>
+              <a:t>An honest secondary number -- and a reminder: a black box scored 0.76 here, no better, and could give us no effect size at all.</a:t>
             </a:r>
           </a:p>
         </p:txBody>
@@ -9150,7 +9839,7 @@
                 </a:solidFill>
                 <a:latin typeface="Geist Mono"/>
               </a:rPr>
-              <a:t>The one habit to carry out the door</a:t>
+              <a:t>Does it work for both groups?</a:t>
             </a:r>
           </a:p>
         </p:txBody>
@@ -9229,21 +9918,45 @@
                 </a:solidFill>
                 <a:latin typeface="Geist Mono"/>
               </a:rPr>
-              <a:t>Jinchi Wei  ·  Outset  ·  Does estrogen keep the mind sharp?  ·  2026-07-08</a:t>
-            </a:r>
-          </a:p>
-        </p:txBody>
-      </p:sp>
-      <p:sp>
-        <p:nvSpPr>
-          <p:cNvPr id="7" name="Rectangle 6"/>
+              <a:t>Jinchi Wei  ·  Outset  ·  Does estrogen keep older women's minds sharp?  ·  2026-07-08</a:t>
+            </a:r>
+          </a:p>
+        </p:txBody>
+      </p:sp>
+      <p:pic>
+        <p:nvPicPr>
+          <p:cNvPr id="7" name="Picture 6" descr="fairness_by_group.png"/>
+          <p:cNvPicPr>
+            <a:picLocks noChangeAspect="1"/>
+          </p:cNvPicPr>
+          <p:nvPr/>
+        </p:nvPicPr>
+        <p:blipFill>
+          <a:blip r:embed="rId2"/>
+          <a:stretch>
+            <a:fillRect/>
+          </a:stretch>
+        </p:blipFill>
+        <p:spPr>
+          <a:xfrm>
+            <a:off x="457200" y="1267075"/>
+            <a:ext cx="6298387" cy="4781048"/>
+          </a:xfrm>
+          <a:prstGeom prst="rect">
+            <a:avLst/>
+          </a:prstGeom>
+        </p:spPr>
+      </p:pic>
+      <p:sp>
+        <p:nvSpPr>
+          <p:cNvPr id="8" name="Rectangle 7"/>
           <p:cNvSpPr/>
           <p:nvPr/>
         </p:nvSpPr>
         <p:spPr>
           <a:xfrm>
-            <a:off x="457200" y="1737360"/>
-            <a:ext cx="146304" cy="2194560"/>
+            <a:off x="7167067" y="1143000"/>
+            <a:ext cx="4537252" cy="1325880"/>
           </a:xfrm>
           <a:prstGeom prst="rect">
             <a:avLst/>
@@ -9280,14 +9993,49 @@
       </p:sp>
       <p:sp>
         <p:nvSpPr>
-          <p:cNvPr id="8" name="TextBox 7"/>
+          <p:cNvPr id="9" name="TextBox 8"/>
           <p:cNvSpPr txBox="1"/>
           <p:nvPr/>
         </p:nvSpPr>
         <p:spPr>
           <a:xfrm>
-            <a:off x="914400" y="1737360"/>
-            <a:ext cx="10698480" cy="1371600"/>
+            <a:off x="7423099" y="1234440"/>
+            <a:ext cx="4025188" cy="731520"/>
+          </a:xfrm>
+          <a:prstGeom prst="rect">
+            <a:avLst/>
+          </a:prstGeom>
+          <a:noFill/>
+        </p:spPr>
+        <p:txBody>
+          <a:bodyPr wrap="square" anchor="ctr" lIns="0" rIns="0" tIns="0" bIns="0">
+            <a:spAutoFit/>
+          </a:bodyPr>
+          <a:lstStyle/>
+          <a:p>
+            <a:pPr algn="l"/>
+            <a:r>
+              <a:rPr sz="3600" b="1" i="0">
+                <a:solidFill>
+                  <a:srgbClr val="14141C"/>
+                </a:solidFill>
+                <a:latin typeface="Geist Mono"/>
+              </a:rPr>
+              <a:t>0.73</a:t>
+            </a:r>
+          </a:p>
+        </p:txBody>
+      </p:sp>
+      <p:sp>
+        <p:nvSpPr>
+          <p:cNvPr id="10" name="TextBox 9"/>
+          <p:cNvSpPr txBox="1"/>
+          <p:nvPr/>
+        </p:nvSpPr>
+        <p:spPr>
+          <a:xfrm>
+            <a:off x="7423099" y="1947672"/>
+            <a:ext cx="4025188" cy="457200"/>
           </a:xfrm>
           <a:prstGeom prst="rect">
             <a:avLst/>
@@ -9302,27 +10050,106 @@
           <a:p>
             <a:pPr algn="l"/>
             <a:r>
-              <a:rPr sz="3800" b="1" i="0">
+              <a:rPr sz="1350" b="0" i="0">
                 <a:solidFill>
                   <a:srgbClr val="14141C"/>
                 </a:solidFill>
+                <a:latin typeface="Geist"/>
+              </a:rPr>
+              <a:t>accuracy for estrogen-USERS</a:t>
+            </a:r>
+          </a:p>
+        </p:txBody>
+      </p:sp>
+      <p:sp>
+        <p:nvSpPr>
+          <p:cNvPr id="11" name="Rectangle 10"/>
+          <p:cNvSpPr/>
+          <p:nvPr/>
+        </p:nvSpPr>
+        <p:spPr>
+          <a:xfrm>
+            <a:off x="7167067" y="2606040"/>
+            <a:ext cx="4537252" cy="1325880"/>
+          </a:xfrm>
+          <a:prstGeom prst="rect">
+            <a:avLst/>
+          </a:prstGeom>
+          <a:solidFill>
+            <a:srgbClr val="555560"/>
+          </a:solidFill>
+          <a:ln>
+            <a:noFill/>
+          </a:ln>
+          <a:effectLst/>
+        </p:spPr>
+        <p:style>
+          <a:lnRef idx="1">
+            <a:schemeClr val="accent1"/>
+          </a:lnRef>
+          <a:fillRef idx="3">
+            <a:schemeClr val="accent1"/>
+          </a:fillRef>
+          <a:effectRef idx="2">
+            <a:schemeClr val="accent1"/>
+          </a:effectRef>
+          <a:fontRef idx="minor">
+            <a:schemeClr val="lt1"/>
+          </a:fontRef>
+        </p:style>
+        <p:txBody>
+          <a:bodyPr rtlCol="0" anchor="ctr"/>
+          <a:lstStyle/>
+          <a:p>
+            <a:pPr algn="ctr"/>
+          </a:p>
+        </p:txBody>
+      </p:sp>
+      <p:sp>
+        <p:nvSpPr>
+          <p:cNvPr id="12" name="TextBox 11"/>
+          <p:cNvSpPr txBox="1"/>
+          <p:nvPr/>
+        </p:nvSpPr>
+        <p:spPr>
+          <a:xfrm>
+            <a:off x="7423099" y="2697480"/>
+            <a:ext cx="4025188" cy="731520"/>
+          </a:xfrm>
+          <a:prstGeom prst="rect">
+            <a:avLst/>
+          </a:prstGeom>
+          <a:noFill/>
+        </p:spPr>
+        <p:txBody>
+          <a:bodyPr wrap="square" anchor="ctr" lIns="0" rIns="0" tIns="0" bIns="0">
+            <a:spAutoFit/>
+          </a:bodyPr>
+          <a:lstStyle/>
+          <a:p>
+            <a:pPr algn="l"/>
+            <a:r>
+              <a:rPr sz="3600" b="1" i="0">
+                <a:solidFill>
+                  <a:srgbClr val="FFFFFF"/>
+                </a:solidFill>
                 <a:latin typeface="Geist Mono"/>
               </a:rPr>
-              <a:t>Suspect the chooser, not the treatment.</a:t>
-            </a:r>
-          </a:p>
-        </p:txBody>
-      </p:sp>
-      <p:sp>
-        <p:nvSpPr>
-          <p:cNvPr id="9" name="TextBox 8"/>
+              <a:t>0.65</a:t>
+            </a:r>
+          </a:p>
+        </p:txBody>
+      </p:sp>
+      <p:sp>
+        <p:nvSpPr>
+          <p:cNvPr id="13" name="TextBox 12"/>
           <p:cNvSpPr txBox="1"/>
           <p:nvPr/>
         </p:nvSpPr>
         <p:spPr>
           <a:xfrm>
-            <a:off x="914400" y="3291840"/>
-            <a:ext cx="10332720" cy="1097280"/>
+            <a:off x="7423099" y="3410712"/>
+            <a:ext cx="4025188" cy="457200"/>
           </a:xfrm>
           <a:prstGeom prst="rect">
             <a:avLst/>
@@ -9337,27 +10164,27 @@
           <a:p>
             <a:pPr algn="l"/>
             <a:r>
-              <a:rPr sz="1800" b="0" i="0">
-                <a:solidFill>
-                  <a:srgbClr val="14141C"/>
+              <a:rPr sz="1350" b="0" i="0">
+                <a:solidFill>
+                  <a:srgbClr val="FFFFFF"/>
                 </a:solidFill>
                 <a:latin typeface="Geist"/>
               </a:rPr>
-              <a:t>When a group that CHOSE a treatment looks healthier, the head start usually belongs to the person, not the pill -- and only a coin-flip experiment can promote a correlation to a cause.</a:t>
-            </a:r>
-          </a:p>
-        </p:txBody>
-      </p:sp>
-      <p:sp>
-        <p:nvSpPr>
-          <p:cNvPr id="10" name="TextBox 9"/>
+              <a:t>accuracy for NON-users</a:t>
+            </a:r>
+          </a:p>
+        </p:txBody>
+      </p:sp>
+      <p:sp>
+        <p:nvSpPr>
+          <p:cNvPr id="14" name="TextBox 13"/>
           <p:cNvSpPr txBox="1"/>
           <p:nvPr/>
         </p:nvSpPr>
         <p:spPr>
           <a:xfrm>
-            <a:off x="914400" y="4526280"/>
-            <a:ext cx="10332720" cy="731520"/>
+            <a:off x="7167067" y="4160520"/>
+            <a:ext cx="4537252" cy="1097280"/>
           </a:xfrm>
           <a:prstGeom prst="rect">
             <a:avLst/>
@@ -9372,13 +10199,13 @@
           <a:p>
             <a:pPr algn="l"/>
             <a:r>
-              <a:rPr sz="1800" b="1" i="0">
-                <a:solidFill>
-                  <a:srgbClr val="FF1493"/>
-                </a:solidFill>
-                <a:latin typeface="Geist Mono"/>
-              </a:rPr>
-              <a:t>And take the patient's account seriously -- even when the test says 'fine.'</a:t>
+              <a:rPr sz="1450" b="0" i="1">
+                <a:solidFill>
+                  <a:srgbClr val="14141C"/>
+                </a:solidFill>
+                <a:latin typeface="Geist"/>
+              </a:rPr>
+              <a:t>A tool reliably right for one group and shakier for another can quietly do harm if a clinic trusts it equally. Naming the gap is the honest move.</a:t>
             </a:r>
           </a:p>
         </p:txBody>
@@ -9462,7 +10289,7 @@
         <p:spPr>
           <a:xfrm>
             <a:off x="0" y="0"/>
-            <a:ext cx="731520" cy="6858000"/>
+            <a:ext cx="548640" cy="6858000"/>
           </a:xfrm>
           <a:prstGeom prst="rect">
             <a:avLst/>
@@ -9505,14 +10332,14 @@
         </p:nvSpPr>
         <p:spPr>
           <a:xfrm>
-            <a:off x="731520" y="0"/>
-            <a:ext cx="228600" cy="6858000"/>
+            <a:off x="777240" y="640080"/>
+            <a:ext cx="164592" cy="411480"/>
           </a:xfrm>
           <a:prstGeom prst="rect">
             <a:avLst/>
           </a:prstGeom>
           <a:solidFill>
-            <a:srgbClr val="FF1493"/>
+            <a:srgbClr val="40E0D0"/>
           </a:solidFill>
           <a:ln>
             <a:noFill/>
@@ -9549,8 +10376,8 @@
         </p:nvSpPr>
         <p:spPr>
           <a:xfrm>
-            <a:off x="1188720" y="1417320"/>
-            <a:ext cx="10058400" cy="1280160"/>
+            <a:off x="1051560" y="640080"/>
+            <a:ext cx="10058400" cy="365760"/>
           </a:xfrm>
           <a:prstGeom prst="rect">
             <a:avLst/>
@@ -9563,15 +10390,15 @@
           </a:bodyPr>
           <a:lstStyle/>
           <a:p>
-            <a:pPr algn="ctr"/>
-            <a:r>
-              <a:rPr sz="6000" b="1" i="0">
-                <a:solidFill>
-                  <a:srgbClr val="FF1493"/>
+            <a:pPr algn="l"/>
+            <a:r>
+              <a:rPr sz="1400" b="1" i="0">
+                <a:solidFill>
+                  <a:srgbClr val="40E0D0"/>
                 </a:solidFill>
                 <a:latin typeface="Geist Mono"/>
               </a:rPr>
-              <a:t>Thank You</a:t>
+              <a:t>Overview</a:t>
             </a:r>
           </a:p>
         </p:txBody>
@@ -9584,8 +10411,8 @@
         </p:nvSpPr>
         <p:spPr>
           <a:xfrm>
-            <a:off x="1188720" y="3246120"/>
-            <a:ext cx="10058400" cy="640080"/>
+            <a:off x="777240" y="2194560"/>
+            <a:ext cx="10972800" cy="2743200"/>
           </a:xfrm>
           <a:prstGeom prst="rect">
             <a:avLst/>
@@ -9598,29 +10425,73 @@
           </a:bodyPr>
           <a:lstStyle/>
           <a:p>
+            <a:pPr algn="l"/>
+            <a:r>
+              <a:rPr sz="4400" b="1" i="0">
+                <a:solidFill>
+                  <a:srgbClr val="FFFFFF"/>
+                </a:solidFill>
+                <a:latin typeface="Geist Mono"/>
+              </a:rPr>
+              <a:t>THE TAKEAWAY</a:t>
+            </a:r>
+          </a:p>
+        </p:txBody>
+      </p:sp>
+      <p:sp>
+        <p:nvSpPr>
+          <p:cNvPr id="7" name="Rectangle 6"/>
+          <p:cNvSpPr/>
+          <p:nvPr/>
+        </p:nvSpPr>
+        <p:spPr>
+          <a:xfrm>
+            <a:off x="777240" y="5120640"/>
+            <a:ext cx="1828800" cy="18288"/>
+          </a:xfrm>
+          <a:prstGeom prst="rect">
+            <a:avLst/>
+          </a:prstGeom>
+          <a:solidFill>
+            <a:srgbClr val="40E0D0"/>
+          </a:solidFill>
+          <a:ln>
+            <a:noFill/>
+          </a:ln>
+          <a:effectLst/>
+        </p:spPr>
+        <p:style>
+          <a:lnRef idx="1">
+            <a:schemeClr val="accent1"/>
+          </a:lnRef>
+          <a:fillRef idx="3">
+            <a:schemeClr val="accent1"/>
+          </a:fillRef>
+          <a:effectRef idx="2">
+            <a:schemeClr val="accent1"/>
+          </a:effectRef>
+          <a:fontRef idx="minor">
+            <a:schemeClr val="lt1"/>
+          </a:fontRef>
+        </p:style>
+        <p:txBody>
+          <a:bodyPr rtlCol="0" anchor="ctr"/>
+          <a:lstStyle/>
+          <a:p>
             <a:pPr algn="ctr"/>
-            <a:r>
-              <a:rPr sz="3000" b="0" i="0">
-                <a:solidFill>
-                  <a:srgbClr val="40E0D0"/>
-                </a:solidFill>
-                <a:latin typeface="Noto Sans CJK TC"/>
-              </a:rPr>
-              <a:t>魏晉祺</a:t>
-            </a:r>
-          </a:p>
-        </p:txBody>
-      </p:sp>
-      <p:sp>
-        <p:nvSpPr>
-          <p:cNvPr id="7" name="TextBox 6"/>
+          </a:p>
+        </p:txBody>
+      </p:sp>
+      <p:sp>
+        <p:nvSpPr>
+          <p:cNvPr id="8" name="TextBox 7"/>
           <p:cNvSpPr txBox="1"/>
           <p:nvPr/>
         </p:nvSpPr>
         <p:spPr>
           <a:xfrm>
-            <a:off x="1188720" y="3922776"/>
-            <a:ext cx="10058400" cy="457200"/>
+            <a:off x="868680" y="6126480"/>
+            <a:ext cx="3657600" cy="320040"/>
           </a:xfrm>
           <a:prstGeom prst="rect">
             <a:avLst/>
@@ -9633,9 +10504,9 @@
           </a:bodyPr>
           <a:lstStyle/>
           <a:p>
-            <a:pPr algn="ctr"/>
-            <a:r>
-              <a:rPr sz="2000" b="1" i="0">
+            <a:pPr algn="l"/>
+            <a:r>
+              <a:rPr sz="1100" b="1" i="0">
                 <a:solidFill>
                   <a:srgbClr val="40E0D0"/>
                 </a:solidFill>
@@ -9648,14 +10519,14 @@
       </p:sp>
       <p:sp>
         <p:nvSpPr>
-          <p:cNvPr id="8" name="TextBox 7"/>
+          <p:cNvPr id="9" name="TextBox 8"/>
           <p:cNvSpPr txBox="1"/>
           <p:nvPr/>
         </p:nvSpPr>
         <p:spPr>
           <a:xfrm>
-            <a:off x="1188720" y="4398264"/>
-            <a:ext cx="10058400" cy="365760"/>
+            <a:off x="2148839" y="6126480"/>
+            <a:ext cx="182880" cy="320040"/>
           </a:xfrm>
           <a:prstGeom prst="rect">
             <a:avLst/>
@@ -9668,29 +10539,29 @@
           </a:bodyPr>
           <a:lstStyle/>
           <a:p>
-            <a:pPr algn="ctr"/>
-            <a:r>
-              <a:rPr sz="1300" b="0" i="0">
-                <a:solidFill>
-                  <a:srgbClr val="FFFFFF"/>
-                </a:solidFill>
-                <a:latin typeface="Geist"/>
-              </a:rPr>
-              <a:t>Outset</a:t>
-            </a:r>
-          </a:p>
-        </p:txBody>
-      </p:sp>
-      <p:sp>
-        <p:nvSpPr>
-          <p:cNvPr id="9" name="TextBox 8"/>
+            <a:pPr algn="l"/>
+            <a:r>
+              <a:rPr sz="1100" b="0" i="0">
+                <a:solidFill>
+                  <a:srgbClr val="888888"/>
+                </a:solidFill>
+                <a:latin typeface="Geist Mono"/>
+              </a:rPr>
+              <a:t>·</a:t>
+            </a:r>
+          </a:p>
+        </p:txBody>
+      </p:sp>
+      <p:sp>
+        <p:nvSpPr>
+          <p:cNvPr id="10" name="TextBox 9"/>
           <p:cNvSpPr txBox="1"/>
           <p:nvPr/>
         </p:nvSpPr>
         <p:spPr>
           <a:xfrm>
-            <a:off x="1188720" y="4837176"/>
-            <a:ext cx="10058400" cy="365760"/>
+            <a:off x="2377439" y="6126480"/>
+            <a:ext cx="4572000" cy="320040"/>
           </a:xfrm>
           <a:prstGeom prst="rect">
             <a:avLst/>
@@ -9703,67 +10574,89 @@
           </a:bodyPr>
           <a:lstStyle/>
           <a:p>
-            <a:pPr algn="ctr"/>
-            <a:r>
-              <a:rPr sz="1600" b="0" i="0">
-                <a:solidFill>
-                  <a:srgbClr val="F0C840"/>
+            <a:pPr algn="l"/>
+            <a:r>
+              <a:rPr sz="1100" b="1" i="0">
+                <a:solidFill>
+                  <a:srgbClr val="FF1493"/>
                 </a:solidFill>
                 <a:latin typeface="Geist Mono"/>
               </a:rPr>
-              <a:t>jinchikwei@gmail.com</a:t>
-            </a:r>
-          </a:p>
-        </p:txBody>
-      </p:sp>
-      <p:pic>
-        <p:nvPicPr>
-          <p:cNvPr id="10" name="Picture 9" descr="meng.png"/>
-          <p:cNvPicPr>
-            <a:picLocks noChangeAspect="1"/>
-          </p:cNvPicPr>
-          <p:nvPr/>
-        </p:nvPicPr>
-        <p:blipFill>
-          <a:blip r:embed="rId2"/>
-          <a:stretch>
-            <a:fillRect/>
-          </a:stretch>
-        </p:blipFill>
-        <p:spPr>
-          <a:xfrm>
-            <a:off x="10086477" y="5486400"/>
-            <a:ext cx="690906" cy="914400"/>
-          </a:xfrm>
-          <a:prstGeom prst="rect">
-            <a:avLst/>
-          </a:prstGeom>
-        </p:spPr>
-      </p:pic>
-      <p:pic>
-        <p:nvPicPr>
-          <p:cNvPr id="11" name="Picture 10" descr="xiang.png"/>
-          <p:cNvPicPr>
-            <a:picLocks noChangeAspect="1"/>
-          </p:cNvPicPr>
-          <p:nvPr/>
-        </p:nvPicPr>
-        <p:blipFill>
-          <a:blip r:embed="rId3"/>
-          <a:stretch>
-            <a:fillRect/>
-          </a:stretch>
-        </p:blipFill>
-        <p:spPr>
-          <a:xfrm>
-            <a:off x="10978551" y="5486400"/>
-            <a:ext cx="755944" cy="914400"/>
-          </a:xfrm>
-          <a:prstGeom prst="rect">
-            <a:avLst/>
-          </a:prstGeom>
-        </p:spPr>
-      </p:pic>
+              <a:t>Outset</a:t>
+            </a:r>
+          </a:p>
+        </p:txBody>
+      </p:sp>
+      <p:sp>
+        <p:nvSpPr>
+          <p:cNvPr id="11" name="TextBox 10"/>
+          <p:cNvSpPr txBox="1"/>
+          <p:nvPr/>
+        </p:nvSpPr>
+        <p:spPr>
+          <a:xfrm>
+            <a:off x="3657599" y="6126480"/>
+            <a:ext cx="182880" cy="320040"/>
+          </a:xfrm>
+          <a:prstGeom prst="rect">
+            <a:avLst/>
+          </a:prstGeom>
+          <a:noFill/>
+        </p:spPr>
+        <p:txBody>
+          <a:bodyPr wrap="square" anchor="t" lIns="0" rIns="0" tIns="0" bIns="0">
+            <a:spAutoFit/>
+          </a:bodyPr>
+          <a:lstStyle/>
+          <a:p>
+            <a:pPr algn="l"/>
+            <a:r>
+              <a:rPr sz="1100" b="0" i="0">
+                <a:solidFill>
+                  <a:srgbClr val="888888"/>
+                </a:solidFill>
+                <a:latin typeface="Geist Mono"/>
+              </a:rPr>
+              <a:t>·</a:t>
+            </a:r>
+          </a:p>
+        </p:txBody>
+      </p:sp>
+      <p:sp>
+        <p:nvSpPr>
+          <p:cNvPr id="12" name="TextBox 11"/>
+          <p:cNvSpPr txBox="1"/>
+          <p:nvPr/>
+        </p:nvSpPr>
+        <p:spPr>
+          <a:xfrm>
+            <a:off x="3886200" y="6126480"/>
+            <a:ext cx="7315200" cy="320040"/>
+          </a:xfrm>
+          <a:prstGeom prst="rect">
+            <a:avLst/>
+          </a:prstGeom>
+          <a:noFill/>
+        </p:spPr>
+        <p:txBody>
+          <a:bodyPr wrap="square" anchor="t" lIns="0" rIns="0" tIns="0" bIns="0">
+            <a:spAutoFit/>
+          </a:bodyPr>
+          <a:lstStyle/>
+          <a:p>
+            <a:pPr algn="l"/>
+            <a:r>
+              <a:rPr sz="1100" b="0" i="0">
+                <a:solidFill>
+                  <a:srgbClr val="888888"/>
+                </a:solidFill>
+                <a:latin typeface="Geist Mono"/>
+              </a:rPr>
+              <a:t>Does estrogen keep older women's minds sharp?</a:t>
+            </a:r>
+          </a:p>
+        </p:txBody>
+      </p:sp>
     </p:spTree>
   </p:cSld>
   <p:clrMapOvr>
@@ -10206,11 +11099,2058 @@
                 </a:solidFill>
                 <a:latin typeface="Geist Mono"/>
               </a:rPr>
-              <a:t>Does estrogen keep the mind sharp?</a:t>
-            </a:r>
-          </a:p>
-        </p:txBody>
-      </p:sp>
+              <a:t>Does estrogen keep older women's minds sharp?</a:t>
+            </a:r>
+          </a:p>
+        </p:txBody>
+      </p:sp>
+    </p:spTree>
+  </p:cSld>
+  <p:clrMapOvr>
+    <a:masterClrMapping/>
+  </p:clrMapOvr>
+</p:sld>
+</file>
+
+<file path=ppt/slides/slide20.xml><?xml version="1.0" encoding="utf-8"?>
+<p:sld xmlns:a="http://schemas.openxmlformats.org/drawingml/2006/main" xmlns:p="http://schemas.openxmlformats.org/presentationml/2006/main" xmlns:r="http://schemas.openxmlformats.org/officeDocument/2006/relationships">
+  <p:cSld>
+    <p:spTree>
+      <p:nvGrpSpPr>
+        <p:cNvPr id="1" name=""/>
+        <p:cNvGrpSpPr/>
+        <p:nvPr/>
+      </p:nvGrpSpPr>
+      <p:grpSpPr/>
+      <p:sp>
+        <p:nvSpPr>
+          <p:cNvPr id="2" name="Rectangle 1"/>
+          <p:cNvSpPr/>
+          <p:nvPr/>
+        </p:nvSpPr>
+        <p:spPr>
+          <a:xfrm>
+            <a:off x="0" y="0"/>
+            <a:ext cx="12191695" cy="6858000"/>
+          </a:xfrm>
+          <a:prstGeom prst="rect">
+            <a:avLst/>
+          </a:prstGeom>
+          <a:solidFill>
+            <a:srgbClr val="F6F4EE"/>
+          </a:solidFill>
+          <a:ln>
+            <a:noFill/>
+          </a:ln>
+          <a:effectLst/>
+        </p:spPr>
+        <p:style>
+          <a:lnRef idx="1">
+            <a:schemeClr val="accent1"/>
+          </a:lnRef>
+          <a:fillRef idx="3">
+            <a:schemeClr val="accent1"/>
+          </a:fillRef>
+          <a:effectRef idx="2">
+            <a:schemeClr val="accent1"/>
+          </a:effectRef>
+          <a:fontRef idx="minor">
+            <a:schemeClr val="lt1"/>
+          </a:fontRef>
+        </p:style>
+        <p:txBody>
+          <a:bodyPr rtlCol="0" anchor="ctr"/>
+          <a:lstStyle/>
+          <a:p>
+            <a:pPr algn="ctr"/>
+          </a:p>
+        </p:txBody>
+      </p:sp>
+      <p:sp>
+        <p:nvSpPr>
+          <p:cNvPr id="3" name="Rectangle 2"/>
+          <p:cNvSpPr/>
+          <p:nvPr/>
+        </p:nvSpPr>
+        <p:spPr>
+          <a:xfrm>
+            <a:off x="0" y="0"/>
+            <a:ext cx="201168" cy="6858000"/>
+          </a:xfrm>
+          <a:prstGeom prst="rect">
+            <a:avLst/>
+          </a:prstGeom>
+          <a:solidFill>
+            <a:srgbClr val="40E0D0"/>
+          </a:solidFill>
+          <a:ln>
+            <a:noFill/>
+          </a:ln>
+          <a:effectLst/>
+        </p:spPr>
+        <p:style>
+          <a:lnRef idx="1">
+            <a:schemeClr val="accent1"/>
+          </a:lnRef>
+          <a:fillRef idx="3">
+            <a:schemeClr val="accent1"/>
+          </a:fillRef>
+          <a:effectRef idx="2">
+            <a:schemeClr val="accent1"/>
+          </a:effectRef>
+          <a:fontRef idx="minor">
+            <a:schemeClr val="lt1"/>
+          </a:fontRef>
+        </p:style>
+        <p:txBody>
+          <a:bodyPr rtlCol="0" anchor="ctr"/>
+          <a:lstStyle/>
+          <a:p>
+            <a:pPr algn="ctr"/>
+          </a:p>
+        </p:txBody>
+      </p:sp>
+      <p:sp>
+        <p:nvSpPr>
+          <p:cNvPr id="4" name="TextBox 3"/>
+          <p:cNvSpPr txBox="1"/>
+          <p:nvPr/>
+        </p:nvSpPr>
+        <p:spPr>
+          <a:xfrm>
+            <a:off x="457200" y="274320"/>
+            <a:ext cx="11247120" cy="502920"/>
+          </a:xfrm>
+          <a:prstGeom prst="rect">
+            <a:avLst/>
+          </a:prstGeom>
+          <a:noFill/>
+        </p:spPr>
+        <p:txBody>
+          <a:bodyPr wrap="square" anchor="t" lIns="0" rIns="0" tIns="0" bIns="0">
+            <a:spAutoFit/>
+          </a:bodyPr>
+          <a:lstStyle/>
+          <a:p>
+            <a:pPr algn="l"/>
+            <a:r>
+              <a:rPr sz="2800" b="1" i="0">
+                <a:solidFill>
+                  <a:srgbClr val="14141C"/>
+                </a:solidFill>
+                <a:latin typeface="Geist Mono"/>
+              </a:rPr>
+              <a:t>What a survey can and cannot do</a:t>
+            </a:r>
+          </a:p>
+        </p:txBody>
+      </p:sp>
+      <p:sp>
+        <p:nvSpPr>
+          <p:cNvPr id="5" name="Rectangle 4"/>
+          <p:cNvSpPr/>
+          <p:nvPr/>
+        </p:nvSpPr>
+        <p:spPr>
+          <a:xfrm>
+            <a:off x="457200" y="868680"/>
+            <a:ext cx="11247120" cy="4572"/>
+          </a:xfrm>
+          <a:prstGeom prst="rect">
+            <a:avLst/>
+          </a:prstGeom>
+          <a:solidFill>
+            <a:srgbClr val="DDDDDD"/>
+          </a:solidFill>
+          <a:ln>
+            <a:noFill/>
+          </a:ln>
+          <a:effectLst/>
+        </p:spPr>
+        <p:style>
+          <a:lnRef idx="1">
+            <a:schemeClr val="accent1"/>
+          </a:lnRef>
+          <a:fillRef idx="3">
+            <a:schemeClr val="accent1"/>
+          </a:fillRef>
+          <a:effectRef idx="2">
+            <a:schemeClr val="accent1"/>
+          </a:effectRef>
+          <a:fontRef idx="minor">
+            <a:schemeClr val="lt1"/>
+          </a:fontRef>
+        </p:style>
+        <p:txBody>
+          <a:bodyPr rtlCol="0" anchor="ctr"/>
+          <a:lstStyle/>
+          <a:p>
+            <a:pPr algn="ctr"/>
+          </a:p>
+        </p:txBody>
+      </p:sp>
+      <p:sp>
+        <p:nvSpPr>
+          <p:cNvPr id="6" name="TextBox 5"/>
+          <p:cNvSpPr txBox="1"/>
+          <p:nvPr/>
+        </p:nvSpPr>
+        <p:spPr>
+          <a:xfrm>
+            <a:off x="457200" y="6510528"/>
+            <a:ext cx="11247120" cy="274320"/>
+          </a:xfrm>
+          <a:prstGeom prst="rect">
+            <a:avLst/>
+          </a:prstGeom>
+          <a:noFill/>
+        </p:spPr>
+        <p:txBody>
+          <a:bodyPr wrap="square" anchor="t" lIns="0" rIns="0" tIns="0" bIns="0">
+            <a:spAutoFit/>
+          </a:bodyPr>
+          <a:lstStyle/>
+          <a:p>
+            <a:pPr algn="l"/>
+            <a:r>
+              <a:rPr sz="900" b="0" i="0">
+                <a:solidFill>
+                  <a:srgbClr val="555560"/>
+                </a:solidFill>
+                <a:latin typeface="Geist Mono"/>
+              </a:rPr>
+              <a:t>Jinchi Wei  ·  Outset  ·  Does estrogen keep older women's minds sharp?  ·  2026-07-08</a:t>
+            </a:r>
+          </a:p>
+        </p:txBody>
+      </p:sp>
+      <p:sp>
+        <p:nvSpPr>
+          <p:cNvPr id="7" name="Rectangle 6"/>
+          <p:cNvSpPr/>
+          <p:nvPr/>
+        </p:nvSpPr>
+        <p:spPr>
+          <a:xfrm>
+            <a:off x="457200" y="1051560"/>
+            <a:ext cx="3535680" cy="5120640"/>
+          </a:xfrm>
+          <a:prstGeom prst="rect">
+            <a:avLst/>
+          </a:prstGeom>
+          <a:solidFill>
+            <a:srgbClr val="FFFFFF"/>
+          </a:solidFill>
+          <a:ln>
+            <a:noFill/>
+          </a:ln>
+          <a:effectLst/>
+        </p:spPr>
+        <p:style>
+          <a:lnRef idx="1">
+            <a:schemeClr val="accent1"/>
+          </a:lnRef>
+          <a:fillRef idx="3">
+            <a:schemeClr val="accent1"/>
+          </a:fillRef>
+          <a:effectRef idx="2">
+            <a:schemeClr val="accent1"/>
+          </a:effectRef>
+          <a:fontRef idx="minor">
+            <a:schemeClr val="lt1"/>
+          </a:fontRef>
+        </p:style>
+        <p:txBody>
+          <a:bodyPr rtlCol="0" anchor="ctr"/>
+          <a:lstStyle/>
+          <a:p>
+            <a:pPr algn="ctr"/>
+          </a:p>
+        </p:txBody>
+      </p:sp>
+      <p:sp>
+        <p:nvSpPr>
+          <p:cNvPr id="8" name="Rectangle 7"/>
+          <p:cNvSpPr/>
+          <p:nvPr/>
+        </p:nvSpPr>
+        <p:spPr>
+          <a:xfrm>
+            <a:off x="457200" y="1051560"/>
+            <a:ext cx="3535680" cy="91440"/>
+          </a:xfrm>
+          <a:prstGeom prst="rect">
+            <a:avLst/>
+          </a:prstGeom>
+          <a:solidFill>
+            <a:srgbClr val="40E0D0"/>
+          </a:solidFill>
+          <a:ln>
+            <a:noFill/>
+          </a:ln>
+          <a:effectLst/>
+        </p:spPr>
+        <p:style>
+          <a:lnRef idx="1">
+            <a:schemeClr val="accent1"/>
+          </a:lnRef>
+          <a:fillRef idx="3">
+            <a:schemeClr val="accent1"/>
+          </a:fillRef>
+          <a:effectRef idx="2">
+            <a:schemeClr val="accent1"/>
+          </a:effectRef>
+          <a:fontRef idx="minor">
+            <a:schemeClr val="lt1"/>
+          </a:fontRef>
+        </p:style>
+        <p:txBody>
+          <a:bodyPr rtlCol="0" anchor="ctr"/>
+          <a:lstStyle/>
+          <a:p>
+            <a:pPr algn="ctr"/>
+          </a:p>
+        </p:txBody>
+      </p:sp>
+      <p:sp>
+        <p:nvSpPr>
+          <p:cNvPr id="9" name="TextBox 8"/>
+          <p:cNvSpPr txBox="1"/>
+          <p:nvPr/>
+        </p:nvSpPr>
+        <p:spPr>
+          <a:xfrm>
+            <a:off x="694944" y="1554480"/>
+            <a:ext cx="3060192" cy="457200"/>
+          </a:xfrm>
+          <a:prstGeom prst="rect">
+            <a:avLst/>
+          </a:prstGeom>
+          <a:noFill/>
+        </p:spPr>
+        <p:txBody>
+          <a:bodyPr wrap="square" anchor="t" lIns="0" rIns="0" tIns="0" bIns="0">
+            <a:spAutoFit/>
+          </a:bodyPr>
+          <a:lstStyle/>
+          <a:p>
+            <a:pPr algn="l"/>
+            <a:r>
+              <a:rPr sz="1600" b="1" i="0">
+                <a:solidFill>
+                  <a:srgbClr val="40E0D0"/>
+                </a:solidFill>
+                <a:latin typeface="Geist Mono"/>
+              </a:rPr>
+              <a:t>WHAT IT CAN DO</a:t>
+            </a:r>
+          </a:p>
+        </p:txBody>
+      </p:sp>
+      <p:sp>
+        <p:nvSpPr>
+          <p:cNvPr id="10" name="TextBox 9"/>
+          <p:cNvSpPr txBox="1"/>
+          <p:nvPr/>
+        </p:nvSpPr>
+        <p:spPr>
+          <a:xfrm>
+            <a:off x="694944" y="2194560"/>
+            <a:ext cx="3060192" cy="3154679"/>
+          </a:xfrm>
+          <a:prstGeom prst="rect">
+            <a:avLst/>
+          </a:prstGeom>
+          <a:noFill/>
+        </p:spPr>
+        <p:txBody>
+          <a:bodyPr wrap="square" anchor="t" lIns="0" rIns="0" tIns="0" bIns="0">
+            <a:spAutoFit/>
+          </a:bodyPr>
+          <a:lstStyle/>
+          <a:p>
+            <a:pPr algn="l"/>
+            <a:r>
+              <a:rPr sz="1500" b="0" i="0">
+                <a:solidFill>
+                  <a:srgbClr val="14141C"/>
+                </a:solidFill>
+                <a:latin typeface="Geist"/>
+              </a:rPr>
+              <a:t>Show a tempting headline is mostly a mirage, and that adjusting for background shrinks the effect by 67%.</a:t>
+            </a:r>
+          </a:p>
+        </p:txBody>
+      </p:sp>
+      <p:sp>
+        <p:nvSpPr>
+          <p:cNvPr id="11" name="Rectangle 10"/>
+          <p:cNvSpPr/>
+          <p:nvPr/>
+        </p:nvSpPr>
+        <p:spPr>
+          <a:xfrm>
+            <a:off x="457200" y="5257800"/>
+            <a:ext cx="3535680" cy="18288"/>
+          </a:xfrm>
+          <a:prstGeom prst="rect">
+            <a:avLst/>
+          </a:prstGeom>
+          <a:solidFill>
+            <a:srgbClr val="E4E1D9"/>
+          </a:solidFill>
+          <a:ln>
+            <a:noFill/>
+          </a:ln>
+          <a:effectLst/>
+        </p:spPr>
+        <p:style>
+          <a:lnRef idx="1">
+            <a:schemeClr val="accent1"/>
+          </a:lnRef>
+          <a:fillRef idx="3">
+            <a:schemeClr val="accent1"/>
+          </a:fillRef>
+          <a:effectRef idx="2">
+            <a:schemeClr val="accent1"/>
+          </a:effectRef>
+          <a:fontRef idx="minor">
+            <a:schemeClr val="lt1"/>
+          </a:fontRef>
+        </p:style>
+        <p:txBody>
+          <a:bodyPr rtlCol="0" anchor="ctr"/>
+          <a:lstStyle/>
+          <a:p>
+            <a:pPr algn="ctr"/>
+          </a:p>
+        </p:txBody>
+      </p:sp>
+      <p:sp>
+        <p:nvSpPr>
+          <p:cNvPr id="12" name="TextBox 11"/>
+          <p:cNvSpPr txBox="1"/>
+          <p:nvPr/>
+        </p:nvSpPr>
+        <p:spPr>
+          <a:xfrm>
+            <a:off x="694944" y="5394960"/>
+            <a:ext cx="3060192" cy="548640"/>
+          </a:xfrm>
+          <a:prstGeom prst="rect">
+            <a:avLst/>
+          </a:prstGeom>
+          <a:noFill/>
+        </p:spPr>
+        <p:txBody>
+          <a:bodyPr wrap="square" anchor="ctr" lIns="0" rIns="0" tIns="0" bIns="0">
+            <a:spAutoFit/>
+          </a:bodyPr>
+          <a:lstStyle/>
+          <a:p>
+            <a:pPr algn="l"/>
+            <a:r>
+              <a:rPr sz="1400" b="1" i="0">
+                <a:solidFill>
+                  <a:srgbClr val="40E0D0"/>
+                </a:solidFill>
+                <a:latin typeface="Geist Mono"/>
+              </a:rPr>
+              <a:t>the mirage, exposed</a:t>
+            </a:r>
+          </a:p>
+        </p:txBody>
+      </p:sp>
+      <p:sp>
+        <p:nvSpPr>
+          <p:cNvPr id="13" name="Rectangle 12"/>
+          <p:cNvSpPr/>
+          <p:nvPr/>
+        </p:nvSpPr>
+        <p:spPr>
+          <a:xfrm>
+            <a:off x="4312920" y="1051560"/>
+            <a:ext cx="3535680" cy="5120640"/>
+          </a:xfrm>
+          <a:prstGeom prst="rect">
+            <a:avLst/>
+          </a:prstGeom>
+          <a:solidFill>
+            <a:srgbClr val="FFFFFF"/>
+          </a:solidFill>
+          <a:ln>
+            <a:noFill/>
+          </a:ln>
+          <a:effectLst/>
+        </p:spPr>
+        <p:style>
+          <a:lnRef idx="1">
+            <a:schemeClr val="accent1"/>
+          </a:lnRef>
+          <a:fillRef idx="3">
+            <a:schemeClr val="accent1"/>
+          </a:fillRef>
+          <a:effectRef idx="2">
+            <a:schemeClr val="accent1"/>
+          </a:effectRef>
+          <a:fontRef idx="minor">
+            <a:schemeClr val="lt1"/>
+          </a:fontRef>
+        </p:style>
+        <p:txBody>
+          <a:bodyPr rtlCol="0" anchor="ctr"/>
+          <a:lstStyle/>
+          <a:p>
+            <a:pPr algn="ctr"/>
+          </a:p>
+        </p:txBody>
+      </p:sp>
+      <p:sp>
+        <p:nvSpPr>
+          <p:cNvPr id="14" name="Rectangle 13"/>
+          <p:cNvSpPr/>
+          <p:nvPr/>
+        </p:nvSpPr>
+        <p:spPr>
+          <a:xfrm>
+            <a:off x="4312920" y="1051560"/>
+            <a:ext cx="3535680" cy="91440"/>
+          </a:xfrm>
+          <a:prstGeom prst="rect">
+            <a:avLst/>
+          </a:prstGeom>
+          <a:solidFill>
+            <a:srgbClr val="FF1493"/>
+          </a:solidFill>
+          <a:ln>
+            <a:noFill/>
+          </a:ln>
+          <a:effectLst/>
+        </p:spPr>
+        <p:style>
+          <a:lnRef idx="1">
+            <a:schemeClr val="accent1"/>
+          </a:lnRef>
+          <a:fillRef idx="3">
+            <a:schemeClr val="accent1"/>
+          </a:fillRef>
+          <a:effectRef idx="2">
+            <a:schemeClr val="accent1"/>
+          </a:effectRef>
+          <a:fontRef idx="minor">
+            <a:schemeClr val="lt1"/>
+          </a:fontRef>
+        </p:style>
+        <p:txBody>
+          <a:bodyPr rtlCol="0" anchor="ctr"/>
+          <a:lstStyle/>
+          <a:p>
+            <a:pPr algn="ctr"/>
+          </a:p>
+        </p:txBody>
+      </p:sp>
+      <p:sp>
+        <p:nvSpPr>
+          <p:cNvPr id="15" name="TextBox 14"/>
+          <p:cNvSpPr txBox="1"/>
+          <p:nvPr/>
+        </p:nvSpPr>
+        <p:spPr>
+          <a:xfrm>
+            <a:off x="4550664" y="1554480"/>
+            <a:ext cx="3060192" cy="457200"/>
+          </a:xfrm>
+          <a:prstGeom prst="rect">
+            <a:avLst/>
+          </a:prstGeom>
+          <a:noFill/>
+        </p:spPr>
+        <p:txBody>
+          <a:bodyPr wrap="square" anchor="t" lIns="0" rIns="0" tIns="0" bIns="0">
+            <a:spAutoFit/>
+          </a:bodyPr>
+          <a:lstStyle/>
+          <a:p>
+            <a:pPr algn="l"/>
+            <a:r>
+              <a:rPr sz="1600" b="1" i="0">
+                <a:solidFill>
+                  <a:srgbClr val="FF1493"/>
+                </a:solidFill>
+                <a:latin typeface="Geist Mono"/>
+              </a:rPr>
+              <a:t>WHAT IT CANNOT DO</a:t>
+            </a:r>
+          </a:p>
+        </p:txBody>
+      </p:sp>
+      <p:sp>
+        <p:nvSpPr>
+          <p:cNvPr id="16" name="TextBox 15"/>
+          <p:cNvSpPr txBox="1"/>
+          <p:nvPr/>
+        </p:nvSpPr>
+        <p:spPr>
+          <a:xfrm>
+            <a:off x="4550664" y="2194560"/>
+            <a:ext cx="3060192" cy="3154679"/>
+          </a:xfrm>
+          <a:prstGeom prst="rect">
+            <a:avLst/>
+          </a:prstGeom>
+          <a:noFill/>
+        </p:spPr>
+        <p:txBody>
+          <a:bodyPr wrap="square" anchor="t" lIns="0" rIns="0" tIns="0" bIns="0">
+            <a:spAutoFit/>
+          </a:bodyPr>
+          <a:lstStyle/>
+          <a:p>
+            <a:pPr algn="l"/>
+            <a:r>
+              <a:rPr sz="1500" b="0" i="0">
+                <a:solidFill>
+                  <a:srgbClr val="14141C"/>
+                </a:solidFill>
+                <a:latin typeface="Geist"/>
+              </a:rPr>
+              <a:t>Prove cause. We only corrected for confounders we measured and thought of; something unrecorded could still be doing the work.</a:t>
+            </a:r>
+          </a:p>
+        </p:txBody>
+      </p:sp>
+      <p:sp>
+        <p:nvSpPr>
+          <p:cNvPr id="17" name="Rectangle 16"/>
+          <p:cNvSpPr/>
+          <p:nvPr/>
+        </p:nvSpPr>
+        <p:spPr>
+          <a:xfrm>
+            <a:off x="4312920" y="5257800"/>
+            <a:ext cx="3535680" cy="18288"/>
+          </a:xfrm>
+          <a:prstGeom prst="rect">
+            <a:avLst/>
+          </a:prstGeom>
+          <a:solidFill>
+            <a:srgbClr val="E4E1D9"/>
+          </a:solidFill>
+          <a:ln>
+            <a:noFill/>
+          </a:ln>
+          <a:effectLst/>
+        </p:spPr>
+        <p:style>
+          <a:lnRef idx="1">
+            <a:schemeClr val="accent1"/>
+          </a:lnRef>
+          <a:fillRef idx="3">
+            <a:schemeClr val="accent1"/>
+          </a:fillRef>
+          <a:effectRef idx="2">
+            <a:schemeClr val="accent1"/>
+          </a:effectRef>
+          <a:fontRef idx="minor">
+            <a:schemeClr val="lt1"/>
+          </a:fontRef>
+        </p:style>
+        <p:txBody>
+          <a:bodyPr rtlCol="0" anchor="ctr"/>
+          <a:lstStyle/>
+          <a:p>
+            <a:pPr algn="ctr"/>
+          </a:p>
+        </p:txBody>
+      </p:sp>
+      <p:sp>
+        <p:nvSpPr>
+          <p:cNvPr id="18" name="TextBox 17"/>
+          <p:cNvSpPr txBox="1"/>
+          <p:nvPr/>
+        </p:nvSpPr>
+        <p:spPr>
+          <a:xfrm>
+            <a:off x="4550664" y="5394960"/>
+            <a:ext cx="3060192" cy="548640"/>
+          </a:xfrm>
+          <a:prstGeom prst="rect">
+            <a:avLst/>
+          </a:prstGeom>
+          <a:noFill/>
+        </p:spPr>
+        <p:txBody>
+          <a:bodyPr wrap="square" anchor="ctr" lIns="0" rIns="0" tIns="0" bIns="0">
+            <a:spAutoFit/>
+          </a:bodyPr>
+          <a:lstStyle/>
+          <a:p>
+            <a:pPr algn="l"/>
+            <a:r>
+              <a:rPr sz="1400" b="1" i="0">
+                <a:solidFill>
+                  <a:srgbClr val="FF1493"/>
+                </a:solidFill>
+                <a:latin typeface="Geist Mono"/>
+              </a:rPr>
+              <a:t>a hint, not a proof</a:t>
+            </a:r>
+          </a:p>
+        </p:txBody>
+      </p:sp>
+      <p:sp>
+        <p:nvSpPr>
+          <p:cNvPr id="19" name="Rectangle 18"/>
+          <p:cNvSpPr/>
+          <p:nvPr/>
+        </p:nvSpPr>
+        <p:spPr>
+          <a:xfrm>
+            <a:off x="8168640" y="1051560"/>
+            <a:ext cx="3535680" cy="5120640"/>
+          </a:xfrm>
+          <a:prstGeom prst="rect">
+            <a:avLst/>
+          </a:prstGeom>
+          <a:solidFill>
+            <a:srgbClr val="FFFFFF"/>
+          </a:solidFill>
+          <a:ln>
+            <a:noFill/>
+          </a:ln>
+          <a:effectLst/>
+        </p:spPr>
+        <p:style>
+          <a:lnRef idx="1">
+            <a:schemeClr val="accent1"/>
+          </a:lnRef>
+          <a:fillRef idx="3">
+            <a:schemeClr val="accent1"/>
+          </a:fillRef>
+          <a:effectRef idx="2">
+            <a:schemeClr val="accent1"/>
+          </a:effectRef>
+          <a:fontRef idx="minor">
+            <a:schemeClr val="lt1"/>
+          </a:fontRef>
+        </p:style>
+        <p:txBody>
+          <a:bodyPr rtlCol="0" anchor="ctr"/>
+          <a:lstStyle/>
+          <a:p>
+            <a:pPr algn="ctr"/>
+          </a:p>
+        </p:txBody>
+      </p:sp>
+      <p:sp>
+        <p:nvSpPr>
+          <p:cNvPr id="20" name="Rectangle 19"/>
+          <p:cNvSpPr/>
+          <p:nvPr/>
+        </p:nvSpPr>
+        <p:spPr>
+          <a:xfrm>
+            <a:off x="8168640" y="1051560"/>
+            <a:ext cx="3535680" cy="91440"/>
+          </a:xfrm>
+          <a:prstGeom prst="rect">
+            <a:avLst/>
+          </a:prstGeom>
+          <a:solidFill>
+            <a:srgbClr val="8A2BE2"/>
+          </a:solidFill>
+          <a:ln>
+            <a:noFill/>
+          </a:ln>
+          <a:effectLst/>
+        </p:spPr>
+        <p:style>
+          <a:lnRef idx="1">
+            <a:schemeClr val="accent1"/>
+          </a:lnRef>
+          <a:fillRef idx="3">
+            <a:schemeClr val="accent1"/>
+          </a:fillRef>
+          <a:effectRef idx="2">
+            <a:schemeClr val="accent1"/>
+          </a:effectRef>
+          <a:fontRef idx="minor">
+            <a:schemeClr val="lt1"/>
+          </a:fontRef>
+        </p:style>
+        <p:txBody>
+          <a:bodyPr rtlCol="0" anchor="ctr"/>
+          <a:lstStyle/>
+          <a:p>
+            <a:pPr algn="ctr"/>
+          </a:p>
+        </p:txBody>
+      </p:sp>
+      <p:sp>
+        <p:nvSpPr>
+          <p:cNvPr id="21" name="TextBox 20"/>
+          <p:cNvSpPr txBox="1"/>
+          <p:nvPr/>
+        </p:nvSpPr>
+        <p:spPr>
+          <a:xfrm>
+            <a:off x="8406384" y="1554480"/>
+            <a:ext cx="3060192" cy="457200"/>
+          </a:xfrm>
+          <a:prstGeom prst="rect">
+            <a:avLst/>
+          </a:prstGeom>
+          <a:noFill/>
+        </p:spPr>
+        <p:txBody>
+          <a:bodyPr wrap="square" anchor="t" lIns="0" rIns="0" tIns="0" bIns="0">
+            <a:spAutoFit/>
+          </a:bodyPr>
+          <a:lstStyle/>
+          <a:p>
+            <a:pPr algn="l"/>
+            <a:r>
+              <a:rPr sz="1600" b="1" i="0">
+                <a:solidFill>
+                  <a:srgbClr val="8A2BE2"/>
+                </a:solidFill>
+                <a:latin typeface="Geist Mono"/>
+              </a:rPr>
+              <a:t>WHAT SETTLES IT</a:t>
+            </a:r>
+          </a:p>
+        </p:txBody>
+      </p:sp>
+      <p:sp>
+        <p:nvSpPr>
+          <p:cNvPr id="22" name="TextBox 21"/>
+          <p:cNvSpPr txBox="1"/>
+          <p:nvPr/>
+        </p:nvSpPr>
+        <p:spPr>
+          <a:xfrm>
+            <a:off x="8406384" y="2194560"/>
+            <a:ext cx="3060192" cy="3154679"/>
+          </a:xfrm>
+          <a:prstGeom prst="rect">
+            <a:avLst/>
+          </a:prstGeom>
+          <a:noFill/>
+        </p:spPr>
+        <p:txBody>
+          <a:bodyPr wrap="square" anchor="t" lIns="0" rIns="0" tIns="0" bIns="0">
+            <a:spAutoFit/>
+          </a:bodyPr>
+          <a:lstStyle/>
+          <a:p>
+            <a:pPr algn="l"/>
+            <a:r>
+              <a:rPr sz="1500" b="0" i="0">
+                <a:solidFill>
+                  <a:srgbClr val="14141C"/>
+                </a:solidFill>
+                <a:latin typeface="Geist"/>
+              </a:rPr>
+              <a:t>A randomized trial: a coin flip, not the patient, assigns the drug, so the groups start the same. That is why WHIMS could overturn 20 years of headlines.</a:t>
+            </a:r>
+          </a:p>
+        </p:txBody>
+      </p:sp>
+      <p:sp>
+        <p:nvSpPr>
+          <p:cNvPr id="23" name="Rectangle 22"/>
+          <p:cNvSpPr/>
+          <p:nvPr/>
+        </p:nvSpPr>
+        <p:spPr>
+          <a:xfrm>
+            <a:off x="8168640" y="5257800"/>
+            <a:ext cx="3535680" cy="18288"/>
+          </a:xfrm>
+          <a:prstGeom prst="rect">
+            <a:avLst/>
+          </a:prstGeom>
+          <a:solidFill>
+            <a:srgbClr val="E4E1D9"/>
+          </a:solidFill>
+          <a:ln>
+            <a:noFill/>
+          </a:ln>
+          <a:effectLst/>
+        </p:spPr>
+        <p:style>
+          <a:lnRef idx="1">
+            <a:schemeClr val="accent1"/>
+          </a:lnRef>
+          <a:fillRef idx="3">
+            <a:schemeClr val="accent1"/>
+          </a:fillRef>
+          <a:effectRef idx="2">
+            <a:schemeClr val="accent1"/>
+          </a:effectRef>
+          <a:fontRef idx="minor">
+            <a:schemeClr val="lt1"/>
+          </a:fontRef>
+        </p:style>
+        <p:txBody>
+          <a:bodyPr rtlCol="0" anchor="ctr"/>
+          <a:lstStyle/>
+          <a:p>
+            <a:pPr algn="ctr"/>
+          </a:p>
+        </p:txBody>
+      </p:sp>
+      <p:sp>
+        <p:nvSpPr>
+          <p:cNvPr id="24" name="TextBox 23"/>
+          <p:cNvSpPr txBox="1"/>
+          <p:nvPr/>
+        </p:nvSpPr>
+        <p:spPr>
+          <a:xfrm>
+            <a:off x="8406384" y="5394960"/>
+            <a:ext cx="3060192" cy="548640"/>
+          </a:xfrm>
+          <a:prstGeom prst="rect">
+            <a:avLst/>
+          </a:prstGeom>
+          <a:noFill/>
+        </p:spPr>
+        <p:txBody>
+          <a:bodyPr wrap="square" anchor="ctr" lIns="0" rIns="0" tIns="0" bIns="0">
+            <a:spAutoFit/>
+          </a:bodyPr>
+          <a:lstStyle/>
+          <a:p>
+            <a:pPr algn="l"/>
+            <a:r>
+              <a:rPr sz="1400" b="1" i="0">
+                <a:solidFill>
+                  <a:srgbClr val="8A2BE2"/>
+                </a:solidFill>
+                <a:latin typeface="Geist Mono"/>
+              </a:rPr>
+              <a:t>only an experiment</a:t>
+            </a:r>
+          </a:p>
+        </p:txBody>
+      </p:sp>
+    </p:spTree>
+  </p:cSld>
+  <p:clrMapOvr>
+    <a:masterClrMapping/>
+  </p:clrMapOvr>
+</p:sld>
+</file>
+
+<file path=ppt/slides/slide21.xml><?xml version="1.0" encoding="utf-8"?>
+<p:sld xmlns:a="http://schemas.openxmlformats.org/drawingml/2006/main" xmlns:p="http://schemas.openxmlformats.org/presentationml/2006/main" xmlns:r="http://schemas.openxmlformats.org/officeDocument/2006/relationships">
+  <p:cSld>
+    <p:spTree>
+      <p:nvGrpSpPr>
+        <p:cNvPr id="1" name=""/>
+        <p:cNvGrpSpPr/>
+        <p:nvPr/>
+      </p:nvGrpSpPr>
+      <p:grpSpPr/>
+      <p:sp>
+        <p:nvSpPr>
+          <p:cNvPr id="2" name="Rectangle 1"/>
+          <p:cNvSpPr/>
+          <p:nvPr/>
+        </p:nvSpPr>
+        <p:spPr>
+          <a:xfrm>
+            <a:off x="0" y="0"/>
+            <a:ext cx="12191695" cy="6858000"/>
+          </a:xfrm>
+          <a:prstGeom prst="rect">
+            <a:avLst/>
+          </a:prstGeom>
+          <a:solidFill>
+            <a:srgbClr val="F6F4EE"/>
+          </a:solidFill>
+          <a:ln>
+            <a:noFill/>
+          </a:ln>
+          <a:effectLst/>
+        </p:spPr>
+        <p:style>
+          <a:lnRef idx="1">
+            <a:schemeClr val="accent1"/>
+          </a:lnRef>
+          <a:fillRef idx="3">
+            <a:schemeClr val="accent1"/>
+          </a:fillRef>
+          <a:effectRef idx="2">
+            <a:schemeClr val="accent1"/>
+          </a:effectRef>
+          <a:fontRef idx="minor">
+            <a:schemeClr val="lt1"/>
+          </a:fontRef>
+        </p:style>
+        <p:txBody>
+          <a:bodyPr rtlCol="0" anchor="ctr"/>
+          <a:lstStyle/>
+          <a:p>
+            <a:pPr algn="ctr"/>
+          </a:p>
+        </p:txBody>
+      </p:sp>
+      <p:sp>
+        <p:nvSpPr>
+          <p:cNvPr id="3" name="Rectangle 2"/>
+          <p:cNvSpPr/>
+          <p:nvPr/>
+        </p:nvSpPr>
+        <p:spPr>
+          <a:xfrm>
+            <a:off x="0" y="0"/>
+            <a:ext cx="201168" cy="6858000"/>
+          </a:xfrm>
+          <a:prstGeom prst="rect">
+            <a:avLst/>
+          </a:prstGeom>
+          <a:solidFill>
+            <a:srgbClr val="40E0D0"/>
+          </a:solidFill>
+          <a:ln>
+            <a:noFill/>
+          </a:ln>
+          <a:effectLst/>
+        </p:spPr>
+        <p:style>
+          <a:lnRef idx="1">
+            <a:schemeClr val="accent1"/>
+          </a:lnRef>
+          <a:fillRef idx="3">
+            <a:schemeClr val="accent1"/>
+          </a:fillRef>
+          <a:effectRef idx="2">
+            <a:schemeClr val="accent1"/>
+          </a:effectRef>
+          <a:fontRef idx="minor">
+            <a:schemeClr val="lt1"/>
+          </a:fontRef>
+        </p:style>
+        <p:txBody>
+          <a:bodyPr rtlCol="0" anchor="ctr"/>
+          <a:lstStyle/>
+          <a:p>
+            <a:pPr algn="ctr"/>
+          </a:p>
+        </p:txBody>
+      </p:sp>
+      <p:sp>
+        <p:nvSpPr>
+          <p:cNvPr id="4" name="TextBox 3"/>
+          <p:cNvSpPr txBox="1"/>
+          <p:nvPr/>
+        </p:nvSpPr>
+        <p:spPr>
+          <a:xfrm>
+            <a:off x="457200" y="274320"/>
+            <a:ext cx="11247120" cy="502920"/>
+          </a:xfrm>
+          <a:prstGeom prst="rect">
+            <a:avLst/>
+          </a:prstGeom>
+          <a:noFill/>
+        </p:spPr>
+        <p:txBody>
+          <a:bodyPr wrap="square" anchor="t" lIns="0" rIns="0" tIns="0" bIns="0">
+            <a:spAutoFit/>
+          </a:bodyPr>
+          <a:lstStyle/>
+          <a:p>
+            <a:pPr algn="l"/>
+            <a:r>
+              <a:rPr sz="2800" b="1" i="0">
+                <a:solidFill>
+                  <a:srgbClr val="14141C"/>
+                </a:solidFill>
+                <a:latin typeface="Geist Mono"/>
+              </a:rPr>
+              <a:t>References</a:t>
+            </a:r>
+          </a:p>
+        </p:txBody>
+      </p:sp>
+      <p:sp>
+        <p:nvSpPr>
+          <p:cNvPr id="5" name="Rectangle 4"/>
+          <p:cNvSpPr/>
+          <p:nvPr/>
+        </p:nvSpPr>
+        <p:spPr>
+          <a:xfrm>
+            <a:off x="457200" y="868680"/>
+            <a:ext cx="11247120" cy="4572"/>
+          </a:xfrm>
+          <a:prstGeom prst="rect">
+            <a:avLst/>
+          </a:prstGeom>
+          <a:solidFill>
+            <a:srgbClr val="DDDDDD"/>
+          </a:solidFill>
+          <a:ln>
+            <a:noFill/>
+          </a:ln>
+          <a:effectLst/>
+        </p:spPr>
+        <p:style>
+          <a:lnRef idx="1">
+            <a:schemeClr val="accent1"/>
+          </a:lnRef>
+          <a:fillRef idx="3">
+            <a:schemeClr val="accent1"/>
+          </a:fillRef>
+          <a:effectRef idx="2">
+            <a:schemeClr val="accent1"/>
+          </a:effectRef>
+          <a:fontRef idx="minor">
+            <a:schemeClr val="lt1"/>
+          </a:fontRef>
+        </p:style>
+        <p:txBody>
+          <a:bodyPr rtlCol="0" anchor="ctr"/>
+          <a:lstStyle/>
+          <a:p>
+            <a:pPr algn="ctr"/>
+          </a:p>
+        </p:txBody>
+      </p:sp>
+      <p:sp>
+        <p:nvSpPr>
+          <p:cNvPr id="6" name="TextBox 5"/>
+          <p:cNvSpPr txBox="1"/>
+          <p:nvPr/>
+        </p:nvSpPr>
+        <p:spPr>
+          <a:xfrm>
+            <a:off x="457200" y="6510528"/>
+            <a:ext cx="11247120" cy="274320"/>
+          </a:xfrm>
+          <a:prstGeom prst="rect">
+            <a:avLst/>
+          </a:prstGeom>
+          <a:noFill/>
+        </p:spPr>
+        <p:txBody>
+          <a:bodyPr wrap="square" anchor="t" lIns="0" rIns="0" tIns="0" bIns="0">
+            <a:spAutoFit/>
+          </a:bodyPr>
+          <a:lstStyle/>
+          <a:p>
+            <a:pPr algn="l"/>
+            <a:r>
+              <a:rPr sz="900" b="0" i="0">
+                <a:solidFill>
+                  <a:srgbClr val="555560"/>
+                </a:solidFill>
+                <a:latin typeface="Geist Mono"/>
+              </a:rPr>
+              <a:t>Jinchi Wei  ·  Outset  ·  Does estrogen keep older women's minds sharp?  ·  2026-07-08</a:t>
+            </a:r>
+          </a:p>
+        </p:txBody>
+      </p:sp>
+      <p:sp>
+        <p:nvSpPr>
+          <p:cNvPr id="7" name="TextBox 6"/>
+          <p:cNvSpPr txBox="1"/>
+          <p:nvPr/>
+        </p:nvSpPr>
+        <p:spPr>
+          <a:xfrm>
+            <a:off x="457200" y="1097280"/>
+            <a:ext cx="5349240" cy="365760"/>
+          </a:xfrm>
+          <a:prstGeom prst="rect">
+            <a:avLst/>
+          </a:prstGeom>
+          <a:noFill/>
+        </p:spPr>
+        <p:txBody>
+          <a:bodyPr wrap="square" anchor="t" lIns="0" rIns="0" tIns="0" bIns="0">
+            <a:spAutoFit/>
+          </a:bodyPr>
+          <a:lstStyle/>
+          <a:p>
+            <a:pPr algn="l"/>
+            <a:r>
+              <a:rPr sz="1600" b="1" i="0">
+                <a:solidFill>
+                  <a:srgbClr val="40E0D0"/>
+                </a:solidFill>
+                <a:latin typeface="Geist Mono"/>
+              </a:rPr>
+              <a:t>OBSERVATIONAL &amp; TRIAL</a:t>
+            </a:r>
+          </a:p>
+        </p:txBody>
+      </p:sp>
+      <p:sp>
+        <p:nvSpPr>
+          <p:cNvPr id="8" name="TextBox 7"/>
+          <p:cNvSpPr txBox="1"/>
+          <p:nvPr/>
+        </p:nvSpPr>
+        <p:spPr>
+          <a:xfrm>
+            <a:off x="457200" y="1600200"/>
+            <a:ext cx="5349240" cy="4571999"/>
+          </a:xfrm>
+          <a:prstGeom prst="rect">
+            <a:avLst/>
+          </a:prstGeom>
+          <a:noFill/>
+        </p:spPr>
+        <p:txBody>
+          <a:bodyPr wrap="square" anchor="t" lIns="0" rIns="0" tIns="0" bIns="0">
+            <a:spAutoFit/>
+          </a:bodyPr>
+          <a:lstStyle/>
+          <a:p>
+            <a:pPr algn="l"/>
+            <a:r>
+              <a:rPr sz="1400" b="0" i="0">
+                <a:solidFill>
+                  <a:srgbClr val="14141C"/>
+                </a:solidFill>
+                <a:latin typeface="Geist"/>
+              </a:rPr>
+              <a:t>[1] Tang et al. 1996, Lancet -- observational; users got Alzheimer's less/later.
+[2] Zandi et al. 2002, JAMA (Cache County) -- observational; long-term users lower risk.
+[3] Shumaker et al. 2003, JAMA -- WHIMS RCT; hormones DOUBLED dementia risk in 65+.
+[4] Rapp et al. 2003, JAMA -- WHIMS RCT; no cognitive benefit, scores trended worse.</a:t>
+            </a:r>
+          </a:p>
+        </p:txBody>
+      </p:sp>
+      <p:sp>
+        <p:nvSpPr>
+          <p:cNvPr id="9" name="TextBox 8"/>
+          <p:cNvSpPr txBox="1"/>
+          <p:nvPr/>
+        </p:nvSpPr>
+        <p:spPr>
+          <a:xfrm>
+            <a:off x="6355080" y="1097280"/>
+            <a:ext cx="5349240" cy="365760"/>
+          </a:xfrm>
+          <a:prstGeom prst="rect">
+            <a:avLst/>
+          </a:prstGeom>
+          <a:noFill/>
+        </p:spPr>
+        <p:txBody>
+          <a:bodyPr wrap="square" anchor="t" lIns="0" rIns="0" tIns="0" bIns="0">
+            <a:spAutoFit/>
+          </a:bodyPr>
+          <a:lstStyle/>
+          <a:p>
+            <a:pPr algn="l"/>
+            <a:r>
+              <a:rPr sz="1600" b="1" i="0">
+                <a:solidFill>
+                  <a:srgbClr val="FF1493"/>
+                </a:solidFill>
+                <a:latin typeface="Geist Mono"/>
+              </a:rPr>
+              <a:t>BIAS &amp; SYMPTOMS</a:t>
+            </a:r>
+          </a:p>
+        </p:txBody>
+      </p:sp>
+      <p:sp>
+        <p:nvSpPr>
+          <p:cNvPr id="10" name="TextBox 9"/>
+          <p:cNvSpPr txBox="1"/>
+          <p:nvPr/>
+        </p:nvSpPr>
+        <p:spPr>
+          <a:xfrm>
+            <a:off x="6355080" y="1600200"/>
+            <a:ext cx="5349240" cy="4571999"/>
+          </a:xfrm>
+          <a:prstGeom prst="rect">
+            <a:avLst/>
+          </a:prstGeom>
+          <a:noFill/>
+        </p:spPr>
+        <p:txBody>
+          <a:bodyPr wrap="square" anchor="t" lIns="0" rIns="0" tIns="0" bIns="0">
+            <a:spAutoFit/>
+          </a:bodyPr>
+          <a:lstStyle/>
+          <a:p>
+            <a:pPr algn="l"/>
+            <a:r>
+              <a:rPr sz="1400" b="0" i="0">
+                <a:solidFill>
+                  <a:srgbClr val="14141C"/>
+                </a:solidFill>
+                <a:latin typeface="Geist"/>
+              </a:rPr>
+              <a:t>[5] Wharton et al. 2009, Maturitas -- healthy-user bias; users start out healthier.
+[6] Vandenbroucke 2009, Lancet -- why observational studies and RCTs disagreed.
+[7] Maki 2024, Harvard Health -- menopause brain fog vs. normal test scores.
+[8] Chen &amp; Shafir 2025, Harvard Health -- the dismissal of women's symptoms.</a:t>
+            </a:r>
+          </a:p>
+        </p:txBody>
+      </p:sp>
+    </p:spTree>
+  </p:cSld>
+  <p:clrMapOvr>
+    <a:masterClrMapping/>
+  </p:clrMapOvr>
+</p:sld>
+</file>
+
+<file path=ppt/slides/slide22.xml><?xml version="1.0" encoding="utf-8"?>
+<p:sld xmlns:a="http://schemas.openxmlformats.org/drawingml/2006/main" xmlns:p="http://schemas.openxmlformats.org/presentationml/2006/main" xmlns:r="http://schemas.openxmlformats.org/officeDocument/2006/relationships">
+  <p:cSld>
+    <p:spTree>
+      <p:nvGrpSpPr>
+        <p:cNvPr id="1" name=""/>
+        <p:cNvGrpSpPr/>
+        <p:nvPr/>
+      </p:nvGrpSpPr>
+      <p:grpSpPr/>
+      <p:sp>
+        <p:nvSpPr>
+          <p:cNvPr id="2" name="Rectangle 1"/>
+          <p:cNvSpPr/>
+          <p:nvPr/>
+        </p:nvSpPr>
+        <p:spPr>
+          <a:xfrm>
+            <a:off x="0" y="0"/>
+            <a:ext cx="12191695" cy="6858000"/>
+          </a:xfrm>
+          <a:prstGeom prst="rect">
+            <a:avLst/>
+          </a:prstGeom>
+          <a:solidFill>
+            <a:srgbClr val="F6F4EE"/>
+          </a:solidFill>
+          <a:ln>
+            <a:noFill/>
+          </a:ln>
+          <a:effectLst/>
+        </p:spPr>
+        <p:style>
+          <a:lnRef idx="1">
+            <a:schemeClr val="accent1"/>
+          </a:lnRef>
+          <a:fillRef idx="3">
+            <a:schemeClr val="accent1"/>
+          </a:fillRef>
+          <a:effectRef idx="2">
+            <a:schemeClr val="accent1"/>
+          </a:effectRef>
+          <a:fontRef idx="minor">
+            <a:schemeClr val="lt1"/>
+          </a:fontRef>
+        </p:style>
+        <p:txBody>
+          <a:bodyPr rtlCol="0" anchor="ctr"/>
+          <a:lstStyle/>
+          <a:p>
+            <a:pPr algn="ctr"/>
+          </a:p>
+        </p:txBody>
+      </p:sp>
+      <p:sp>
+        <p:nvSpPr>
+          <p:cNvPr id="3" name="Rectangle 2"/>
+          <p:cNvSpPr/>
+          <p:nvPr/>
+        </p:nvSpPr>
+        <p:spPr>
+          <a:xfrm>
+            <a:off x="0" y="0"/>
+            <a:ext cx="201168" cy="6858000"/>
+          </a:xfrm>
+          <a:prstGeom prst="rect">
+            <a:avLst/>
+          </a:prstGeom>
+          <a:solidFill>
+            <a:srgbClr val="40E0D0"/>
+          </a:solidFill>
+          <a:ln>
+            <a:noFill/>
+          </a:ln>
+          <a:effectLst/>
+        </p:spPr>
+        <p:style>
+          <a:lnRef idx="1">
+            <a:schemeClr val="accent1"/>
+          </a:lnRef>
+          <a:fillRef idx="3">
+            <a:schemeClr val="accent1"/>
+          </a:fillRef>
+          <a:effectRef idx="2">
+            <a:schemeClr val="accent1"/>
+          </a:effectRef>
+          <a:fontRef idx="minor">
+            <a:schemeClr val="lt1"/>
+          </a:fontRef>
+        </p:style>
+        <p:txBody>
+          <a:bodyPr rtlCol="0" anchor="ctr"/>
+          <a:lstStyle/>
+          <a:p>
+            <a:pPr algn="ctr"/>
+          </a:p>
+        </p:txBody>
+      </p:sp>
+      <p:sp>
+        <p:nvSpPr>
+          <p:cNvPr id="4" name="TextBox 3"/>
+          <p:cNvSpPr txBox="1"/>
+          <p:nvPr/>
+        </p:nvSpPr>
+        <p:spPr>
+          <a:xfrm>
+            <a:off x="457200" y="274320"/>
+            <a:ext cx="11247120" cy="502920"/>
+          </a:xfrm>
+          <a:prstGeom prst="rect">
+            <a:avLst/>
+          </a:prstGeom>
+          <a:noFill/>
+        </p:spPr>
+        <p:txBody>
+          <a:bodyPr wrap="square" anchor="t" lIns="0" rIns="0" tIns="0" bIns="0">
+            <a:spAutoFit/>
+          </a:bodyPr>
+          <a:lstStyle/>
+          <a:p>
+            <a:pPr algn="l"/>
+            <a:r>
+              <a:rPr sz="2800" b="1" i="0">
+                <a:solidFill>
+                  <a:srgbClr val="14141C"/>
+                </a:solidFill>
+                <a:latin typeface="Geist Mono"/>
+              </a:rPr>
+              <a:t>The one habit to carry with you</a:t>
+            </a:r>
+          </a:p>
+        </p:txBody>
+      </p:sp>
+      <p:sp>
+        <p:nvSpPr>
+          <p:cNvPr id="5" name="Rectangle 4"/>
+          <p:cNvSpPr/>
+          <p:nvPr/>
+        </p:nvSpPr>
+        <p:spPr>
+          <a:xfrm>
+            <a:off x="457200" y="868680"/>
+            <a:ext cx="11247120" cy="4572"/>
+          </a:xfrm>
+          <a:prstGeom prst="rect">
+            <a:avLst/>
+          </a:prstGeom>
+          <a:solidFill>
+            <a:srgbClr val="DDDDDD"/>
+          </a:solidFill>
+          <a:ln>
+            <a:noFill/>
+          </a:ln>
+          <a:effectLst/>
+        </p:spPr>
+        <p:style>
+          <a:lnRef idx="1">
+            <a:schemeClr val="accent1"/>
+          </a:lnRef>
+          <a:fillRef idx="3">
+            <a:schemeClr val="accent1"/>
+          </a:fillRef>
+          <a:effectRef idx="2">
+            <a:schemeClr val="accent1"/>
+          </a:effectRef>
+          <a:fontRef idx="minor">
+            <a:schemeClr val="lt1"/>
+          </a:fontRef>
+        </p:style>
+        <p:txBody>
+          <a:bodyPr rtlCol="0" anchor="ctr"/>
+          <a:lstStyle/>
+          <a:p>
+            <a:pPr algn="ctr"/>
+          </a:p>
+        </p:txBody>
+      </p:sp>
+      <p:sp>
+        <p:nvSpPr>
+          <p:cNvPr id="6" name="TextBox 5"/>
+          <p:cNvSpPr txBox="1"/>
+          <p:nvPr/>
+        </p:nvSpPr>
+        <p:spPr>
+          <a:xfrm>
+            <a:off x="457200" y="6510528"/>
+            <a:ext cx="11247120" cy="274320"/>
+          </a:xfrm>
+          <a:prstGeom prst="rect">
+            <a:avLst/>
+          </a:prstGeom>
+          <a:noFill/>
+        </p:spPr>
+        <p:txBody>
+          <a:bodyPr wrap="square" anchor="t" lIns="0" rIns="0" tIns="0" bIns="0">
+            <a:spAutoFit/>
+          </a:bodyPr>
+          <a:lstStyle/>
+          <a:p>
+            <a:pPr algn="l"/>
+            <a:r>
+              <a:rPr sz="900" b="0" i="0">
+                <a:solidFill>
+                  <a:srgbClr val="555560"/>
+                </a:solidFill>
+                <a:latin typeface="Geist Mono"/>
+              </a:rPr>
+              <a:t>Jinchi Wei  ·  Outset  ·  Does estrogen keep older women's minds sharp?  ·  2026-07-08</a:t>
+            </a:r>
+          </a:p>
+        </p:txBody>
+      </p:sp>
+      <p:sp>
+        <p:nvSpPr>
+          <p:cNvPr id="7" name="Rectangle 6"/>
+          <p:cNvSpPr/>
+          <p:nvPr/>
+        </p:nvSpPr>
+        <p:spPr>
+          <a:xfrm>
+            <a:off x="457200" y="1885492"/>
+            <a:ext cx="146304" cy="1371600"/>
+          </a:xfrm>
+          <a:prstGeom prst="rect">
+            <a:avLst/>
+          </a:prstGeom>
+          <a:solidFill>
+            <a:srgbClr val="40E0D0"/>
+          </a:solidFill>
+          <a:ln>
+            <a:noFill/>
+          </a:ln>
+          <a:effectLst/>
+        </p:spPr>
+        <p:style>
+          <a:lnRef idx="1">
+            <a:schemeClr val="accent1"/>
+          </a:lnRef>
+          <a:fillRef idx="3">
+            <a:schemeClr val="accent1"/>
+          </a:fillRef>
+          <a:effectRef idx="2">
+            <a:schemeClr val="accent1"/>
+          </a:effectRef>
+          <a:fontRef idx="minor">
+            <a:schemeClr val="lt1"/>
+          </a:fontRef>
+        </p:style>
+        <p:txBody>
+          <a:bodyPr rtlCol="0" anchor="ctr"/>
+          <a:lstStyle/>
+          <a:p>
+            <a:pPr algn="ctr"/>
+          </a:p>
+        </p:txBody>
+      </p:sp>
+      <p:sp>
+        <p:nvSpPr>
+          <p:cNvPr id="8" name="TextBox 7"/>
+          <p:cNvSpPr txBox="1"/>
+          <p:nvPr/>
+        </p:nvSpPr>
+        <p:spPr>
+          <a:xfrm>
+            <a:off x="914400" y="1748332"/>
+            <a:ext cx="10698480" cy="1371600"/>
+          </a:xfrm>
+          <a:prstGeom prst="rect">
+            <a:avLst/>
+          </a:prstGeom>
+          <a:noFill/>
+        </p:spPr>
+        <p:txBody>
+          <a:bodyPr wrap="square" anchor="t" lIns="0" rIns="0" tIns="0" bIns="0">
+            <a:spAutoFit/>
+          </a:bodyPr>
+          <a:lstStyle/>
+          <a:p>
+            <a:pPr algn="l"/>
+            <a:r>
+              <a:rPr sz="3800" b="1" i="0">
+                <a:solidFill>
+                  <a:srgbClr val="14141C"/>
+                </a:solidFill>
+                <a:latin typeface="Geist Mono"/>
+              </a:rPr>
+              <a:t>Suspect the chooser, not the treatment.</a:t>
+            </a:r>
+          </a:p>
+        </p:txBody>
+      </p:sp>
+      <p:sp>
+        <p:nvSpPr>
+          <p:cNvPr id="9" name="TextBox 8"/>
+          <p:cNvSpPr txBox="1"/>
+          <p:nvPr/>
+        </p:nvSpPr>
+        <p:spPr>
+          <a:xfrm>
+            <a:off x="914400" y="3439972"/>
+            <a:ext cx="10332720" cy="1188720"/>
+          </a:xfrm>
+          <a:prstGeom prst="rect">
+            <a:avLst/>
+          </a:prstGeom>
+          <a:noFill/>
+        </p:spPr>
+        <p:txBody>
+          <a:bodyPr wrap="square" anchor="t" lIns="0" rIns="0" tIns="0" bIns="0">
+            <a:spAutoFit/>
+          </a:bodyPr>
+          <a:lstStyle/>
+          <a:p>
+            <a:pPr algn="l"/>
+            <a:r>
+              <a:rPr sz="1900" b="0" i="0">
+                <a:solidFill>
+                  <a:srgbClr val="14141C"/>
+                </a:solidFill>
+                <a:latin typeface="Geist"/>
+              </a:rPr>
+              <a:t>When a group that CHOSE a treatment looks healthier, the head start usually belongs to the person, not the pill -- and only a coin-flip experiment can promote a correlation to a cause.</a:t>
+            </a:r>
+          </a:p>
+        </p:txBody>
+      </p:sp>
+      <p:sp>
+        <p:nvSpPr>
+          <p:cNvPr id="10" name="TextBox 9"/>
+          <p:cNvSpPr txBox="1"/>
+          <p:nvPr/>
+        </p:nvSpPr>
+        <p:spPr>
+          <a:xfrm>
+            <a:off x="914400" y="4720132"/>
+            <a:ext cx="10332720" cy="640080"/>
+          </a:xfrm>
+          <a:prstGeom prst="rect">
+            <a:avLst/>
+          </a:prstGeom>
+          <a:noFill/>
+        </p:spPr>
+        <p:txBody>
+          <a:bodyPr wrap="square" anchor="t" lIns="0" rIns="0" tIns="0" bIns="0">
+            <a:spAutoFit/>
+          </a:bodyPr>
+          <a:lstStyle/>
+          <a:p>
+            <a:pPr algn="l"/>
+            <a:r>
+              <a:rPr sz="1900" b="1" i="0">
+                <a:solidFill>
+                  <a:srgbClr val="FF1493"/>
+                </a:solidFill>
+                <a:latin typeface="Geist Mono"/>
+              </a:rPr>
+              <a:t>And take the patient's account seriously -- even when the test says "fine."</a:t>
+            </a:r>
+          </a:p>
+        </p:txBody>
+      </p:sp>
+    </p:spTree>
+  </p:cSld>
+  <p:clrMapOvr>
+    <a:masterClrMapping/>
+  </p:clrMapOvr>
+</p:sld>
+</file>
+
+<file path=ppt/slides/slide23.xml><?xml version="1.0" encoding="utf-8"?>
+<p:sld xmlns:a="http://schemas.openxmlformats.org/drawingml/2006/main" xmlns:p="http://schemas.openxmlformats.org/presentationml/2006/main" xmlns:r="http://schemas.openxmlformats.org/officeDocument/2006/relationships">
+  <p:cSld>
+    <p:bg>
+      <p:bgPr>
+        <a:solidFill>
+          <a:srgbClr val="0E1A35"/>
+        </a:solidFill>
+        <a:effectLst/>
+      </p:bgPr>
+    </p:bg>
+    <p:spTree>
+      <p:nvGrpSpPr>
+        <p:cNvPr id="1" name=""/>
+        <p:cNvGrpSpPr/>
+        <p:nvPr/>
+      </p:nvGrpSpPr>
+      <p:grpSpPr/>
+      <p:sp>
+        <p:nvSpPr>
+          <p:cNvPr id="2" name="Rectangle 1"/>
+          <p:cNvSpPr/>
+          <p:nvPr/>
+        </p:nvSpPr>
+        <p:spPr>
+          <a:xfrm>
+            <a:off x="0" y="0"/>
+            <a:ext cx="12191695" cy="6858000"/>
+          </a:xfrm>
+          <a:prstGeom prst="rect">
+            <a:avLst/>
+          </a:prstGeom>
+          <a:solidFill>
+            <a:srgbClr val="0E1A35"/>
+          </a:solidFill>
+          <a:ln>
+            <a:noFill/>
+          </a:ln>
+          <a:effectLst/>
+        </p:spPr>
+        <p:style>
+          <a:lnRef idx="1">
+            <a:schemeClr val="accent1"/>
+          </a:lnRef>
+          <a:fillRef idx="3">
+            <a:schemeClr val="accent1"/>
+          </a:fillRef>
+          <a:effectRef idx="2">
+            <a:schemeClr val="accent1"/>
+          </a:effectRef>
+          <a:fontRef idx="minor">
+            <a:schemeClr val="lt1"/>
+          </a:fontRef>
+        </p:style>
+        <p:txBody>
+          <a:bodyPr rtlCol="0" anchor="ctr"/>
+          <a:lstStyle/>
+          <a:p>
+            <a:pPr algn="ctr"/>
+          </a:p>
+        </p:txBody>
+      </p:sp>
+      <p:sp>
+        <p:nvSpPr>
+          <p:cNvPr id="3" name="Rectangle 2"/>
+          <p:cNvSpPr/>
+          <p:nvPr/>
+        </p:nvSpPr>
+        <p:spPr>
+          <a:xfrm>
+            <a:off x="0" y="0"/>
+            <a:ext cx="731520" cy="6858000"/>
+          </a:xfrm>
+          <a:prstGeom prst="rect">
+            <a:avLst/>
+          </a:prstGeom>
+          <a:solidFill>
+            <a:srgbClr val="40E0D0"/>
+          </a:solidFill>
+          <a:ln>
+            <a:noFill/>
+          </a:ln>
+          <a:effectLst/>
+        </p:spPr>
+        <p:style>
+          <a:lnRef idx="1">
+            <a:schemeClr val="accent1"/>
+          </a:lnRef>
+          <a:fillRef idx="3">
+            <a:schemeClr val="accent1"/>
+          </a:fillRef>
+          <a:effectRef idx="2">
+            <a:schemeClr val="accent1"/>
+          </a:effectRef>
+          <a:fontRef idx="minor">
+            <a:schemeClr val="lt1"/>
+          </a:fontRef>
+        </p:style>
+        <p:txBody>
+          <a:bodyPr rtlCol="0" anchor="ctr"/>
+          <a:lstStyle/>
+          <a:p>
+            <a:pPr algn="ctr"/>
+          </a:p>
+        </p:txBody>
+      </p:sp>
+      <p:sp>
+        <p:nvSpPr>
+          <p:cNvPr id="4" name="Rectangle 3"/>
+          <p:cNvSpPr/>
+          <p:nvPr/>
+        </p:nvSpPr>
+        <p:spPr>
+          <a:xfrm>
+            <a:off x="731520" y="0"/>
+            <a:ext cx="228600" cy="6858000"/>
+          </a:xfrm>
+          <a:prstGeom prst="rect">
+            <a:avLst/>
+          </a:prstGeom>
+          <a:solidFill>
+            <a:srgbClr val="FF1493"/>
+          </a:solidFill>
+          <a:ln>
+            <a:noFill/>
+          </a:ln>
+          <a:effectLst/>
+        </p:spPr>
+        <p:style>
+          <a:lnRef idx="1">
+            <a:schemeClr val="accent1"/>
+          </a:lnRef>
+          <a:fillRef idx="3">
+            <a:schemeClr val="accent1"/>
+          </a:fillRef>
+          <a:effectRef idx="2">
+            <a:schemeClr val="accent1"/>
+          </a:effectRef>
+          <a:fontRef idx="minor">
+            <a:schemeClr val="lt1"/>
+          </a:fontRef>
+        </p:style>
+        <p:txBody>
+          <a:bodyPr rtlCol="0" anchor="ctr"/>
+          <a:lstStyle/>
+          <a:p>
+            <a:pPr algn="ctr"/>
+          </a:p>
+        </p:txBody>
+      </p:sp>
+      <p:sp>
+        <p:nvSpPr>
+          <p:cNvPr id="5" name="TextBox 4"/>
+          <p:cNvSpPr txBox="1"/>
+          <p:nvPr/>
+        </p:nvSpPr>
+        <p:spPr>
+          <a:xfrm>
+            <a:off x="1188720" y="1417320"/>
+            <a:ext cx="10058400" cy="1280160"/>
+          </a:xfrm>
+          <a:prstGeom prst="rect">
+            <a:avLst/>
+          </a:prstGeom>
+          <a:noFill/>
+        </p:spPr>
+        <p:txBody>
+          <a:bodyPr wrap="square" anchor="t" lIns="0" rIns="0" tIns="0" bIns="0">
+            <a:spAutoFit/>
+          </a:bodyPr>
+          <a:lstStyle/>
+          <a:p>
+            <a:pPr algn="ctr"/>
+            <a:r>
+              <a:rPr sz="6000" b="1" i="0">
+                <a:solidFill>
+                  <a:srgbClr val="FF1493"/>
+                </a:solidFill>
+                <a:latin typeface="Geist Mono"/>
+              </a:rPr>
+              <a:t>Thank You</a:t>
+            </a:r>
+          </a:p>
+        </p:txBody>
+      </p:sp>
+      <p:sp>
+        <p:nvSpPr>
+          <p:cNvPr id="6" name="TextBox 5"/>
+          <p:cNvSpPr txBox="1"/>
+          <p:nvPr/>
+        </p:nvSpPr>
+        <p:spPr>
+          <a:xfrm>
+            <a:off x="1188720" y="3246120"/>
+            <a:ext cx="10058400" cy="640080"/>
+          </a:xfrm>
+          <a:prstGeom prst="rect">
+            <a:avLst/>
+          </a:prstGeom>
+          <a:noFill/>
+        </p:spPr>
+        <p:txBody>
+          <a:bodyPr wrap="square" anchor="t" lIns="0" rIns="0" tIns="0" bIns="0">
+            <a:spAutoFit/>
+          </a:bodyPr>
+          <a:lstStyle/>
+          <a:p>
+            <a:pPr algn="ctr"/>
+            <a:r>
+              <a:rPr sz="3000" b="0" i="0">
+                <a:solidFill>
+                  <a:srgbClr val="40E0D0"/>
+                </a:solidFill>
+                <a:latin typeface="Noto Sans CJK TC"/>
+              </a:rPr>
+              <a:t>魏晉祺</a:t>
+            </a:r>
+          </a:p>
+        </p:txBody>
+      </p:sp>
+      <p:sp>
+        <p:nvSpPr>
+          <p:cNvPr id="7" name="TextBox 6"/>
+          <p:cNvSpPr txBox="1"/>
+          <p:nvPr/>
+        </p:nvSpPr>
+        <p:spPr>
+          <a:xfrm>
+            <a:off x="1188720" y="3922776"/>
+            <a:ext cx="10058400" cy="457200"/>
+          </a:xfrm>
+          <a:prstGeom prst="rect">
+            <a:avLst/>
+          </a:prstGeom>
+          <a:noFill/>
+        </p:spPr>
+        <p:txBody>
+          <a:bodyPr wrap="square" anchor="t" lIns="0" rIns="0" tIns="0" bIns="0">
+            <a:spAutoFit/>
+          </a:bodyPr>
+          <a:lstStyle/>
+          <a:p>
+            <a:pPr algn="ctr"/>
+            <a:r>
+              <a:rPr sz="2000" b="1" i="0">
+                <a:solidFill>
+                  <a:srgbClr val="40E0D0"/>
+                </a:solidFill>
+                <a:latin typeface="Geist Mono"/>
+              </a:rPr>
+              <a:t>Jinchi Wei</a:t>
+            </a:r>
+          </a:p>
+        </p:txBody>
+      </p:sp>
+      <p:sp>
+        <p:nvSpPr>
+          <p:cNvPr id="8" name="TextBox 7"/>
+          <p:cNvSpPr txBox="1"/>
+          <p:nvPr/>
+        </p:nvSpPr>
+        <p:spPr>
+          <a:xfrm>
+            <a:off x="1188720" y="4398264"/>
+            <a:ext cx="10058400" cy="365760"/>
+          </a:xfrm>
+          <a:prstGeom prst="rect">
+            <a:avLst/>
+          </a:prstGeom>
+          <a:noFill/>
+        </p:spPr>
+        <p:txBody>
+          <a:bodyPr wrap="square" anchor="t" lIns="0" rIns="0" tIns="0" bIns="0">
+            <a:spAutoFit/>
+          </a:bodyPr>
+          <a:lstStyle/>
+          <a:p>
+            <a:pPr algn="ctr"/>
+            <a:r>
+              <a:rPr sz="1300" b="0" i="0">
+                <a:solidFill>
+                  <a:srgbClr val="FFFFFF"/>
+                </a:solidFill>
+                <a:latin typeface="Geist"/>
+              </a:rPr>
+              <a:t>Outset</a:t>
+            </a:r>
+          </a:p>
+        </p:txBody>
+      </p:sp>
+      <p:sp>
+        <p:nvSpPr>
+          <p:cNvPr id="9" name="TextBox 8"/>
+          <p:cNvSpPr txBox="1"/>
+          <p:nvPr/>
+        </p:nvSpPr>
+        <p:spPr>
+          <a:xfrm>
+            <a:off x="1188720" y="4837176"/>
+            <a:ext cx="10058400" cy="365760"/>
+          </a:xfrm>
+          <a:prstGeom prst="rect">
+            <a:avLst/>
+          </a:prstGeom>
+          <a:noFill/>
+        </p:spPr>
+        <p:txBody>
+          <a:bodyPr wrap="square" anchor="t" lIns="0" rIns="0" tIns="0" bIns="0">
+            <a:spAutoFit/>
+          </a:bodyPr>
+          <a:lstStyle/>
+          <a:p>
+            <a:pPr algn="ctr"/>
+            <a:r>
+              <a:rPr sz="1600" b="0" i="0">
+                <a:solidFill>
+                  <a:srgbClr val="F0C840"/>
+                </a:solidFill>
+                <a:latin typeface="Geist Mono"/>
+              </a:rPr>
+              <a:t>jinchikwei@gmail.com</a:t>
+            </a:r>
+          </a:p>
+        </p:txBody>
+      </p:sp>
+      <p:pic>
+        <p:nvPicPr>
+          <p:cNvPr id="10" name="Picture 9" descr="meng.png"/>
+          <p:cNvPicPr>
+            <a:picLocks noChangeAspect="1"/>
+          </p:cNvPicPr>
+          <p:nvPr/>
+        </p:nvPicPr>
+        <p:blipFill>
+          <a:blip r:embed="rId2"/>
+          <a:stretch>
+            <a:fillRect/>
+          </a:stretch>
+        </p:blipFill>
+        <p:spPr>
+          <a:xfrm>
+            <a:off x="10086477" y="5486400"/>
+            <a:ext cx="690906" cy="914400"/>
+          </a:xfrm>
+          <a:prstGeom prst="rect">
+            <a:avLst/>
+          </a:prstGeom>
+        </p:spPr>
+      </p:pic>
+      <p:pic>
+        <p:nvPicPr>
+          <p:cNvPr id="11" name="Picture 10" descr="xiang.png"/>
+          <p:cNvPicPr>
+            <a:picLocks noChangeAspect="1"/>
+          </p:cNvPicPr>
+          <p:nvPr/>
+        </p:nvPicPr>
+        <p:blipFill>
+          <a:blip r:embed="rId3"/>
+          <a:stretch>
+            <a:fillRect/>
+          </a:stretch>
+        </p:blipFill>
+        <p:spPr>
+          <a:xfrm>
+            <a:off x="10978551" y="5486400"/>
+            <a:ext cx="755944" cy="914400"/>
+          </a:xfrm>
+          <a:prstGeom prst="rect">
+            <a:avLst/>
+          </a:prstGeom>
+        </p:spPr>
+      </p:pic>
     </p:spTree>
   </p:cSld>
   <p:clrMapOvr>
@@ -10347,7 +13287,7 @@
                 </a:solidFill>
                 <a:latin typeface="Geist Mono"/>
               </a:rPr>
-              <a:t>A twenty-year detective story</a:t>
+              <a:t>The visit no test explains</a:t>
             </a:r>
           </a:p>
         </p:txBody>
@@ -10426,109 +13366,45 @@
                 </a:solidFill>
                 <a:latin typeface="Geist Mono"/>
               </a:rPr>
-              <a:t>Jinchi Wei  ·  Outset  ·  Does estrogen keep the mind sharp?  ·  2026-07-08</a:t>
-            </a:r>
-          </a:p>
-        </p:txBody>
-      </p:sp>
-      <p:sp>
-        <p:nvSpPr>
-          <p:cNvPr id="7" name="Rectangle 6"/>
-          <p:cNvSpPr/>
-          <p:nvPr/>
-        </p:nvSpPr>
-        <p:spPr>
-          <a:xfrm>
-            <a:off x="457200" y="1965960"/>
-            <a:ext cx="5394960" cy="2331720"/>
-          </a:xfrm>
-          <a:prstGeom prst="rect">
-            <a:avLst/>
-          </a:prstGeom>
-          <a:solidFill>
-            <a:srgbClr val="FAFAFC"/>
-          </a:solidFill>
-          <a:ln>
-            <a:noFill/>
-          </a:ln>
-          <a:effectLst/>
-        </p:spPr>
-        <p:style>
-          <a:lnRef idx="1">
-            <a:schemeClr val="accent1"/>
-          </a:lnRef>
-          <a:fillRef idx="3">
-            <a:schemeClr val="accent1"/>
-          </a:fillRef>
-          <a:effectRef idx="2">
-            <a:schemeClr val="accent1"/>
-          </a:effectRef>
-          <a:fontRef idx="minor">
-            <a:schemeClr val="lt1"/>
-          </a:fontRef>
-        </p:style>
-        <p:txBody>
-          <a:bodyPr rtlCol="0" anchor="ctr"/>
-          <a:lstStyle/>
-          <a:p>
-            <a:pPr algn="ctr"/>
-          </a:p>
-        </p:txBody>
-      </p:sp>
-      <p:sp>
-        <p:nvSpPr>
-          <p:cNvPr id="8" name="Rectangle 7"/>
-          <p:cNvSpPr/>
-          <p:nvPr/>
-        </p:nvSpPr>
-        <p:spPr>
-          <a:xfrm>
-            <a:off x="457200" y="1965960"/>
-            <a:ext cx="5394960" cy="82296"/>
-          </a:xfrm>
-          <a:prstGeom prst="rect">
-            <a:avLst/>
-          </a:prstGeom>
-          <a:solidFill>
-            <a:srgbClr val="40E0D0"/>
-          </a:solidFill>
-          <a:ln>
-            <a:noFill/>
-          </a:ln>
-          <a:effectLst/>
-        </p:spPr>
-        <p:style>
-          <a:lnRef idx="1">
-            <a:schemeClr val="accent1"/>
-          </a:lnRef>
-          <a:fillRef idx="3">
-            <a:schemeClr val="accent1"/>
-          </a:fillRef>
-          <a:effectRef idx="2">
-            <a:schemeClr val="accent1"/>
-          </a:effectRef>
-          <a:fontRef idx="minor">
-            <a:schemeClr val="lt1"/>
-          </a:fontRef>
-        </p:style>
-        <p:txBody>
-          <a:bodyPr rtlCol="0" anchor="ctr"/>
-          <a:lstStyle/>
-          <a:p>
-            <a:pPr algn="ctr"/>
-          </a:p>
-        </p:txBody>
-      </p:sp>
-      <p:sp>
-        <p:nvSpPr>
-          <p:cNvPr id="9" name="TextBox 8"/>
+              <a:t>Jinchi Wei  ·  Outset  ·  Does estrogen keep older women's minds sharp?  ·  2026-07-08</a:t>
+            </a:r>
+          </a:p>
+        </p:txBody>
+      </p:sp>
+      <p:pic>
+        <p:nvPicPr>
+          <p:cNvPr id="7" name="Picture 6" descr="intro_doctor_office.png"/>
+          <p:cNvPicPr>
+            <a:picLocks noChangeAspect="1"/>
+          </p:cNvPicPr>
+          <p:nvPr/>
+        </p:nvPicPr>
+        <p:blipFill>
+          <a:blip r:embed="rId2"/>
+          <a:stretch>
+            <a:fillRect/>
+          </a:stretch>
+        </p:blipFill>
+        <p:spPr>
+          <a:xfrm>
+            <a:off x="1871341" y="1051560"/>
+            <a:ext cx="8418837" cy="4754879"/>
+          </a:xfrm>
+          <a:prstGeom prst="rect">
+            <a:avLst/>
+          </a:prstGeom>
+        </p:spPr>
+      </p:pic>
+      <p:sp>
+        <p:nvSpPr>
+          <p:cNvPr id="8" name="TextBox 7"/>
           <p:cNvSpPr txBox="1"/>
           <p:nvPr/>
         </p:nvSpPr>
         <p:spPr>
           <a:xfrm>
-            <a:off x="713232" y="2185416"/>
-            <a:ext cx="4882896" cy="365760"/>
+            <a:off x="1188720" y="5916168"/>
+            <a:ext cx="9784080" cy="457200"/>
           </a:xfrm>
           <a:prstGeom prst="rect">
             <a:avLst/>
@@ -10541,287 +13417,15 @@
           </a:bodyPr>
           <a:lstStyle/>
           <a:p>
-            <a:pPr algn="l"/>
-            <a:r>
-              <a:rPr sz="1500" b="1" i="0">
-                <a:solidFill>
-                  <a:srgbClr val="0C7A6A"/>
-                </a:solidFill>
-                <a:latin typeface="Geist Mono"/>
-              </a:rPr>
-              <a:t>THE EXCITING CLUE  (1996-2002)</a:t>
-            </a:r>
-          </a:p>
-        </p:txBody>
-      </p:sp>
-      <p:sp>
-        <p:nvSpPr>
-          <p:cNvPr id="10" name="TextBox 9"/>
-          <p:cNvSpPr txBox="1"/>
-          <p:nvPr/>
-        </p:nvSpPr>
-        <p:spPr>
-          <a:xfrm>
-            <a:off x="713232" y="2734056"/>
-            <a:ext cx="4882896" cy="1435607"/>
-          </a:xfrm>
-          <a:prstGeom prst="rect">
-            <a:avLst/>
-          </a:prstGeom>
-          <a:noFill/>
-        </p:spPr>
-        <p:txBody>
-          <a:bodyPr wrap="square" anchor="t" lIns="0" rIns="0" tIns="0" bIns="0">
-            <a:spAutoFit/>
-          </a:bodyPr>
-          <a:lstStyle/>
-          <a:p>
-            <a:pPr algn="l"/>
-            <a:r>
-              <a:rPr sz="1500" b="0" i="0">
+            <a:pPr algn="ctr"/>
+            <a:r>
+              <a:rPr sz="1400" b="0" i="1">
                 <a:solidFill>
                   <a:srgbClr val="14141C"/>
                 </a:solidFill>
                 <a:latin typeface="Geist"/>
               </a:rPr>
-              <a:t>Studies that simply WATCHED women found that estrogen users developed Alzheimer's less often, and later, than women who never took it [1, 2]. For years this looked like solid proof that the pills protected the aging brain.</a:t>
-            </a:r>
-          </a:p>
-        </p:txBody>
-      </p:sp>
-      <p:sp>
-        <p:nvSpPr>
-          <p:cNvPr id="11" name="Rectangle 10"/>
-          <p:cNvSpPr/>
-          <p:nvPr/>
-        </p:nvSpPr>
-        <p:spPr>
-          <a:xfrm>
-            <a:off x="6309360" y="1965960"/>
-            <a:ext cx="5394960" cy="2331720"/>
-          </a:xfrm>
-          <a:prstGeom prst="rect">
-            <a:avLst/>
-          </a:prstGeom>
-          <a:solidFill>
-            <a:srgbClr val="FAFAFC"/>
-          </a:solidFill>
-          <a:ln>
-            <a:noFill/>
-          </a:ln>
-          <a:effectLst/>
-        </p:spPr>
-        <p:style>
-          <a:lnRef idx="1">
-            <a:schemeClr val="accent1"/>
-          </a:lnRef>
-          <a:fillRef idx="3">
-            <a:schemeClr val="accent1"/>
-          </a:fillRef>
-          <a:effectRef idx="2">
-            <a:schemeClr val="accent1"/>
-          </a:effectRef>
-          <a:fontRef idx="minor">
-            <a:schemeClr val="lt1"/>
-          </a:fontRef>
-        </p:style>
-        <p:txBody>
-          <a:bodyPr rtlCol="0" anchor="ctr"/>
-          <a:lstStyle/>
-          <a:p>
-            <a:pPr algn="ctr"/>
-          </a:p>
-        </p:txBody>
-      </p:sp>
-      <p:sp>
-        <p:nvSpPr>
-          <p:cNvPr id="12" name="Rectangle 11"/>
-          <p:cNvSpPr/>
-          <p:nvPr/>
-        </p:nvSpPr>
-        <p:spPr>
-          <a:xfrm>
-            <a:off x="6309360" y="1965960"/>
-            <a:ext cx="5394960" cy="82296"/>
-          </a:xfrm>
-          <a:prstGeom prst="rect">
-            <a:avLst/>
-          </a:prstGeom>
-          <a:solidFill>
-            <a:srgbClr val="FF1493"/>
-          </a:solidFill>
-          <a:ln>
-            <a:noFill/>
-          </a:ln>
-          <a:effectLst/>
-        </p:spPr>
-        <p:style>
-          <a:lnRef idx="1">
-            <a:schemeClr val="accent1"/>
-          </a:lnRef>
-          <a:fillRef idx="3">
-            <a:schemeClr val="accent1"/>
-          </a:fillRef>
-          <a:effectRef idx="2">
-            <a:schemeClr val="accent1"/>
-          </a:effectRef>
-          <a:fontRef idx="minor">
-            <a:schemeClr val="lt1"/>
-          </a:fontRef>
-        </p:style>
-        <p:txBody>
-          <a:bodyPr rtlCol="0" anchor="ctr"/>
-          <a:lstStyle/>
-          <a:p>
-            <a:pPr algn="ctr"/>
-          </a:p>
-        </p:txBody>
-      </p:sp>
-      <p:sp>
-        <p:nvSpPr>
-          <p:cNvPr id="13" name="TextBox 12"/>
-          <p:cNvSpPr txBox="1"/>
-          <p:nvPr/>
-        </p:nvSpPr>
-        <p:spPr>
-          <a:xfrm>
-            <a:off x="6565392" y="2185416"/>
-            <a:ext cx="4882896" cy="365760"/>
-          </a:xfrm>
-          <a:prstGeom prst="rect">
-            <a:avLst/>
-          </a:prstGeom>
-          <a:noFill/>
-        </p:spPr>
-        <p:txBody>
-          <a:bodyPr wrap="square" anchor="t" lIns="0" rIns="0" tIns="0" bIns="0">
-            <a:spAutoFit/>
-          </a:bodyPr>
-          <a:lstStyle/>
-          <a:p>
-            <a:pPr algn="l"/>
-            <a:r>
-              <a:rPr sz="1500" b="1" i="0">
-                <a:solidFill>
-                  <a:srgbClr val="FF1493"/>
-                </a:solidFill>
-                <a:latin typeface="Geist Mono"/>
-              </a:rPr>
-              <a:t>THE PLOT TWIST  (2003)</a:t>
-            </a:r>
-          </a:p>
-        </p:txBody>
-      </p:sp>
-      <p:sp>
-        <p:nvSpPr>
-          <p:cNvPr id="14" name="TextBox 13"/>
-          <p:cNvSpPr txBox="1"/>
-          <p:nvPr/>
-        </p:nvSpPr>
-        <p:spPr>
-          <a:xfrm>
-            <a:off x="6565392" y="2734056"/>
-            <a:ext cx="4882896" cy="1435607"/>
-          </a:xfrm>
-          <a:prstGeom prst="rect">
-            <a:avLst/>
-          </a:prstGeom>
-          <a:noFill/>
-        </p:spPr>
-        <p:txBody>
-          <a:bodyPr wrap="square" anchor="t" lIns="0" rIns="0" tIns="0" bIns="0">
-            <a:spAutoFit/>
-          </a:bodyPr>
-          <a:lstStyle/>
-          <a:p>
-            <a:pPr algn="l"/>
-            <a:r>
-              <a:rPr sz="1500" b="0" i="0">
-                <a:solidFill>
-                  <a:srgbClr val="14141C"/>
-                </a:solidFill>
-                <a:latin typeface="Geist"/>
-              </a:rPr>
-              <a:t>Then the WHIMS trial let a COIN FLIP -- not the woman herself -- decide who got hormones. The memory benefit vanished, and dementia risk actually ROSE in women aged 65 and older [3, 4].</a:t>
-            </a:r>
-          </a:p>
-        </p:txBody>
-      </p:sp>
-      <p:sp>
-        <p:nvSpPr>
-          <p:cNvPr id="15" name="Rectangle 14"/>
-          <p:cNvSpPr/>
-          <p:nvPr/>
-        </p:nvSpPr>
-        <p:spPr>
-          <a:xfrm>
-            <a:off x="457200" y="4663440"/>
-            <a:ext cx="11247120" cy="685800"/>
-          </a:xfrm>
-          <a:prstGeom prst="rect">
-            <a:avLst/>
-          </a:prstGeom>
-          <a:solidFill>
-            <a:srgbClr val="F0C840"/>
-          </a:solidFill>
-          <a:ln>
-            <a:noFill/>
-          </a:ln>
-          <a:effectLst/>
-        </p:spPr>
-        <p:style>
-          <a:lnRef idx="1">
-            <a:schemeClr val="accent1"/>
-          </a:lnRef>
-          <a:fillRef idx="3">
-            <a:schemeClr val="accent1"/>
-          </a:fillRef>
-          <a:effectRef idx="2">
-            <a:schemeClr val="accent1"/>
-          </a:effectRef>
-          <a:fontRef idx="minor">
-            <a:schemeClr val="lt1"/>
-          </a:fontRef>
-        </p:style>
-        <p:txBody>
-          <a:bodyPr rtlCol="0" anchor="ctr"/>
-          <a:lstStyle/>
-          <a:p>
-            <a:pPr algn="ctr"/>
-          </a:p>
-        </p:txBody>
-      </p:sp>
-      <p:sp>
-        <p:nvSpPr>
-          <p:cNvPr id="16" name="TextBox 15"/>
-          <p:cNvSpPr txBox="1"/>
-          <p:nvPr/>
-        </p:nvSpPr>
-        <p:spPr>
-          <a:xfrm>
-            <a:off x="731520" y="4663440"/>
-            <a:ext cx="10698480" cy="685800"/>
-          </a:xfrm>
-          <a:prstGeom prst="rect">
-            <a:avLst/>
-          </a:prstGeom>
-          <a:noFill/>
-        </p:spPr>
-        <p:txBody>
-          <a:bodyPr wrap="square" anchor="ctr" lIns="0" rIns="0" tIns="0" bIns="0">
-            <a:spAutoFit/>
-          </a:bodyPr>
-          <a:lstStyle/>
-          <a:p>
-            <a:pPr algn="l"/>
-            <a:r>
-              <a:rPr sz="1900" b="1" i="0">
-                <a:solidFill>
-                  <a:srgbClr val="14141C"/>
-                </a:solidFill>
-                <a:latin typeface="Geist Mono"/>
-              </a:rPr>
-              <a:t>Same drug, opposite answer. The rest of this talk is one question:  HOW?</a:t>
+              <a:t>She describes real, daily brain fog. The objective test says "normal." Both can be true -- and the gap is the whole project.</a:t>
             </a:r>
           </a:p>
         </p:txBody>
@@ -10962,7 +13566,7 @@
                 </a:solidFill>
                 <a:latin typeface="Geist Mono"/>
               </a:rPr>
-              <a:t>When they flipped a coin, the benefit vanished</a:t>
+              <a:t>The tests say fine; she says not fine</a:t>
             </a:r>
           </a:p>
         </p:txBody>
@@ -11041,14 +13645,14 @@
                 </a:solidFill>
                 <a:latin typeface="Geist Mono"/>
               </a:rPr>
-              <a:t>Jinchi Wei  ·  Outset  ·  Does estrogen keep the mind sharp?  ·  2026-07-08</a:t>
+              <a:t>Jinchi Wei  ·  Outset  ·  Does estrogen keep older women's minds sharp?  ·  2026-07-08</a:t>
             </a:r>
           </a:p>
         </p:txBody>
       </p:sp>
       <p:pic>
         <p:nvPicPr>
-          <p:cNvPr id="7" name="Picture 6" descr="intro_effect_flip.png"/>
+          <p:cNvPr id="7" name="Picture 6" descr="intro_objective_vs_subjective.png"/>
           <p:cNvPicPr>
             <a:picLocks noChangeAspect="1"/>
           </p:cNvPicPr>
@@ -11062,8 +13666,8 @@
         </p:blipFill>
         <p:spPr>
           <a:xfrm>
-            <a:off x="2794050" y="1051560"/>
-            <a:ext cx="6573418" cy="4434840"/>
+            <a:off x="5405932" y="1538377"/>
+            <a:ext cx="6298387" cy="4238444"/>
           </a:xfrm>
           <a:prstGeom prst="rect">
             <a:avLst/>
@@ -11078,8 +13682,8 @@
         </p:nvSpPr>
         <p:spPr>
           <a:xfrm>
-            <a:off x="1371600" y="5715000"/>
-            <a:ext cx="9418320" cy="548640"/>
+            <a:off x="457200" y="1188720"/>
+            <a:ext cx="4537252" cy="365760"/>
           </a:xfrm>
           <a:prstGeom prst="rect">
             <a:avLst/>
@@ -11092,15 +13696,190 @@
           </a:bodyPr>
           <a:lstStyle/>
           <a:p>
-            <a:pPr algn="ctr"/>
-            <a:r>
-              <a:rPr sz="1400" b="0" i="1">
-                <a:solidFill>
-                  <a:srgbClr val="555560"/>
+            <a:pPr algn="l"/>
+            <a:r>
+              <a:rPr sz="1500" b="1" i="0">
+                <a:solidFill>
+                  <a:srgbClr val="FF1493"/>
+                </a:solidFill>
+                <a:latin typeface="Geist Mono"/>
+              </a:rPr>
+              <a:t>THE MISMATCH</a:t>
+            </a:r>
+          </a:p>
+        </p:txBody>
+      </p:sp>
+      <p:sp>
+        <p:nvSpPr>
+          <p:cNvPr id="9" name="TextBox 8"/>
+          <p:cNvSpPr txBox="1"/>
+          <p:nvPr/>
+        </p:nvSpPr>
+        <p:spPr>
+          <a:xfrm>
+            <a:off x="457200" y="1600200"/>
+            <a:ext cx="4537252" cy="914400"/>
+          </a:xfrm>
+          <a:prstGeom prst="rect">
+            <a:avLst/>
+          </a:prstGeom>
+          <a:noFill/>
+        </p:spPr>
+        <p:txBody>
+          <a:bodyPr wrap="square" anchor="t" lIns="0" rIns="0" tIns="0" bIns="0">
+            <a:spAutoFit/>
+          </a:bodyPr>
+          <a:lstStyle/>
+          <a:p>
+            <a:pPr algn="l"/>
+            <a:r>
+              <a:rPr sz="1500" b="0" i="0">
+                <a:solidFill>
+                  <a:srgbClr val="14141C"/>
                 </a:solidFill>
                 <a:latin typeface="Geist"/>
               </a:rPr>
-              <a:t>Just watching (turquoise) said hormones PROTECT; the coin-flip trial (pink) said they HARM -- the study design, not the drug, decided the answer.</a:t>
+              <a:t>Objective scores mostly land in the normal band, yet self-reported fog is high and scattered. The lines cross.</a:t>
+            </a:r>
+          </a:p>
+        </p:txBody>
+      </p:sp>
+      <p:sp>
+        <p:nvSpPr>
+          <p:cNvPr id="10" name="TextBox 9"/>
+          <p:cNvSpPr txBox="1"/>
+          <p:nvPr/>
+        </p:nvSpPr>
+        <p:spPr>
+          <a:xfrm>
+            <a:off x="457200" y="2606040"/>
+            <a:ext cx="4537252" cy="365760"/>
+          </a:xfrm>
+          <a:prstGeom prst="rect">
+            <a:avLst/>
+          </a:prstGeom>
+          <a:noFill/>
+        </p:spPr>
+        <p:txBody>
+          <a:bodyPr wrap="square" anchor="t" lIns="0" rIns="0" tIns="0" bIns="0">
+            <a:spAutoFit/>
+          </a:bodyPr>
+          <a:lstStyle/>
+          <a:p>
+            <a:pPr algn="l"/>
+            <a:r>
+              <a:rPr sz="1500" b="1" i="0">
+                <a:solidFill>
+                  <a:srgbClr val="8A2BE2"/>
+                </a:solidFill>
+                <a:latin typeface="Geist Mono"/>
+              </a:rPr>
+              <a:t>WHY IT MATTERS</a:t>
+            </a:r>
+          </a:p>
+        </p:txBody>
+      </p:sp>
+      <p:sp>
+        <p:nvSpPr>
+          <p:cNvPr id="11" name="TextBox 10"/>
+          <p:cNvSpPr txBox="1"/>
+          <p:nvPr/>
+        </p:nvSpPr>
+        <p:spPr>
+          <a:xfrm>
+            <a:off x="457200" y="3017520"/>
+            <a:ext cx="4537252" cy="914400"/>
+          </a:xfrm>
+          <a:prstGeom prst="rect">
+            <a:avLst/>
+          </a:prstGeom>
+          <a:noFill/>
+        </p:spPr>
+        <p:txBody>
+          <a:bodyPr wrap="square" anchor="t" lIns="0" rIns="0" tIns="0" bIns="0">
+            <a:spAutoFit/>
+          </a:bodyPr>
+          <a:lstStyle/>
+          <a:p>
+            <a:pPr algn="l"/>
+            <a:r>
+              <a:rPr sz="1500" b="0" i="0">
+                <a:solidFill>
+                  <a:srgbClr val="14141C"/>
+                </a:solidFill>
+                <a:latin typeface="Geist"/>
+              </a:rPr>
+              <a:t>A test that reads "fine" can miss a symptom a woman lives with every day.</a:t>
+            </a:r>
+          </a:p>
+        </p:txBody>
+      </p:sp>
+      <p:sp>
+        <p:nvSpPr>
+          <p:cNvPr id="12" name="TextBox 11"/>
+          <p:cNvSpPr txBox="1"/>
+          <p:nvPr/>
+        </p:nvSpPr>
+        <p:spPr>
+          <a:xfrm>
+            <a:off x="457200" y="4023360"/>
+            <a:ext cx="4537252" cy="365760"/>
+          </a:xfrm>
+          <a:prstGeom prst="rect">
+            <a:avLst/>
+          </a:prstGeom>
+          <a:noFill/>
+        </p:spPr>
+        <p:txBody>
+          <a:bodyPr wrap="square" anchor="t" lIns="0" rIns="0" tIns="0" bIns="0">
+            <a:spAutoFit/>
+          </a:bodyPr>
+          <a:lstStyle/>
+          <a:p>
+            <a:pPr algn="l"/>
+            <a:r>
+              <a:rPr sz="1500" b="1" i="0">
+                <a:solidFill>
+                  <a:srgbClr val="40E0D0"/>
+                </a:solidFill>
+                <a:latin typeface="Geist Mono"/>
+              </a:rPr>
+              <a:t>THE STANCE</a:t>
+            </a:r>
+          </a:p>
+        </p:txBody>
+      </p:sp>
+      <p:sp>
+        <p:nvSpPr>
+          <p:cNvPr id="13" name="TextBox 12"/>
+          <p:cNvSpPr txBox="1"/>
+          <p:nvPr/>
+        </p:nvSpPr>
+        <p:spPr>
+          <a:xfrm>
+            <a:off x="457200" y="4434840"/>
+            <a:ext cx="4537252" cy="914400"/>
+          </a:xfrm>
+          <a:prstGeom prst="rect">
+            <a:avLst/>
+          </a:prstGeom>
+          <a:noFill/>
+        </p:spPr>
+        <p:txBody>
+          <a:bodyPr wrap="square" anchor="t" lIns="0" rIns="0" tIns="0" bIns="0">
+            <a:spAutoFit/>
+          </a:bodyPr>
+          <a:lstStyle/>
+          <a:p>
+            <a:pPr algn="l"/>
+            <a:r>
+              <a:rPr sz="1500" b="0" i="0">
+                <a:solidFill>
+                  <a:srgbClr val="14141C"/>
+                </a:solidFill>
+                <a:latin typeface="Geist"/>
+              </a:rPr>
+              <a:t>Take both as real evidence: the number AND the account. Neither is noise.</a:t>
             </a:r>
           </a:p>
         </p:txBody>
@@ -11241,7 +14020,7 @@
                 </a:solidFill>
                 <a:latin typeface="Geist Mono"/>
               </a:rPr>
-              <a:t>Healthy-user bias: a hidden third factor</a:t>
+              <a:t>Twenty years of watching said estrogen helps</a:t>
             </a:r>
           </a:p>
         </p:txBody>
@@ -11320,14 +14099,14 @@
                 </a:solidFill>
                 <a:latin typeface="Geist Mono"/>
               </a:rPr>
-              <a:t>Jinchi Wei  ·  Outset  ·  Does estrogen keep the mind sharp?  ·  2026-07-08</a:t>
+              <a:t>Jinchi Wei  ·  Outset  ·  Does estrogen keep older women's minds sharp?  ·  2026-07-08</a:t>
             </a:r>
           </a:p>
         </p:txBody>
       </p:sp>
       <p:pic>
         <p:nvPicPr>
-          <p:cNvPr id="7" name="Picture 6" descr="intro_confounding_triangle.png"/>
+          <p:cNvPr id="7" name="Picture 6" descr="intro_effect_flip.png"/>
           <p:cNvPicPr>
             <a:picLocks noChangeAspect="1"/>
           </p:cNvPicPr>
@@ -11341,8 +14120,8 @@
         </p:blipFill>
         <p:spPr>
           <a:xfrm>
-            <a:off x="457200" y="1610402"/>
-            <a:ext cx="6748272" cy="4094394"/>
+            <a:off x="3249059" y="1051560"/>
+            <a:ext cx="5663401" cy="4160519"/>
           </a:xfrm>
           <a:prstGeom prst="rect">
             <a:avLst/>
@@ -11351,89 +14130,71 @@
       </p:pic>
       <p:sp>
         <p:nvSpPr>
-          <p:cNvPr id="8" name="Rectangle 7"/>
-          <p:cNvSpPr/>
-          <p:nvPr/>
-        </p:nvSpPr>
-        <p:spPr>
-          <a:xfrm>
-            <a:off x="7525512" y="1097280"/>
-            <a:ext cx="4178808" cy="5074919"/>
-          </a:xfrm>
-          <a:prstGeom prst="rect">
-            <a:avLst/>
-          </a:prstGeom>
-          <a:solidFill>
-            <a:srgbClr val="FAFAFC"/>
-          </a:solidFill>
-          <a:ln>
-            <a:noFill/>
-          </a:ln>
-          <a:effectLst/>
-        </p:spPr>
-        <p:style>
-          <a:lnRef idx="1">
-            <a:schemeClr val="accent1"/>
-          </a:lnRef>
-          <a:fillRef idx="3">
-            <a:schemeClr val="accent1"/>
-          </a:fillRef>
-          <a:effectRef idx="2">
-            <a:schemeClr val="accent1"/>
-          </a:effectRef>
-          <a:fontRef idx="minor">
-            <a:schemeClr val="lt1"/>
-          </a:fontRef>
-        </p:style>
-        <p:txBody>
-          <a:bodyPr rtlCol="0" anchor="ctr"/>
+          <p:cNvPr id="8" name="TextBox 7"/>
+          <p:cNvSpPr txBox="1"/>
+          <p:nvPr/>
+        </p:nvSpPr>
+        <p:spPr>
+          <a:xfrm>
+            <a:off x="457200" y="5376671"/>
+            <a:ext cx="3566160" cy="502920"/>
+          </a:xfrm>
+          <a:prstGeom prst="rect">
+            <a:avLst/>
+          </a:prstGeom>
+          <a:noFill/>
+        </p:spPr>
+        <p:txBody>
+          <a:bodyPr wrap="square" anchor="t" lIns="0" rIns="0" tIns="0" bIns="0">
+            <a:spAutoFit/>
+          </a:bodyPr>
           <a:lstStyle/>
           <a:p>
             <a:pPr algn="ctr"/>
-          </a:p>
-        </p:txBody>
-      </p:sp>
-      <p:sp>
-        <p:nvSpPr>
-          <p:cNvPr id="9" name="Rectangle 8"/>
-          <p:cNvSpPr/>
-          <p:nvPr/>
-        </p:nvSpPr>
-        <p:spPr>
-          <a:xfrm>
-            <a:off x="7525512" y="1097280"/>
-            <a:ext cx="4178808" cy="91440"/>
-          </a:xfrm>
-          <a:prstGeom prst="rect">
-            <a:avLst/>
-          </a:prstGeom>
-          <a:solidFill>
-            <a:srgbClr val="FF1493"/>
-          </a:solidFill>
-          <a:ln>
-            <a:noFill/>
-          </a:ln>
-          <a:effectLst/>
-        </p:spPr>
-        <p:style>
-          <a:lnRef idx="1">
-            <a:schemeClr val="accent1"/>
-          </a:lnRef>
-          <a:fillRef idx="3">
-            <a:schemeClr val="accent1"/>
-          </a:fillRef>
-          <a:effectRef idx="2">
-            <a:schemeClr val="accent1"/>
-          </a:effectRef>
-          <a:fontRef idx="minor">
-            <a:schemeClr val="lt1"/>
-          </a:fontRef>
-        </p:style>
-        <p:txBody>
-          <a:bodyPr rtlCol="0" anchor="ctr"/>
+            <a:r>
+              <a:rPr sz="3000" b="1" i="0">
+                <a:solidFill>
+                  <a:srgbClr val="40E0D0"/>
+                </a:solidFill>
+                <a:latin typeface="Geist Mono"/>
+              </a:rPr>
+              <a:t>0.66x</a:t>
+            </a:r>
+          </a:p>
+        </p:txBody>
+      </p:sp>
+      <p:sp>
+        <p:nvSpPr>
+          <p:cNvPr id="9" name="TextBox 8"/>
+          <p:cNvSpPr txBox="1"/>
+          <p:nvPr/>
+        </p:nvSpPr>
+        <p:spPr>
+          <a:xfrm>
+            <a:off x="457200" y="5907023"/>
+            <a:ext cx="3566160" cy="457200"/>
+          </a:xfrm>
+          <a:prstGeom prst="rect">
+            <a:avLst/>
+          </a:prstGeom>
+          <a:noFill/>
+        </p:spPr>
+        <p:txBody>
+          <a:bodyPr wrap="square" anchor="t" lIns="0" rIns="0" tIns="0" bIns="0">
+            <a:spAutoFit/>
+          </a:bodyPr>
           <a:lstStyle/>
           <a:p>
             <a:pPr algn="ctr"/>
+            <a:r>
+              <a:rPr sz="1250" b="0" i="0">
+                <a:solidFill>
+                  <a:srgbClr val="14141C"/>
+                </a:solidFill>
+                <a:latin typeface="Geist"/>
+              </a:rPr>
+              <a:t>the risk observational studies saw -- looks protective</a:t>
+            </a:r>
           </a:p>
         </p:txBody>
       </p:sp>
@@ -11445,8 +14206,8 @@
         </p:nvSpPr>
         <p:spPr>
           <a:xfrm>
-            <a:off x="7754112" y="1380744"/>
-            <a:ext cx="3721608" cy="292608"/>
+            <a:off x="4297680" y="5376671"/>
+            <a:ext cx="3566160" cy="502920"/>
           </a:xfrm>
           <a:prstGeom prst="rect">
             <a:avLst/>
@@ -11459,15 +14220,15 @@
           </a:bodyPr>
           <a:lstStyle/>
           <a:p>
-            <a:pPr algn="l"/>
-            <a:r>
-              <a:rPr sz="1500" b="1" i="0">
+            <a:pPr algn="ctr"/>
+            <a:r>
+              <a:rPr sz="3000" b="1" i="0">
                 <a:solidFill>
                   <a:srgbClr val="FF1493"/>
                 </a:solidFill>
                 <a:latin typeface="Geist Mono"/>
               </a:rPr>
-              <a:t>Who chose the pill?</a:t>
+              <a:t>2.05x</a:t>
             </a:r>
           </a:p>
         </p:txBody>
@@ -11480,8 +14241,8 @@
         </p:nvSpPr>
         <p:spPr>
           <a:xfrm>
-            <a:off x="7754112" y="1709928"/>
-            <a:ext cx="3721608" cy="914400"/>
+            <a:off x="4297680" y="5907023"/>
+            <a:ext cx="3566160" cy="457200"/>
           </a:xfrm>
           <a:prstGeom prst="rect">
             <a:avLst/>
@@ -11494,15 +14255,15 @@
           </a:bodyPr>
           <a:lstStyle/>
           <a:p>
-            <a:pPr algn="l"/>
-            <a:r>
-              <a:rPr sz="1300" b="0" i="0">
+            <a:pPr algn="ctr"/>
+            <a:r>
+              <a:rPr sz="1250" b="0" i="0">
                 <a:solidFill>
                   <a:srgbClr val="14141C"/>
                 </a:solidFill>
                 <a:latin typeface="Geist"/>
               </a:rPr>
-              <a:t>Users were richer, more active, and saw doctors more often to begin with [5].</a:t>
+              <a:t>the risk the coin-flip trial found -- actual harm</a:t>
             </a:r>
           </a:p>
         </p:txBody>
@@ -11515,8 +14276,8 @@
         </p:nvSpPr>
         <p:spPr>
           <a:xfrm>
-            <a:off x="7754112" y="2798064"/>
-            <a:ext cx="3721608" cy="292608"/>
+            <a:off x="8138160" y="5376671"/>
+            <a:ext cx="3566160" cy="502920"/>
           </a:xfrm>
           <a:prstGeom prst="rect">
             <a:avLst/>
@@ -11529,15 +14290,15 @@
           </a:bodyPr>
           <a:lstStyle/>
           <a:p>
-            <a:pPr algn="l"/>
-            <a:r>
-              <a:rPr sz="1500" b="1" i="0">
-                <a:solidFill>
-                  <a:srgbClr val="FF1493"/>
+            <a:pPr algn="ctr"/>
+            <a:r>
+              <a:rPr sz="3000" b="1" i="0">
+                <a:solidFill>
+                  <a:srgbClr val="8A2BE2"/>
                 </a:solidFill>
                 <a:latin typeface="Geist Mono"/>
               </a:rPr>
-              <a:t>The hidden factor</a:t>
+              <a:t>2003</a:t>
             </a:r>
           </a:p>
         </p:txBody>
@@ -11550,8 +14311,8 @@
         </p:nvSpPr>
         <p:spPr>
           <a:xfrm>
-            <a:off x="7754112" y="3127248"/>
-            <a:ext cx="3721608" cy="914400"/>
+            <a:off x="8138160" y="5907023"/>
+            <a:ext cx="3566160" cy="457200"/>
           </a:xfrm>
           <a:prstGeom prst="rect">
             <a:avLst/>
@@ -11564,85 +14325,15 @@
           </a:bodyPr>
           <a:lstStyle/>
           <a:p>
-            <a:pPr algn="l"/>
-            <a:r>
-              <a:rPr sz="1300" b="0" i="0">
+            <a:pPr algn="ctr"/>
+            <a:r>
+              <a:rPr sz="1250" b="0" i="0">
                 <a:solidFill>
                   <a:srgbClr val="14141C"/>
                 </a:solidFill>
                 <a:latin typeface="Geist"/>
               </a:rPr>
-              <a:t>That same head start drives BOTH the drug use AND the good memory.</a:t>
-            </a:r>
-          </a:p>
-        </p:txBody>
-      </p:sp>
-      <p:sp>
-        <p:nvSpPr>
-          <p:cNvPr id="14" name="TextBox 13"/>
-          <p:cNvSpPr txBox="1"/>
-          <p:nvPr/>
-        </p:nvSpPr>
-        <p:spPr>
-          <a:xfrm>
-            <a:off x="7754112" y="4215384"/>
-            <a:ext cx="3721608" cy="292608"/>
-          </a:xfrm>
-          <a:prstGeom prst="rect">
-            <a:avLst/>
-          </a:prstGeom>
-          <a:noFill/>
-        </p:spPr>
-        <p:txBody>
-          <a:bodyPr wrap="square" anchor="t" lIns="0" rIns="0" tIns="0" bIns="0">
-            <a:spAutoFit/>
-          </a:bodyPr>
-          <a:lstStyle/>
-          <a:p>
-            <a:pPr algn="l"/>
-            <a:r>
-              <a:rPr sz="1500" b="1" i="0">
-                <a:solidFill>
-                  <a:srgbClr val="FF1493"/>
-                </a:solidFill>
-                <a:latin typeface="Geist Mono"/>
-              </a:rPr>
-              <a:t>So the bottom link</a:t>
-            </a:r>
-          </a:p>
-        </p:txBody>
-      </p:sp>
-      <p:sp>
-        <p:nvSpPr>
-          <p:cNvPr id="15" name="TextBox 14"/>
-          <p:cNvSpPr txBox="1"/>
-          <p:nvPr/>
-        </p:nvSpPr>
-        <p:spPr>
-          <a:xfrm>
-            <a:off x="7754112" y="4544568"/>
-            <a:ext cx="3721608" cy="914400"/>
-          </a:xfrm>
-          <a:prstGeom prst="rect">
-            <a:avLst/>
-          </a:prstGeom>
-          <a:noFill/>
-        </p:spPr>
-        <p:txBody>
-          <a:bodyPr wrap="square" anchor="t" lIns="0" rIns="0" tIns="0" bIns="0">
-            <a:spAutoFit/>
-          </a:bodyPr>
-          <a:lstStyle/>
-          <a:p>
-            <a:pPr algn="l"/>
-            <a:r>
-              <a:rPr sz="1300" b="0" i="0">
-                <a:solidFill>
-                  <a:srgbClr val="14141C"/>
-                </a:solidFill>
-                <a:latin typeface="Geist"/>
-              </a:rPr>
-              <a:t>only LOOKS like cause. It is a mirage -- confounding, a.k.a. healthy-user bias [6].</a:t>
+              <a:t>the year WHIMS overturned twenty years of headlines</a:t>
             </a:r>
           </a:p>
         </p:txBody>
@@ -11783,7 +14474,7 @@
                 </a:solidFill>
                 <a:latin typeface="Geist Mono"/>
               </a:rPr>
-              <a:t>Ice cream and shark attacks</a:t>
+              <a:t>Why watching lied: healthy-user bias</a:t>
             </a:r>
           </a:p>
         </p:txBody>
@@ -11862,46 +14553,35 @@
                 </a:solidFill>
                 <a:latin typeface="Geist Mono"/>
               </a:rPr>
-              <a:t>Jinchi Wei  ·  Outset  ·  Does estrogen keep the mind sharp?  ·  2026-07-08</a:t>
-            </a:r>
-          </a:p>
-        </p:txBody>
-      </p:sp>
-      <p:sp>
-        <p:nvSpPr>
-          <p:cNvPr id="7" name="TextBox 6"/>
-          <p:cNvSpPr txBox="1"/>
-          <p:nvPr/>
-        </p:nvSpPr>
-        <p:spPr>
-          <a:xfrm>
-            <a:off x="457200" y="1143000"/>
-            <a:ext cx="11247120" cy="777240"/>
-          </a:xfrm>
-          <a:prstGeom prst="rect">
-            <a:avLst/>
-          </a:prstGeom>
-          <a:noFill/>
-        </p:spPr>
-        <p:txBody>
-          <a:bodyPr wrap="square" anchor="t" lIns="0" rIns="0" tIns="0" bIns="0">
-            <a:spAutoFit/>
-          </a:bodyPr>
-          <a:lstStyle/>
-          <a:p>
-            <a:pPr algn="l"/>
-            <a:r>
-              <a:rPr sz="1800" b="0" i="0">
-                <a:solidFill>
-                  <a:srgbClr val="14141C"/>
-                </a:solidFill>
-                <a:latin typeface="Geist"/>
-              </a:rPr>
-              <a:t>On hot days, ice-cream sales and shark attacks BOTH rise together. Does ice cream summon sharks?</a:t>
-            </a:r>
-          </a:p>
-        </p:txBody>
-      </p:sp>
+              <a:t>Jinchi Wei  ·  Outset  ·  Does estrogen keep older women's minds sharp?  ·  2026-07-08</a:t>
+            </a:r>
+          </a:p>
+        </p:txBody>
+      </p:sp>
+      <p:pic>
+        <p:nvPicPr>
+          <p:cNvPr id="7" name="Picture 6" descr="intro_confounding_triangle.png"/>
+          <p:cNvPicPr>
+            <a:picLocks noChangeAspect="1"/>
+          </p:cNvPicPr>
+          <p:nvPr/>
+        </p:nvPicPr>
+        <p:blipFill>
+          <a:blip r:embed="rId2"/>
+          <a:stretch>
+            <a:fillRect/>
+          </a:stretch>
+        </p:blipFill>
+        <p:spPr>
+          <a:xfrm>
+            <a:off x="457200" y="1672920"/>
+            <a:ext cx="6523329" cy="3969359"/>
+          </a:xfrm>
+          <a:prstGeom prst="rect">
+            <a:avLst/>
+          </a:prstGeom>
+        </p:spPr>
+      </p:pic>
       <p:sp>
         <p:nvSpPr>
           <p:cNvPr id="8" name="Rectangle 7"/>
@@ -11910,8 +14590,8 @@
         </p:nvSpPr>
         <p:spPr>
           <a:xfrm>
-            <a:off x="457200" y="2011680"/>
-            <a:ext cx="5394960" cy="2286000"/>
+            <a:off x="7346289" y="1097280"/>
+            <a:ext cx="4358030" cy="5074919"/>
           </a:xfrm>
           <a:prstGeom prst="rect">
             <a:avLst/>
@@ -11954,14 +14634,14 @@
         </p:nvSpPr>
         <p:spPr>
           <a:xfrm>
-            <a:off x="457200" y="2011680"/>
-            <a:ext cx="5394960" cy="82296"/>
+            <a:off x="7346289" y="1097280"/>
+            <a:ext cx="4358030" cy="91440"/>
           </a:xfrm>
           <a:prstGeom prst="rect">
             <a:avLst/>
           </a:prstGeom>
           <a:solidFill>
-            <a:srgbClr val="8A2BE2"/>
+            <a:srgbClr val="FF1493"/>
           </a:solidFill>
           <a:ln>
             <a:noFill/>
@@ -11998,8 +14678,8 @@
         </p:nvSpPr>
         <p:spPr>
           <a:xfrm>
-            <a:off x="713232" y="2231136"/>
-            <a:ext cx="4882896" cy="365760"/>
+            <a:off x="7602321" y="1417320"/>
+            <a:ext cx="3845966" cy="320040"/>
           </a:xfrm>
           <a:prstGeom prst="rect">
             <a:avLst/>
@@ -12014,13 +14694,13 @@
           <a:p>
             <a:pPr algn="l"/>
             <a:r>
-              <a:rPr sz="1500" b="1" i="0">
-                <a:solidFill>
-                  <a:srgbClr val="8A2BE2"/>
+              <a:rPr sz="1400" b="1" i="0">
+                <a:solidFill>
+                  <a:srgbClr val="FF1493"/>
                 </a:solidFill>
                 <a:latin typeface="Geist Mono"/>
               </a:rPr>
-              <a:t>THE ANALOGY</a:t>
+              <a:t>WHO CHOSE THE PILL</a:t>
             </a:r>
           </a:p>
         </p:txBody>
@@ -12033,8 +14713,8 @@
         </p:nvSpPr>
         <p:spPr>
           <a:xfrm>
-            <a:off x="713232" y="2779776"/>
-            <a:ext cx="4882896" cy="1389888"/>
+            <a:off x="7602321" y="1783080"/>
+            <a:ext cx="3845966" cy="914400"/>
           </a:xfrm>
           <a:prstGeom prst="rect">
             <a:avLst/>
@@ -12049,102 +14729,84 @@
           <a:p>
             <a:pPr algn="l"/>
             <a:r>
-              <a:rPr sz="1500" b="0" i="0">
+              <a:rPr sz="1450" b="0" i="0">
                 <a:solidFill>
                   <a:srgbClr val="14141C"/>
                 </a:solidFill>
                 <a:latin typeface="Geist"/>
               </a:rPr>
-              <a:t>No -- the hot SUMMER WEATHER drives both at once: heat sells more ice cream AND sends more people into the ocean to swim. Neither one causes the other.</a:t>
-            </a:r>
-          </a:p>
-        </p:txBody>
-      </p:sp>
-      <p:sp>
-        <p:nvSpPr>
-          <p:cNvPr id="12" name="Rectangle 11"/>
-          <p:cNvSpPr/>
-          <p:nvPr/>
-        </p:nvSpPr>
-        <p:spPr>
-          <a:xfrm>
-            <a:off x="6309360" y="2011680"/>
-            <a:ext cx="5394960" cy="2286000"/>
-          </a:xfrm>
-          <a:prstGeom prst="rect">
-            <a:avLst/>
-          </a:prstGeom>
-          <a:solidFill>
-            <a:srgbClr val="FAFAFC"/>
-          </a:solidFill>
-          <a:ln>
-            <a:noFill/>
-          </a:ln>
-          <a:effectLst/>
-        </p:spPr>
-        <p:style>
-          <a:lnRef idx="1">
-            <a:schemeClr val="accent1"/>
-          </a:lnRef>
-          <a:fillRef idx="3">
-            <a:schemeClr val="accent1"/>
-          </a:fillRef>
-          <a:effectRef idx="2">
-            <a:schemeClr val="accent1"/>
-          </a:effectRef>
-          <a:fontRef idx="minor">
-            <a:schemeClr val="lt1"/>
-          </a:fontRef>
-        </p:style>
-        <p:txBody>
-          <a:bodyPr rtlCol="0" anchor="ctr"/>
-          <a:lstStyle/>
-          <a:p>
-            <a:pPr algn="ctr"/>
-          </a:p>
-        </p:txBody>
-      </p:sp>
-      <p:sp>
-        <p:nvSpPr>
-          <p:cNvPr id="13" name="Rectangle 12"/>
-          <p:cNvSpPr/>
-          <p:nvPr/>
-        </p:nvSpPr>
-        <p:spPr>
-          <a:xfrm>
-            <a:off x="6309360" y="2011680"/>
-            <a:ext cx="5394960" cy="82296"/>
-          </a:xfrm>
-          <a:prstGeom prst="rect">
-            <a:avLst/>
-          </a:prstGeom>
-          <a:solidFill>
-            <a:srgbClr val="40E0D0"/>
-          </a:solidFill>
-          <a:ln>
-            <a:noFill/>
-          </a:ln>
-          <a:effectLst/>
-        </p:spPr>
-        <p:style>
-          <a:lnRef idx="1">
-            <a:schemeClr val="accent1"/>
-          </a:lnRef>
-          <a:fillRef idx="3">
-            <a:schemeClr val="accent1"/>
-          </a:fillRef>
-          <a:effectRef idx="2">
-            <a:schemeClr val="accent1"/>
-          </a:effectRef>
-          <a:fontRef idx="minor">
-            <a:schemeClr val="lt1"/>
-          </a:fontRef>
-        </p:style>
-        <p:txBody>
-          <a:bodyPr rtlCol="0" anchor="ctr"/>
-          <a:lstStyle/>
-          <a:p>
-            <a:pPr algn="ctr"/>
+              <a:t>Users were richer, more active, and saw doctors more often to begin with.</a:t>
+            </a:r>
+          </a:p>
+        </p:txBody>
+      </p:sp>
+      <p:sp>
+        <p:nvSpPr>
+          <p:cNvPr id="12" name="TextBox 11"/>
+          <p:cNvSpPr txBox="1"/>
+          <p:nvPr/>
+        </p:nvSpPr>
+        <p:spPr>
+          <a:xfrm>
+            <a:off x="7602321" y="2788920"/>
+            <a:ext cx="3845966" cy="320040"/>
+          </a:xfrm>
+          <a:prstGeom prst="rect">
+            <a:avLst/>
+          </a:prstGeom>
+          <a:noFill/>
+        </p:spPr>
+        <p:txBody>
+          <a:bodyPr wrap="square" anchor="t" lIns="0" rIns="0" tIns="0" bIns="0">
+            <a:spAutoFit/>
+          </a:bodyPr>
+          <a:lstStyle/>
+          <a:p>
+            <a:pPr algn="l"/>
+            <a:r>
+              <a:rPr sz="1400" b="1" i="0">
+                <a:solidFill>
+                  <a:srgbClr val="FF1493"/>
+                </a:solidFill>
+                <a:latin typeface="Geist Mono"/>
+              </a:rPr>
+              <a:t>THE HIDDEN FACTOR</a:t>
+            </a:r>
+          </a:p>
+        </p:txBody>
+      </p:sp>
+      <p:sp>
+        <p:nvSpPr>
+          <p:cNvPr id="13" name="TextBox 12"/>
+          <p:cNvSpPr txBox="1"/>
+          <p:nvPr/>
+        </p:nvSpPr>
+        <p:spPr>
+          <a:xfrm>
+            <a:off x="7602321" y="3154679"/>
+            <a:ext cx="3845966" cy="914400"/>
+          </a:xfrm>
+          <a:prstGeom prst="rect">
+            <a:avLst/>
+          </a:prstGeom>
+          <a:noFill/>
+        </p:spPr>
+        <p:txBody>
+          <a:bodyPr wrap="square" anchor="t" lIns="0" rIns="0" tIns="0" bIns="0">
+            <a:spAutoFit/>
+          </a:bodyPr>
+          <a:lstStyle/>
+          <a:p>
+            <a:pPr algn="l"/>
+            <a:r>
+              <a:rPr sz="1450" b="0" i="0">
+                <a:solidFill>
+                  <a:srgbClr val="14141C"/>
+                </a:solidFill>
+                <a:latin typeface="Geist"/>
+              </a:rPr>
+              <a:t>That same head start drives BOTH the drug use AND the better memory.</a:t>
+            </a:r>
           </a:p>
         </p:txBody>
       </p:sp>
@@ -12156,8 +14818,8 @@
         </p:nvSpPr>
         <p:spPr>
           <a:xfrm>
-            <a:off x="6565392" y="2231136"/>
-            <a:ext cx="4882896" cy="365760"/>
+            <a:off x="7602321" y="4160520"/>
+            <a:ext cx="3845966" cy="320040"/>
           </a:xfrm>
           <a:prstGeom prst="rect">
             <a:avLst/>
@@ -12172,13 +14834,13 @@
           <a:p>
             <a:pPr algn="l"/>
             <a:r>
-              <a:rPr sz="1500" b="1" i="0">
-                <a:solidFill>
-                  <a:srgbClr val="0C7A6A"/>
+              <a:rPr sz="1400" b="1" i="0">
+                <a:solidFill>
+                  <a:srgbClr val="FF1493"/>
                 </a:solidFill>
                 <a:latin typeface="Geist Mono"/>
               </a:rPr>
-              <a:t>OUR VERSION</a:t>
+              <a:t>SO THE DIRECT LINK</a:t>
             </a:r>
           </a:p>
         </p:txBody>
@@ -12191,8 +14853,8 @@
         </p:nvSpPr>
         <p:spPr>
           <a:xfrm>
-            <a:off x="6565392" y="2779776"/>
-            <a:ext cx="4882896" cy="1389888"/>
+            <a:off x="7602321" y="4526280"/>
+            <a:ext cx="3845966" cy="914400"/>
           </a:xfrm>
           <a:prstGeom prst="rect">
             <a:avLst/>
@@ -12207,48 +14869,13 @@
           <a:p>
             <a:pPr algn="l"/>
             <a:r>
-              <a:rPr sz="1500" b="0" i="0">
+              <a:rPr sz="1450" b="0" i="0">
                 <a:solidFill>
                   <a:srgbClr val="14141C"/>
                 </a:solidFill>
                 <a:latin typeface="Geist"/>
               </a:rPr>
-              <a:t>Estrogen use and good memory also rise together. But being HEALTHIER and better-off to start with can drive both -- so the pill itself may summon nothing.</a:t>
-            </a:r>
-          </a:p>
-        </p:txBody>
-      </p:sp>
-      <p:sp>
-        <p:nvSpPr>
-          <p:cNvPr id="16" name="TextBox 15"/>
-          <p:cNvSpPr txBox="1"/>
-          <p:nvPr/>
-        </p:nvSpPr>
-        <p:spPr>
-          <a:xfrm>
-            <a:off x="457200" y="4681728"/>
-            <a:ext cx="11247120" cy="640080"/>
-          </a:xfrm>
-          <a:prstGeom prst="rect">
-            <a:avLst/>
-          </a:prstGeom>
-          <a:noFill/>
-        </p:spPr>
-        <p:txBody>
-          <a:bodyPr wrap="square" anchor="ctr" lIns="0" rIns="0" tIns="0" bIns="0">
-            <a:spAutoFit/>
-          </a:bodyPr>
-          <a:lstStyle/>
-          <a:p>
-            <a:pPr algn="l"/>
-            <a:r>
-              <a:rPr sz="1700" b="1" i="0">
-                <a:solidFill>
-                  <a:srgbClr val="FF1493"/>
-                </a:solidFill>
-                <a:latin typeface="Geist Mono"/>
-              </a:rPr>
-              <a:t>When two things move together, hunt for the hidden third factor before you believe one caused the other.</a:t>
+              <a:t>only looks like cause. It is a mirage -- confounding, a.k.a. healthy-user bias.</a:t>
             </a:r>
           </a:p>
         </p:txBody>
@@ -12476,7 +15103,7 @@
                 </a:solidFill>
                 <a:latin typeface="Geist Mono"/>
               </a:rPr>
-              <a:t>METHODS</a:t>
+              <a:t>THE DATA</a:t>
             </a:r>
           </a:p>
         </p:txBody>
@@ -12695,7 +15322,7 @@
                 </a:solidFill>
                 <a:latin typeface="Geist Mono"/>
               </a:rPr>
-              <a:t>Does estrogen keep the mind sharp?</a:t>
+              <a:t>Does estrogen keep older women's minds sharp?</a:t>
             </a:r>
           </a:p>
         </p:txBody>
@@ -12836,7 +15463,7 @@
                 </a:solidFill>
                 <a:latin typeface="Geist Mono"/>
               </a:rPr>
-              <a:t>Our data: NHANES women 60 and older</a:t>
+              <a:t>Why NHANES</a:t>
             </a:r>
           </a:p>
         </p:txBody>
@@ -12915,7 +15542,7 @@
                 </a:solidFill>
                 <a:latin typeface="Geist Mono"/>
               </a:rPr>
-              <a:t>Jinchi Wei  ·  Outset  ·  Does estrogen keep the mind sharp?  ·  2026-07-08</a:t>
+              <a:t>Jinchi Wei  ·  Outset  ·  Does estrogen keep older women's minds sharp?  ·  2026-07-08</a:t>
             </a:r>
           </a:p>
         </p:txBody>
@@ -12928,14 +15555,14 @@
         </p:nvSpPr>
         <p:spPr>
           <a:xfrm>
-            <a:off x="457200" y="2468879"/>
-            <a:ext cx="2592324" cy="2377440"/>
+            <a:off x="457200" y="1051560"/>
+            <a:ext cx="2606040" cy="5120640"/>
           </a:xfrm>
           <a:prstGeom prst="rect">
             <a:avLst/>
           </a:prstGeom>
           <a:solidFill>
-            <a:srgbClr val="FAFAFC"/>
+            <a:srgbClr val="FFFFFF"/>
           </a:solidFill>
           <a:ln>
             <a:noFill/>
@@ -12972,8 +15599,8 @@
         </p:nvSpPr>
         <p:spPr>
           <a:xfrm>
-            <a:off x="457200" y="2468879"/>
-            <a:ext cx="2592324" cy="82296"/>
+            <a:off x="457200" y="1051560"/>
+            <a:ext cx="2606040" cy="91440"/>
           </a:xfrm>
           <a:prstGeom prst="rect">
             <a:avLst/>
@@ -13016,8 +15643,8 @@
         </p:nvSpPr>
         <p:spPr>
           <a:xfrm>
-            <a:off x="658368" y="2670048"/>
-            <a:ext cx="2189988" cy="365760"/>
+            <a:off x="658368" y="1554480"/>
+            <a:ext cx="2203704" cy="822960"/>
           </a:xfrm>
           <a:prstGeom prst="rect">
             <a:avLst/>
@@ -13032,9 +15659,9 @@
           <a:p>
             <a:pPr algn="l"/>
             <a:r>
-              <a:rPr sz="1400" b="1" i="0">
-                <a:solidFill>
-                  <a:srgbClr val="0C7A6A"/>
+              <a:rPr sz="1700" b="1" i="0">
+                <a:solidFill>
+                  <a:srgbClr val="40E0D0"/>
                 </a:solidFill>
                 <a:latin typeface="Geist Mono"/>
               </a:rPr>
@@ -13051,8 +15678,8 @@
         </p:nvSpPr>
         <p:spPr>
           <a:xfrm>
-            <a:off x="658368" y="3200400"/>
-            <a:ext cx="2189988" cy="1536192"/>
+            <a:off x="658368" y="2606040"/>
+            <a:ext cx="2203704" cy="3383279"/>
           </a:xfrm>
           <a:prstGeom prst="rect">
             <a:avLst/>
@@ -13067,13 +15694,13 @@
           <a:p>
             <a:pPr algn="l"/>
             <a:r>
-              <a:rPr sz="1400" b="0" i="0">
+              <a:rPr sz="1450" b="0" i="0">
                 <a:solidFill>
                   <a:srgbClr val="14141C"/>
                 </a:solidFill>
                 <a:latin typeface="Geist"/>
               </a:rPr>
-              <a:t>all aged 60 or older, drawn from NHANES 2013-14 -- a real US government health survey, not data we made up.</a:t>
+              <a:t>all age 60+, drawn from the NHANES 2013-14 US national health survey</a:t>
             </a:r>
           </a:p>
         </p:txBody>
@@ -13086,14 +15713,14 @@
         </p:nvSpPr>
         <p:spPr>
           <a:xfrm>
-            <a:off x="3342132" y="2468879"/>
-            <a:ext cx="2592324" cy="2377440"/>
+            <a:off x="3337560" y="1051560"/>
+            <a:ext cx="2606040" cy="5120640"/>
           </a:xfrm>
           <a:prstGeom prst="rect">
             <a:avLst/>
           </a:prstGeom>
           <a:solidFill>
-            <a:srgbClr val="FAFAFC"/>
+            <a:srgbClr val="FFFFFF"/>
           </a:solidFill>
           <a:ln>
             <a:noFill/>
@@ -13130,8 +15757,8 @@
         </p:nvSpPr>
         <p:spPr>
           <a:xfrm>
-            <a:off x="3342132" y="2468879"/>
-            <a:ext cx="2592324" cy="82296"/>
+            <a:off x="3337560" y="1051560"/>
+            <a:ext cx="2606040" cy="91440"/>
           </a:xfrm>
           <a:prstGeom prst="rect">
             <a:avLst/>
@@ -13174,8 +15801,8 @@
         </p:nvSpPr>
         <p:spPr>
           <a:xfrm>
-            <a:off x="3543300" y="2670048"/>
-            <a:ext cx="2189988" cy="365760"/>
+            <a:off x="3538728" y="1554480"/>
+            <a:ext cx="2203704" cy="822960"/>
           </a:xfrm>
           <a:prstGeom prst="rect">
             <a:avLst/>
@@ -13190,7 +15817,7 @@
           <a:p>
             <a:pPr algn="l"/>
             <a:r>
-              <a:rPr sz="1400" b="1" i="0">
+              <a:rPr sz="1700" b="1" i="0">
                 <a:solidFill>
                   <a:srgbClr val="FF1493"/>
                 </a:solidFill>
@@ -13209,8 +15836,8 @@
         </p:nvSpPr>
         <p:spPr>
           <a:xfrm>
-            <a:off x="3543300" y="3200400"/>
-            <a:ext cx="2189988" cy="1536192"/>
+            <a:off x="3538728" y="2606040"/>
+            <a:ext cx="2203704" cy="3383279"/>
           </a:xfrm>
           <a:prstGeom prst="rect">
             <a:avLst/>
@@ -13225,13 +15852,13 @@
           <a:p>
             <a:pPr algn="l"/>
             <a:r>
-              <a:rPr sz="1400" b="0" i="0">
+              <a:rPr sz="1450" b="0" i="0">
                 <a:solidFill>
                   <a:srgbClr val="14141C"/>
                 </a:solidFill>
                 <a:latin typeface="Geist"/>
               </a:rPr>
-              <a:t>whether she ever took female hormones -- a simple yes or no, self-reported by each woman.</a:t>
+              <a:t>whether she ever took female hormones -- the treatment we are studying</a:t>
             </a:r>
           </a:p>
         </p:txBody>
@@ -13244,14 +15871,14 @@
         </p:nvSpPr>
         <p:spPr>
           <a:xfrm>
-            <a:off x="6227064" y="2468879"/>
-            <a:ext cx="2592324" cy="2377440"/>
+            <a:off x="6217920" y="1051560"/>
+            <a:ext cx="2606040" cy="5120640"/>
           </a:xfrm>
           <a:prstGeom prst="rect">
             <a:avLst/>
           </a:prstGeom>
           <a:solidFill>
-            <a:srgbClr val="FAFAFC"/>
+            <a:srgbClr val="FFFFFF"/>
           </a:solidFill>
           <a:ln>
             <a:noFill/>
@@ -13288,8 +15915,8 @@
         </p:nvSpPr>
         <p:spPr>
           <a:xfrm>
-            <a:off x="6227064" y="2468879"/>
-            <a:ext cx="2592324" cy="82296"/>
+            <a:off x="6217920" y="1051560"/>
+            <a:ext cx="2606040" cy="91440"/>
           </a:xfrm>
           <a:prstGeom prst="rect">
             <a:avLst/>
@@ -13332,8 +15959,8 @@
         </p:nvSpPr>
         <p:spPr>
           <a:xfrm>
-            <a:off x="6428231" y="2670048"/>
-            <a:ext cx="2189988" cy="365760"/>
+            <a:off x="6419088" y="1554480"/>
+            <a:ext cx="2203704" cy="822960"/>
           </a:xfrm>
           <a:prstGeom prst="rect">
             <a:avLst/>
@@ -13348,9 +15975,9 @@
           <a:p>
             <a:pPr algn="l"/>
             <a:r>
-              <a:rPr sz="1400" b="1" i="0">
-                <a:solidFill>
-                  <a:srgbClr val="8A6D00"/>
+              <a:rPr sz="1700" b="1" i="0">
+                <a:solidFill>
+                  <a:srgbClr val="F0C840"/>
                 </a:solidFill>
                 <a:latin typeface="Geist Mono"/>
               </a:rPr>
@@ -13367,8 +15994,8 @@
         </p:nvSpPr>
         <p:spPr>
           <a:xfrm>
-            <a:off x="6428231" y="3200400"/>
-            <a:ext cx="2189988" cy="1536192"/>
+            <a:off x="6419088" y="2606040"/>
+            <a:ext cx="2203704" cy="3383279"/>
           </a:xfrm>
           <a:prstGeom prst="rect">
             <a:avLst/>
@@ -13383,13 +16010,13 @@
           <a:p>
             <a:pPr algn="l"/>
             <a:r>
-              <a:rPr sz="1400" b="0" i="0">
+              <a:rPr sz="1450" b="0" i="0">
                 <a:solidFill>
                   <a:srgbClr val="14141C"/>
                 </a:solidFill>
                 <a:latin typeface="Geist"/>
               </a:rPr>
-              <a:t>her age, education, and family income -- the confounders we have to account for.</a:t>
+              <a:t>age, education, and family income -- the confounders we must adjust for</a:t>
             </a:r>
           </a:p>
         </p:txBody>
@@ -13402,14 +16029,14 @@
         </p:nvSpPr>
         <p:spPr>
           <a:xfrm>
-            <a:off x="9111996" y="2468879"/>
-            <a:ext cx="2592324" cy="2377440"/>
+            <a:off x="9098280" y="1051560"/>
+            <a:ext cx="2606040" cy="5120640"/>
           </a:xfrm>
           <a:prstGeom prst="rect">
             <a:avLst/>
           </a:prstGeom>
           <a:solidFill>
-            <a:srgbClr val="FAFAFC"/>
+            <a:srgbClr val="FFFFFF"/>
           </a:solidFill>
           <a:ln>
             <a:noFill/>
@@ -13446,8 +16073,8 @@
         </p:nvSpPr>
         <p:spPr>
           <a:xfrm>
-            <a:off x="9111996" y="2468879"/>
-            <a:ext cx="2592324" cy="82296"/>
+            <a:off x="9098280" y="1051560"/>
+            <a:ext cx="2606040" cy="91440"/>
           </a:xfrm>
           <a:prstGeom prst="rect">
             <a:avLst/>
@@ -13490,8 +16117,8 @@
         </p:nvSpPr>
         <p:spPr>
           <a:xfrm>
-            <a:off x="9313164" y="2670048"/>
-            <a:ext cx="2189988" cy="365760"/>
+            <a:off x="9299448" y="1554480"/>
+            <a:ext cx="2203704" cy="822960"/>
           </a:xfrm>
           <a:prstGeom prst="rect">
             <a:avLst/>
@@ -13506,7 +16133,7 @@
           <a:p>
             <a:pPr algn="l"/>
             <a:r>
-              <a:rPr sz="1400" b="1" i="0">
+              <a:rPr sz="1700" b="1" i="0">
                 <a:solidFill>
                   <a:srgbClr val="8A2BE2"/>
                 </a:solidFill>
@@ -13525,8 +16152,8 @@
         </p:nvSpPr>
         <p:spPr>
           <a:xfrm>
-            <a:off x="9313164" y="3200400"/>
-            <a:ext cx="2189988" cy="1536192"/>
+            <a:off x="9299448" y="2606040"/>
+            <a:ext cx="2203704" cy="3383279"/>
           </a:xfrm>
           <a:prstGeom prst="rect">
             <a:avLst/>
@@ -13541,13 +16168,13 @@
           <a:p>
             <a:pPr algn="l"/>
             <a:r>
-              <a:rPr sz="1400" b="0" i="0">
+              <a:rPr sz="1450" b="0" i="0">
                 <a:solidFill>
                   <a:srgbClr val="14141C"/>
                 </a:solidFill>
                 <a:latin typeface="Geist"/>
               </a:rPr>
-              <a:t>a digit-symbol attention test; higher = sharper. Our model tries to flag the weaker-scoring half.</a:t>
+              <a:t>a digit-symbol test; higher is sharper. We study who lands in the weaker half</a:t>
             </a:r>
           </a:p>
         </p:txBody>
@@ -13688,7 +16315,7 @@
                 </a:solidFill>
                 <a:latin typeface="Geist Mono"/>
               </a:rPr>
-              <a:t>The one question we can actually ask</a:t>
+              <a:t>The honest question we can actually ask</a:t>
             </a:r>
           </a:p>
         </p:txBody>
@@ -13767,7 +16394,7 @@
                 </a:solidFill>
                 <a:latin typeface="Geist Mono"/>
               </a:rPr>
-              <a:t>Jinchi Wei  ·  Outset  ·  Does estrogen keep the mind sharp?  ·  2026-07-08</a:t>
+              <a:t>Jinchi Wei  ·  Outset  ·  Does estrogen keep older women's minds sharp?  ·  2026-07-08</a:t>
             </a:r>
           </a:p>
         </p:txBody>
@@ -13796,13 +16423,13 @@
           <a:p>
             <a:pPr algn="l"/>
             <a:r>
-              <a:rPr sz="1700" b="0" i="0">
+              <a:rPr sz="1800" b="0" i="0">
                 <a:solidFill>
                   <a:srgbClr val="14141C"/>
                 </a:solidFill>
                 <a:latin typeface="Geist"/>
               </a:rPr>
-              <a:t>We cannot randomly ASSIGN estrogen in a survey -- so we can never prove cause here. But we can still ask a narrower, honest question:</a:t>
+              <a:t>We cannot flip a coin to assign estrogen in a survey -- so we cannot prove cause. Instead we ask a narrower, honest question:</a:t>
             </a:r>
           </a:p>
         </p:txBody>
@@ -13815,8 +16442,8 @@
         </p:nvSpPr>
         <p:spPr>
           <a:xfrm>
-            <a:off x="457200" y="1737360"/>
-            <a:ext cx="11247120" cy="1005840"/>
+            <a:off x="457200" y="1783080"/>
+            <a:ext cx="11247120" cy="1051560"/>
           </a:xfrm>
           <a:prstGeom prst="rect">
             <a:avLst/>
@@ -13859,8 +16486,8 @@
         </p:nvSpPr>
         <p:spPr>
           <a:xfrm>
-            <a:off x="457200" y="1737360"/>
-            <a:ext cx="128016" cy="1005840"/>
+            <a:off x="457200" y="1783080"/>
+            <a:ext cx="128016" cy="1051560"/>
           </a:xfrm>
           <a:prstGeom prst="rect">
             <a:avLst/>
@@ -13903,8 +16530,8 @@
         </p:nvSpPr>
         <p:spPr>
           <a:xfrm>
-            <a:off x="868680" y="1737360"/>
-            <a:ext cx="10561320" cy="1005840"/>
+            <a:off x="822960" y="1783080"/>
+            <a:ext cx="10607040" cy="1051560"/>
           </a:xfrm>
           <a:prstGeom prst="rect">
             <a:avLst/>
@@ -13938,8 +16565,8 @@
         </p:nvSpPr>
         <p:spPr>
           <a:xfrm>
-            <a:off x="457200" y="2971800"/>
-            <a:ext cx="5394960" cy="1600200"/>
+            <a:off x="457200" y="3154680"/>
+            <a:ext cx="5440680" cy="2560319"/>
           </a:xfrm>
           <a:prstGeom prst="rect">
             <a:avLst/>
@@ -13982,8 +16609,8 @@
         </p:nvSpPr>
         <p:spPr>
           <a:xfrm>
-            <a:off x="457200" y="2971800"/>
-            <a:ext cx="5394960" cy="82296"/>
+            <a:off x="457200" y="3154680"/>
+            <a:ext cx="5440680" cy="54864"/>
           </a:xfrm>
           <a:prstGeom prst="rect">
             <a:avLst/>
@@ -14026,8 +16653,8 @@
         </p:nvSpPr>
         <p:spPr>
           <a:xfrm>
-            <a:off x="713232" y="3154680"/>
-            <a:ext cx="4882896" cy="365760"/>
+            <a:off x="621792" y="3246120"/>
+            <a:ext cx="5111496" cy="384048"/>
           </a:xfrm>
           <a:prstGeom prst="rect">
             <a:avLst/>
@@ -14042,7 +16669,7 @@
           <a:p>
             <a:pPr algn="l"/>
             <a:r>
-              <a:rPr sz="1500" b="1" i="0">
+              <a:rPr sz="1400" b="1" i="0">
                 <a:solidFill>
                   <a:srgbClr val="FF1493"/>
                 </a:solidFill>
@@ -14061,8 +16688,8 @@
         </p:nvSpPr>
         <p:spPr>
           <a:xfrm>
-            <a:off x="713232" y="3648456"/>
-            <a:ext cx="4882896" cy="804672"/>
+            <a:off x="621792" y="3794760"/>
+            <a:ext cx="5111496" cy="1828799"/>
           </a:xfrm>
           <a:prstGeom prst="rect">
             <a:avLst/>
@@ -14077,13 +16704,13 @@
           <a:p>
             <a:pPr algn="l"/>
             <a:r>
-              <a:rPr sz="1400" b="0" i="0">
+              <a:rPr sz="1200" b="0" i="0">
                 <a:solidFill>
                   <a:srgbClr val="14141C"/>
                 </a:solidFill>
                 <a:latin typeface="Geist"/>
               </a:rPr>
-              <a:t>Estrogen's effect measured all by itself -- ignoring everything else about the woman.</a:t>
+              <a:t>Estrogen's effect all by itself -- ignoring everything else about the woman.</a:t>
             </a:r>
           </a:p>
         </p:txBody>
@@ -14096,8 +16723,8 @@
         </p:nvSpPr>
         <p:spPr>
           <a:xfrm>
-            <a:off x="6309360" y="2971800"/>
-            <a:ext cx="5394960" cy="1600200"/>
+            <a:off x="6263640" y="3154680"/>
+            <a:ext cx="5440680" cy="2560319"/>
           </a:xfrm>
           <a:prstGeom prst="rect">
             <a:avLst/>
@@ -14140,8 +16767,8 @@
         </p:nvSpPr>
         <p:spPr>
           <a:xfrm>
-            <a:off x="6309360" y="2971800"/>
-            <a:ext cx="5394960" cy="82296"/>
+            <a:off x="6263640" y="3154680"/>
+            <a:ext cx="5440680" cy="54864"/>
           </a:xfrm>
           <a:prstGeom prst="rect">
             <a:avLst/>
@@ -14184,8 +16811,8 @@
         </p:nvSpPr>
         <p:spPr>
           <a:xfrm>
-            <a:off x="6565392" y="3154680"/>
-            <a:ext cx="4882896" cy="365760"/>
+            <a:off x="6428232" y="3246120"/>
+            <a:ext cx="5111496" cy="384048"/>
           </a:xfrm>
           <a:prstGeom prst="rect">
             <a:avLst/>
@@ -14200,9 +16827,9 @@
           <a:p>
             <a:pPr algn="l"/>
             <a:r>
-              <a:rPr sz="1500" b="1" i="0">
-                <a:solidFill>
-                  <a:srgbClr val="0C7A6A"/>
+              <a:rPr sz="1400" b="1" i="0">
+                <a:solidFill>
+                  <a:srgbClr val="40E0D0"/>
                 </a:solidFill>
                 <a:latin typeface="Geist Mono"/>
               </a:rPr>
@@ -14219,8 +16846,8 @@
         </p:nvSpPr>
         <p:spPr>
           <a:xfrm>
-            <a:off x="6565392" y="3648456"/>
-            <a:ext cx="4882896" cy="804672"/>
+            <a:off x="6428232" y="3794760"/>
+            <a:ext cx="5111496" cy="1828799"/>
           </a:xfrm>
           <a:prstGeom prst="rect">
             <a:avLst/>
@@ -14235,13 +16862,13 @@
           <a:p>
             <a:pPr algn="l"/>
             <a:r>
-              <a:rPr sz="1400" b="0" i="0">
+              <a:rPr sz="1200" b="0" i="0">
                 <a:solidFill>
                   <a:srgbClr val="14141C"/>
                 </a:solidFill>
                 <a:latin typeface="Geist"/>
               </a:rPr>
-              <a:t>Estrogen's effect AFTER we account for her age, education, and income.</a:t>
+              <a:t>Estrogen's effect AFTER accounting for age, education, and income.</a:t>
             </a:r>
           </a:p>
         </p:txBody>
@@ -14254,8 +16881,8 @@
         </p:nvSpPr>
         <p:spPr>
           <a:xfrm>
-            <a:off x="457200" y="4773168"/>
-            <a:ext cx="11247120" cy="502920"/>
+            <a:off x="457200" y="5852160"/>
+            <a:ext cx="11247120" cy="457200"/>
           </a:xfrm>
           <a:prstGeom prst="rect">
             <a:avLst/>
@@ -14276,7 +16903,7 @@
                 </a:solidFill>
                 <a:latin typeface="Geist"/>
               </a:rPr>
-              <a:t>If the effect SHRINKS from crude to adjusted, the exciting headline was mostly confounding -- not real cause.</a:t>
+              <a:t>If the effect shrinks from crude to adjusted, the headline was mostly confounding -- not cause.</a:t>
             </a:r>
           </a:p>
         </p:txBody>
